--- a/MP2526_Verdediging.pptx
+++ b/MP2526_Verdediging.pptx
@@ -5,7 +5,7 @@
     <p:sldMasterId id="2147483648" r:id="rId1"/>
   </p:sldMasterIdLst>
   <p:notesMasterIdLst>
-    <p:notesMasterId r:id="rId51"/>
+    <p:notesMasterId r:id="rId50"/>
   </p:notesMasterIdLst>
   <p:sldIdLst>
     <p:sldId id="256" r:id="rId2"/>
@@ -29,39 +29,38 @@
     <p:sldId id="277" r:id="rId20"/>
     <p:sldId id="278" r:id="rId21"/>
     <p:sldId id="279" r:id="rId22"/>
-    <p:sldId id="280" r:id="rId23"/>
-    <p:sldId id="281" r:id="rId24"/>
-    <p:sldId id="282" r:id="rId25"/>
-    <p:sldId id="283" r:id="rId26"/>
-    <p:sldId id="284" r:id="rId27"/>
-    <p:sldId id="285" r:id="rId28"/>
-    <p:sldId id="286" r:id="rId29"/>
-    <p:sldId id="287" r:id="rId30"/>
-    <p:sldId id="288" r:id="rId31"/>
-    <p:sldId id="289" r:id="rId32"/>
-    <p:sldId id="300" r:id="rId33"/>
-    <p:sldId id="301" r:id="rId34"/>
-    <p:sldId id="290" r:id="rId35"/>
-    <p:sldId id="291" r:id="rId36"/>
-    <p:sldId id="292" r:id="rId37"/>
-    <p:sldId id="293" r:id="rId38"/>
-    <p:sldId id="294" r:id="rId39"/>
-    <p:sldId id="295" r:id="rId40"/>
-    <p:sldId id="296" r:id="rId41"/>
-    <p:sldId id="297" r:id="rId42"/>
-    <p:sldId id="298" r:id="rId43"/>
-    <p:sldId id="299" r:id="rId44"/>
-    <p:sldId id="302" r:id="rId45"/>
-    <p:sldId id="303" r:id="rId46"/>
-    <p:sldId id="304" r:id="rId47"/>
-    <p:sldId id="305" r:id="rId48"/>
-    <p:sldId id="306" r:id="rId49"/>
-    <p:sldId id="307" r:id="rId50"/>
+    <p:sldId id="281" r:id="rId23"/>
+    <p:sldId id="282" r:id="rId24"/>
+    <p:sldId id="283" r:id="rId25"/>
+    <p:sldId id="284" r:id="rId26"/>
+    <p:sldId id="285" r:id="rId27"/>
+    <p:sldId id="286" r:id="rId28"/>
+    <p:sldId id="287" r:id="rId29"/>
+    <p:sldId id="288" r:id="rId30"/>
+    <p:sldId id="289" r:id="rId31"/>
+    <p:sldId id="300" r:id="rId32"/>
+    <p:sldId id="301" r:id="rId33"/>
+    <p:sldId id="290" r:id="rId34"/>
+    <p:sldId id="291" r:id="rId35"/>
+    <p:sldId id="292" r:id="rId36"/>
+    <p:sldId id="293" r:id="rId37"/>
+    <p:sldId id="294" r:id="rId38"/>
+    <p:sldId id="295" r:id="rId39"/>
+    <p:sldId id="296" r:id="rId40"/>
+    <p:sldId id="297" r:id="rId41"/>
+    <p:sldId id="298" r:id="rId42"/>
+    <p:sldId id="299" r:id="rId43"/>
+    <p:sldId id="302" r:id="rId44"/>
+    <p:sldId id="303" r:id="rId45"/>
+    <p:sldId id="304" r:id="rId46"/>
+    <p:sldId id="305" r:id="rId47"/>
+    <p:sldId id="306" r:id="rId48"/>
+    <p:sldId id="307" r:id="rId49"/>
   </p:sldIdLst>
   <p:sldSz cx="12192000" cy="6858000"/>
   <p:notesSz cx="6858000" cy="9144000"/>
   <p:custDataLst>
-    <p:tags r:id="rId52"/>
+    <p:tags r:id="rId51"/>
   </p:custDataLst>
   <p:defaultTextStyle>
     <a:defPPr>
@@ -298,7 +297,7 @@
               <a:pPr>
                 <a:defRPr/>
               </a:pPr>
-              <a:t>25-1-2026</a:t>
+              <a:t>26-1-2026</a:t>
             </a:fld>
             <a:endParaRPr lang="nl-NL"/>
           </a:p>
@@ -1992,7 +1991,7 @@
               <a:pPr>
                 <a:defRPr/>
               </a:pPr>
-              <a:t>25/01/2026</a:t>
+              <a:t>26/01/2026</a:t>
             </a:fld>
             <a:endParaRPr lang="nl-BE"/>
           </a:p>
@@ -5787,570 +5786,6 @@
         <p:cNvPr id="1" name="">
           <a:extLst>
             <a:ext uri="{FF2B5EF4-FFF2-40B4-BE49-F238E27FC236}">
-              <a16:creationId xmlns:a16="http://schemas.microsoft.com/office/drawing/2014/main" id="{4A1C1910-3409-0B65-48ED-16D942F1C576}"/>
-            </a:ext>
-          </a:extLst>
-        </p:cNvPr>
-        <p:cNvGrpSpPr/>
-        <p:nvPr/>
-      </p:nvGrpSpPr>
-      <p:grpSpPr>
-        <a:xfrm>
-          <a:off x="0" y="0"/>
-          <a:ext cx="0" cy="0"/>
-          <a:chOff x="0" y="0"/>
-          <a:chExt cx="0" cy="0"/>
-        </a:xfrm>
-      </p:grpSpPr>
-      <p:sp>
-        <p:nvSpPr>
-          <p:cNvPr id="4" name="Tijdelijke aanduiding voor inhoud 3">
-            <a:extLst>
-              <a:ext uri="{FF2B5EF4-FFF2-40B4-BE49-F238E27FC236}">
-                <a16:creationId xmlns:a16="http://schemas.microsoft.com/office/drawing/2014/main" id="{7E02AB51-FD54-A637-C23C-0B9D9E0118E1}"/>
-              </a:ext>
-            </a:extLst>
-          </p:cNvPr>
-          <p:cNvSpPr>
-            <a:spLocks noGrp="1"/>
-          </p:cNvSpPr>
-          <p:nvPr>
-            <p:ph sz="half" idx="1"/>
-          </p:nvPr>
-        </p:nvSpPr>
-        <p:spPr>
-          <a:xfrm>
-            <a:off x="609600" y="764704"/>
-            <a:ext cx="10598968" cy="5145435"/>
-          </a:xfrm>
-        </p:spPr>
-        <p:txBody>
-          <a:bodyPr/>
-          <a:lstStyle/>
-          <a:p>
-            <a:pPr lvl="1"/>
-            <a:r>
-              <a:rPr lang="nl-BE" sz="2400" dirty="0"/>
-              <a:t>Statussen:</a:t>
-            </a:r>
-          </a:p>
-          <a:p>
-            <a:pPr lvl="2"/>
-            <a:r>
-              <a:rPr lang="nl-BE" sz="2200" dirty="0" err="1"/>
-              <a:t>Weakness</a:t>
-            </a:r>
-            <a:endParaRPr lang="nl-BE" sz="2200" dirty="0"/>
-          </a:p>
-          <a:p>
-            <a:pPr lvl="2"/>
-            <a:r>
-              <a:rPr lang="nl-BE" sz="2200" dirty="0" err="1"/>
-              <a:t>Weakness</a:t>
-            </a:r>
-            <a:r>
-              <a:rPr lang="nl-BE" sz="2200" dirty="0"/>
-              <a:t> Under Review</a:t>
-            </a:r>
-          </a:p>
-          <a:p>
-            <a:pPr lvl="2"/>
-            <a:r>
-              <a:rPr lang="nl-BE" sz="2200" dirty="0" err="1"/>
-              <a:t>Assumption</a:t>
-            </a:r>
-            <a:r>
-              <a:rPr lang="nl-BE" sz="2200" dirty="0"/>
-              <a:t> Under Review</a:t>
-            </a:r>
-          </a:p>
-          <a:p>
-            <a:pPr lvl="2"/>
-            <a:r>
-              <a:rPr lang="nl-BE" sz="2200" dirty="0" err="1"/>
-              <a:t>Verified</a:t>
-            </a:r>
-            <a:r>
-              <a:rPr lang="nl-BE" sz="2200" dirty="0"/>
-              <a:t> </a:t>
-            </a:r>
-            <a:r>
-              <a:rPr lang="nl-BE" sz="2200" dirty="0" err="1"/>
-              <a:t>Assumption</a:t>
-            </a:r>
-            <a:endParaRPr lang="nl-BE" sz="2200" dirty="0"/>
-          </a:p>
-          <a:p>
-            <a:pPr lvl="2"/>
-            <a:endParaRPr lang="nl-BE" sz="2200" dirty="0"/>
-          </a:p>
-          <a:p>
-            <a:pPr lvl="1"/>
-            <a:r>
-              <a:rPr lang="nl-BE" sz="2400" dirty="0"/>
-              <a:t>Schild-icoon weergave</a:t>
-            </a:r>
-          </a:p>
-          <a:p>
-            <a:pPr lvl="2"/>
-            <a:r>
-              <a:rPr lang="nl-BE" sz="2200" dirty="0"/>
-              <a:t>Associatie beveiliging</a:t>
-            </a:r>
-          </a:p>
-          <a:p>
-            <a:pPr lvl="2"/>
-            <a:endParaRPr lang="nl-BE" sz="2200" dirty="0"/>
-          </a:p>
-          <a:p>
-            <a:pPr lvl="1"/>
-            <a:r>
-              <a:rPr lang="nl-BE" sz="2400" dirty="0"/>
-              <a:t>Context afhankelijke selectie</a:t>
-            </a:r>
-          </a:p>
-        </p:txBody>
-      </p:sp>
-      <p:sp>
-        <p:nvSpPr>
-          <p:cNvPr id="6" name="Titel 5">
-            <a:extLst>
-              <a:ext uri="{FF2B5EF4-FFF2-40B4-BE49-F238E27FC236}">
-                <a16:creationId xmlns:a16="http://schemas.microsoft.com/office/drawing/2014/main" id="{C7BBF47D-3F7B-85C9-DE3D-601D728F7E31}"/>
-              </a:ext>
-            </a:extLst>
-          </p:cNvPr>
-          <p:cNvSpPr>
-            <a:spLocks noGrp="1"/>
-          </p:cNvSpPr>
-          <p:nvPr>
-            <p:ph type="title" idx="4294967295"/>
-          </p:nvPr>
-        </p:nvSpPr>
-        <p:spPr/>
-        <p:txBody>
-          <a:bodyPr/>
-          <a:lstStyle/>
-          <a:p>
-            <a:r>
-              <a:rPr lang="nl-BE" dirty="0"/>
-              <a:t>Statusiconen</a:t>
-            </a:r>
-          </a:p>
-        </p:txBody>
-      </p:sp>
-      <p:grpSp>
-        <p:nvGrpSpPr>
-          <p:cNvPr id="2" name="Groep 1">
-            <a:extLst>
-              <a:ext uri="{FF2B5EF4-FFF2-40B4-BE49-F238E27FC236}">
-                <a16:creationId xmlns:a16="http://schemas.microsoft.com/office/drawing/2014/main" id="{19164D79-2CE5-F0B8-DA3E-396057F84866}"/>
-              </a:ext>
-            </a:extLst>
-          </p:cNvPr>
-          <p:cNvGrpSpPr/>
-          <p:nvPr/>
-        </p:nvGrpSpPr>
-        <p:grpSpPr>
-          <a:xfrm>
-            <a:off x="6456040" y="1268760"/>
-            <a:ext cx="5052611" cy="3096344"/>
-            <a:chOff x="0" y="0"/>
-            <a:chExt cx="2971800" cy="1821180"/>
-          </a:xfrm>
-        </p:grpSpPr>
-        <p:pic>
-          <p:nvPicPr>
-            <p:cNvPr id="3" name="Afbeelding 2">
-              <a:extLst>
-                <a:ext uri="{FF2B5EF4-FFF2-40B4-BE49-F238E27FC236}">
-                  <a16:creationId xmlns:a16="http://schemas.microsoft.com/office/drawing/2014/main" id="{09DAC379-2DFD-9209-BAD4-C4C6DD304B81}"/>
-                </a:ext>
-              </a:extLst>
-            </p:cNvPr>
-            <p:cNvPicPr>
-              <a:picLocks noChangeAspect="1"/>
-            </p:cNvPicPr>
-            <p:nvPr/>
-          </p:nvPicPr>
-          <p:blipFill>
-            <a:blip r:embed="rId2">
-              <a:extLst>
-                <a:ext uri="{28A0092B-C50C-407E-A947-70E740481C1C}">
-                  <a14:useLocalDpi xmlns:a14="http://schemas.microsoft.com/office/drawing/2010/main" val="0"/>
-                </a:ext>
-              </a:extLst>
-            </a:blip>
-            <a:srcRect/>
-            <a:stretch/>
-          </p:blipFill>
-          <p:spPr>
-            <a:xfrm>
-              <a:off x="2133600" y="7621"/>
-              <a:ext cx="838200" cy="784859"/>
-            </a:xfrm>
-            <a:prstGeom prst="rect">
-              <a:avLst/>
-            </a:prstGeom>
-          </p:spPr>
-        </p:pic>
-        <p:pic>
-          <p:nvPicPr>
-            <p:cNvPr id="5" name="Afbeelding 4">
-              <a:extLst>
-                <a:ext uri="{FF2B5EF4-FFF2-40B4-BE49-F238E27FC236}">
-                  <a16:creationId xmlns:a16="http://schemas.microsoft.com/office/drawing/2014/main" id="{FAF6D147-30ED-0633-76C3-6615A2C0D573}"/>
-                </a:ext>
-              </a:extLst>
-            </p:cNvPr>
-            <p:cNvPicPr>
-              <a:picLocks noChangeAspect="1"/>
-            </p:cNvPicPr>
-            <p:nvPr/>
-          </p:nvPicPr>
-          <p:blipFill>
-            <a:blip r:embed="rId3">
-              <a:extLst>
-                <a:ext uri="{28A0092B-C50C-407E-A947-70E740481C1C}">
-                  <a14:useLocalDpi xmlns:a14="http://schemas.microsoft.com/office/drawing/2010/main" val="0"/>
-                </a:ext>
-              </a:extLst>
-            </a:blip>
-            <a:srcRect/>
-            <a:stretch/>
-          </p:blipFill>
-          <p:spPr>
-            <a:xfrm>
-              <a:off x="304800" y="13879"/>
-              <a:ext cx="822960" cy="749481"/>
-            </a:xfrm>
-            <a:prstGeom prst="rect">
-              <a:avLst/>
-            </a:prstGeom>
-          </p:spPr>
-        </p:pic>
-        <p:pic>
-          <p:nvPicPr>
-            <p:cNvPr id="7" name="Afbeelding 6" descr="Afbeelding met schermopname, clipart, ontwerp&#10;&#10;Door AI gegenereerde inhoud is mogelijk onjuist.">
-              <a:extLst>
-                <a:ext uri="{FF2B5EF4-FFF2-40B4-BE49-F238E27FC236}">
-                  <a16:creationId xmlns:a16="http://schemas.microsoft.com/office/drawing/2014/main" id="{03780566-E1F3-4AB4-21F2-E05133D4B4D1}"/>
-                </a:ext>
-              </a:extLst>
-            </p:cNvPr>
-            <p:cNvPicPr>
-              <a:picLocks noChangeAspect="1"/>
-            </p:cNvPicPr>
-            <p:nvPr/>
-          </p:nvPicPr>
-          <p:blipFill>
-            <a:blip r:embed="rId4">
-              <a:extLst>
-                <a:ext uri="{28A0092B-C50C-407E-A947-70E740481C1C}">
-                  <a14:useLocalDpi xmlns:a14="http://schemas.microsoft.com/office/drawing/2010/main" val="0"/>
-                </a:ext>
-              </a:extLst>
-            </a:blip>
-            <a:stretch>
-              <a:fillRect/>
-            </a:stretch>
-          </p:blipFill>
-          <p:spPr>
-            <a:xfrm>
-              <a:off x="2125980" y="1051560"/>
-              <a:ext cx="838200" cy="769620"/>
-            </a:xfrm>
-            <a:prstGeom prst="rect">
-              <a:avLst/>
-            </a:prstGeom>
-          </p:spPr>
-        </p:pic>
-        <p:pic>
-          <p:nvPicPr>
-            <p:cNvPr id="8" name="Afbeelding 7" descr="Afbeelding met schermopname, diagram, symbool, ontwerp&#10;&#10;Door AI gegenereerde inhoud is mogelijk onjuist.">
-              <a:extLst>
-                <a:ext uri="{FF2B5EF4-FFF2-40B4-BE49-F238E27FC236}">
-                  <a16:creationId xmlns:a16="http://schemas.microsoft.com/office/drawing/2014/main" id="{4F53F89E-36C4-7BD5-EF72-13889B6A59A0}"/>
-                </a:ext>
-              </a:extLst>
-            </p:cNvPr>
-            <p:cNvPicPr>
-              <a:picLocks noChangeAspect="1"/>
-            </p:cNvPicPr>
-            <p:nvPr/>
-          </p:nvPicPr>
-          <p:blipFill>
-            <a:blip r:embed="rId5">
-              <a:extLst>
-                <a:ext uri="{28A0092B-C50C-407E-A947-70E740481C1C}">
-                  <a14:useLocalDpi xmlns:a14="http://schemas.microsoft.com/office/drawing/2010/main" val="0"/>
-                </a:ext>
-              </a:extLst>
-            </a:blip>
-            <a:stretch>
-              <a:fillRect/>
-            </a:stretch>
-          </p:blipFill>
-          <p:spPr>
-            <a:xfrm>
-              <a:off x="304800" y="1051560"/>
-              <a:ext cx="800100" cy="762000"/>
-            </a:xfrm>
-            <a:prstGeom prst="rect">
-              <a:avLst/>
-            </a:prstGeom>
-          </p:spPr>
-        </p:pic>
-        <p:sp>
-          <p:nvSpPr>
-            <p:cNvPr id="9" name="Tekstvak 2">
-              <a:extLst>
-                <a:ext uri="{FF2B5EF4-FFF2-40B4-BE49-F238E27FC236}">
-                  <a16:creationId xmlns:a16="http://schemas.microsoft.com/office/drawing/2014/main" id="{6FDD2EEB-A573-89F1-4F83-DA55DE0DE794}"/>
-                </a:ext>
-              </a:extLst>
-            </p:cNvPr>
-            <p:cNvSpPr txBox="1">
-              <a:spLocks noChangeArrowheads="1"/>
-            </p:cNvSpPr>
-            <p:nvPr/>
-          </p:nvSpPr>
-          <p:spPr bwMode="auto">
-            <a:xfrm>
-              <a:off x="7620" y="7620"/>
-              <a:ext cx="335280" cy="342900"/>
-            </a:xfrm>
-            <a:prstGeom prst="rect">
-              <a:avLst/>
-            </a:prstGeom>
-            <a:noFill/>
-            <a:ln w="9525">
-              <a:noFill/>
-              <a:miter lim="800000"/>
-              <a:headEnd/>
-              <a:tailEnd/>
-            </a:ln>
-          </p:spPr>
-          <p:txBody>
-            <a:bodyPr rot="0" vert="horz" wrap="square" lIns="91440" tIns="45720" rIns="91440" bIns="45720" anchor="t" anchorCtr="0">
-              <a:noAutofit/>
-            </a:bodyPr>
-            <a:lstStyle/>
-            <a:p>
-              <a:pPr>
-                <a:lnSpc>
-                  <a:spcPct val="115000"/>
-                </a:lnSpc>
-                <a:spcAft>
-                  <a:spcPts val="800"/>
-                </a:spcAft>
-                <a:buNone/>
-              </a:pPr>
-              <a:r>
-                <a:rPr lang="nl-BE" sz="1200" kern="100">
-                  <a:effectLst/>
-                  <a:latin typeface="Aptos" panose="020B0004020202020204" pitchFamily="34" charset="0"/>
-                  <a:ea typeface="Aptos" panose="020B0004020202020204" pitchFamily="34" charset="0"/>
-                  <a:cs typeface="Times New Roman" panose="02020603050405020304" pitchFamily="18" charset="0"/>
-                </a:rPr>
-                <a:t>a)</a:t>
-              </a:r>
-            </a:p>
-          </p:txBody>
-        </p:sp>
-        <p:sp>
-          <p:nvSpPr>
-            <p:cNvPr id="10" name="Tekstvak 2">
-              <a:extLst>
-                <a:ext uri="{FF2B5EF4-FFF2-40B4-BE49-F238E27FC236}">
-                  <a16:creationId xmlns:a16="http://schemas.microsoft.com/office/drawing/2014/main" id="{E7C18BD6-A3B2-E9C2-A18A-EAEA53A5AC6B}"/>
-                </a:ext>
-              </a:extLst>
-            </p:cNvPr>
-            <p:cNvSpPr txBox="1">
-              <a:spLocks noChangeArrowheads="1"/>
-            </p:cNvSpPr>
-            <p:nvPr/>
-          </p:nvSpPr>
-          <p:spPr bwMode="auto">
-            <a:xfrm>
-              <a:off x="1828800" y="0"/>
-              <a:ext cx="335280" cy="342900"/>
-            </a:xfrm>
-            <a:prstGeom prst="rect">
-              <a:avLst/>
-            </a:prstGeom>
-            <a:noFill/>
-            <a:ln w="9525">
-              <a:noFill/>
-              <a:miter lim="800000"/>
-              <a:headEnd/>
-              <a:tailEnd/>
-            </a:ln>
-          </p:spPr>
-          <p:txBody>
-            <a:bodyPr rot="0" vert="horz" wrap="square" lIns="91440" tIns="45720" rIns="91440" bIns="45720" anchor="t" anchorCtr="0">
-              <a:noAutofit/>
-            </a:bodyPr>
-            <a:lstStyle/>
-            <a:p>
-              <a:pPr>
-                <a:lnSpc>
-                  <a:spcPct val="115000"/>
-                </a:lnSpc>
-                <a:spcAft>
-                  <a:spcPts val="800"/>
-                </a:spcAft>
-                <a:buNone/>
-              </a:pPr>
-              <a:r>
-                <a:rPr lang="nl-BE" sz="1200" kern="100">
-                  <a:effectLst/>
-                  <a:latin typeface="Aptos" panose="020B0004020202020204" pitchFamily="34" charset="0"/>
-                  <a:ea typeface="Aptos" panose="020B0004020202020204" pitchFamily="34" charset="0"/>
-                  <a:cs typeface="Times New Roman" panose="02020603050405020304" pitchFamily="18" charset="0"/>
-                </a:rPr>
-                <a:t>b)</a:t>
-              </a:r>
-            </a:p>
-          </p:txBody>
-        </p:sp>
-        <p:sp>
-          <p:nvSpPr>
-            <p:cNvPr id="11" name="Tekstvak 2">
-              <a:extLst>
-                <a:ext uri="{FF2B5EF4-FFF2-40B4-BE49-F238E27FC236}">
-                  <a16:creationId xmlns:a16="http://schemas.microsoft.com/office/drawing/2014/main" id="{E023DE10-13AE-DC0B-304B-F9F38C22B874}"/>
-                </a:ext>
-              </a:extLst>
-            </p:cNvPr>
-            <p:cNvSpPr txBox="1">
-              <a:spLocks noChangeArrowheads="1"/>
-            </p:cNvSpPr>
-            <p:nvPr/>
-          </p:nvSpPr>
-          <p:spPr bwMode="auto">
-            <a:xfrm>
-              <a:off x="0" y="1051560"/>
-              <a:ext cx="335280" cy="342900"/>
-            </a:xfrm>
-            <a:prstGeom prst="rect">
-              <a:avLst/>
-            </a:prstGeom>
-            <a:noFill/>
-            <a:ln w="9525">
-              <a:noFill/>
-              <a:miter lim="800000"/>
-              <a:headEnd/>
-              <a:tailEnd/>
-            </a:ln>
-          </p:spPr>
-          <p:txBody>
-            <a:bodyPr rot="0" vert="horz" wrap="square" lIns="91440" tIns="45720" rIns="91440" bIns="45720" anchor="t" anchorCtr="0">
-              <a:noAutofit/>
-            </a:bodyPr>
-            <a:lstStyle/>
-            <a:p>
-              <a:pPr>
-                <a:lnSpc>
-                  <a:spcPct val="115000"/>
-                </a:lnSpc>
-                <a:spcAft>
-                  <a:spcPts val="800"/>
-                </a:spcAft>
-                <a:buNone/>
-              </a:pPr>
-              <a:r>
-                <a:rPr lang="nl-BE" sz="1200" kern="100">
-                  <a:effectLst/>
-                  <a:latin typeface="Aptos" panose="020B0004020202020204" pitchFamily="34" charset="0"/>
-                  <a:ea typeface="Aptos" panose="020B0004020202020204" pitchFamily="34" charset="0"/>
-                  <a:cs typeface="Times New Roman" panose="02020603050405020304" pitchFamily="18" charset="0"/>
-                </a:rPr>
-                <a:t>c)</a:t>
-              </a:r>
-            </a:p>
-          </p:txBody>
-        </p:sp>
-        <p:sp>
-          <p:nvSpPr>
-            <p:cNvPr id="12" name="Tekstvak 2">
-              <a:extLst>
-                <a:ext uri="{FF2B5EF4-FFF2-40B4-BE49-F238E27FC236}">
-                  <a16:creationId xmlns:a16="http://schemas.microsoft.com/office/drawing/2014/main" id="{2AFFE95A-DFC7-29E7-46EC-7FE1B9097C56}"/>
-                </a:ext>
-              </a:extLst>
-            </p:cNvPr>
-            <p:cNvSpPr txBox="1">
-              <a:spLocks noChangeArrowheads="1"/>
-            </p:cNvSpPr>
-            <p:nvPr/>
-          </p:nvSpPr>
-          <p:spPr bwMode="auto">
-            <a:xfrm>
-              <a:off x="1836420" y="1051560"/>
-              <a:ext cx="335280" cy="342900"/>
-            </a:xfrm>
-            <a:prstGeom prst="rect">
-              <a:avLst/>
-            </a:prstGeom>
-            <a:noFill/>
-            <a:ln w="9525">
-              <a:noFill/>
-              <a:miter lim="800000"/>
-              <a:headEnd/>
-              <a:tailEnd/>
-            </a:ln>
-          </p:spPr>
-          <p:txBody>
-            <a:bodyPr rot="0" vert="horz" wrap="square" lIns="91440" tIns="45720" rIns="91440" bIns="45720" anchor="t" anchorCtr="0">
-              <a:noAutofit/>
-            </a:bodyPr>
-            <a:lstStyle/>
-            <a:p>
-              <a:pPr>
-                <a:lnSpc>
-                  <a:spcPct val="115000"/>
-                </a:lnSpc>
-                <a:spcAft>
-                  <a:spcPts val="800"/>
-                </a:spcAft>
-                <a:buNone/>
-              </a:pPr>
-              <a:r>
-                <a:rPr lang="nl-BE" sz="1200" kern="100">
-                  <a:effectLst/>
-                  <a:latin typeface="Aptos" panose="020B0004020202020204" pitchFamily="34" charset="0"/>
-                  <a:ea typeface="Aptos" panose="020B0004020202020204" pitchFamily="34" charset="0"/>
-                  <a:cs typeface="Times New Roman" panose="02020603050405020304" pitchFamily="18" charset="0"/>
-                </a:rPr>
-                <a:t>d)</a:t>
-              </a:r>
-            </a:p>
-          </p:txBody>
-        </p:sp>
-      </p:grpSp>
-    </p:spTree>
-    <p:extLst>
-      <p:ext uri="{BB962C8B-B14F-4D97-AF65-F5344CB8AC3E}">
-        <p14:creationId xmlns:p14="http://schemas.microsoft.com/office/powerpoint/2010/main" val="4127702871"/>
-      </p:ext>
-    </p:extLst>
-  </p:cSld>
-  <p:clrMapOvr>
-    <a:masterClrMapping/>
-  </p:clrMapOvr>
-</p:sld>
-</file>
-
-<file path=ppt/slides/slide23.xml><?xml version="1.0" encoding="utf-8"?>
-<p:sld xmlns:a="http://schemas.openxmlformats.org/drawingml/2006/main" xmlns:r="http://schemas.openxmlformats.org/officeDocument/2006/relationships" xmlns:p="http://schemas.openxmlformats.org/presentationml/2006/main">
-  <p:cSld>
-    <p:spTree>
-      <p:nvGrpSpPr>
-        <p:cNvPr id="1" name="">
-          <a:extLst>
-            <a:ext uri="{FF2B5EF4-FFF2-40B4-BE49-F238E27FC236}">
               <a16:creationId xmlns:a16="http://schemas.microsoft.com/office/drawing/2014/main" id="{5C9EB3CD-8EB3-7FEA-AACB-BB2099D469C0}"/>
             </a:ext>
           </a:extLst>
@@ -6586,7 +6021,7 @@
 </p:sld>
 </file>
 
-<file path=ppt/slides/slide24.xml><?xml version="1.0" encoding="utf-8"?>
+<file path=ppt/slides/slide23.xml><?xml version="1.0" encoding="utf-8"?>
 <p:sld xmlns:a="http://schemas.openxmlformats.org/drawingml/2006/main" xmlns:r="http://schemas.openxmlformats.org/officeDocument/2006/relationships" xmlns:p="http://schemas.openxmlformats.org/presentationml/2006/main">
   <p:cSld>
     <p:spTree>
@@ -6797,7 +6232,7 @@
 </p:sld>
 </file>
 
-<file path=ppt/slides/slide25.xml><?xml version="1.0" encoding="utf-8"?>
+<file path=ppt/slides/slide24.xml><?xml version="1.0" encoding="utf-8"?>
 <p:sld xmlns:a="http://schemas.openxmlformats.org/drawingml/2006/main" xmlns:r="http://schemas.openxmlformats.org/officeDocument/2006/relationships" xmlns:p="http://schemas.openxmlformats.org/presentationml/2006/main">
   <p:cSld>
     <p:spTree>
@@ -7012,7 +6447,7 @@
 </p:sld>
 </file>
 
-<file path=ppt/slides/slide26.xml><?xml version="1.0" encoding="utf-8"?>
+<file path=ppt/slides/slide25.xml><?xml version="1.0" encoding="utf-8"?>
 <p:sld xmlns:a="http://schemas.openxmlformats.org/drawingml/2006/main" xmlns:r="http://schemas.openxmlformats.org/officeDocument/2006/relationships" xmlns:p="http://schemas.openxmlformats.org/presentationml/2006/main">
   <p:cSld>
     <p:spTree>
@@ -7461,7 +6896,7 @@
 </p:sld>
 </file>
 
-<file path=ppt/slides/slide27.xml><?xml version="1.0" encoding="utf-8"?>
+<file path=ppt/slides/slide26.xml><?xml version="1.0" encoding="utf-8"?>
 <p:sld xmlns:a="http://schemas.openxmlformats.org/drawingml/2006/main" xmlns:r="http://schemas.openxmlformats.org/officeDocument/2006/relationships" xmlns:p="http://schemas.openxmlformats.org/presentationml/2006/main">
   <p:cSld>
     <p:spTree>
@@ -7619,7 +7054,7 @@
 </p:sld>
 </file>
 
-<file path=ppt/slides/slide28.xml><?xml version="1.0" encoding="utf-8"?>
+<file path=ppt/slides/slide27.xml><?xml version="1.0" encoding="utf-8"?>
 <p:sld xmlns:a="http://schemas.openxmlformats.org/drawingml/2006/main" xmlns:r="http://schemas.openxmlformats.org/officeDocument/2006/relationships" xmlns:p="http://schemas.openxmlformats.org/presentationml/2006/main">
   <p:cSld>
     <p:spTree>
@@ -7688,7 +7123,7 @@
 </p:sld>
 </file>
 
-<file path=ppt/slides/slide29.xml><?xml version="1.0" encoding="utf-8"?>
+<file path=ppt/slides/slide28.xml><?xml version="1.0" encoding="utf-8"?>
 <p:sld xmlns:a="http://schemas.openxmlformats.org/drawingml/2006/main" xmlns:r="http://schemas.openxmlformats.org/officeDocument/2006/relationships" xmlns:p="http://schemas.openxmlformats.org/presentationml/2006/main">
   <p:cSld>
     <p:spTree>
@@ -7887,6 +7322,257 @@
     <p:extLst>
       <p:ext uri="{BB962C8B-B14F-4D97-AF65-F5344CB8AC3E}">
         <p14:creationId xmlns:p14="http://schemas.microsoft.com/office/powerpoint/2010/main" val="3026849845"/>
+      </p:ext>
+    </p:extLst>
+  </p:cSld>
+  <p:clrMapOvr>
+    <a:masterClrMapping/>
+  </p:clrMapOvr>
+</p:sld>
+</file>
+
+<file path=ppt/slides/slide29.xml><?xml version="1.0" encoding="utf-8"?>
+<p:sld xmlns:a="http://schemas.openxmlformats.org/drawingml/2006/main" xmlns:r="http://schemas.openxmlformats.org/officeDocument/2006/relationships" xmlns:p="http://schemas.openxmlformats.org/presentationml/2006/main">
+  <p:cSld>
+    <p:spTree>
+      <p:nvGrpSpPr>
+        <p:cNvPr id="1" name="">
+          <a:extLst>
+            <a:ext uri="{FF2B5EF4-FFF2-40B4-BE49-F238E27FC236}">
+              <a16:creationId xmlns:a16="http://schemas.microsoft.com/office/drawing/2014/main" id="{9D487CEC-8927-365D-00E7-852B087F7461}"/>
+            </a:ext>
+          </a:extLst>
+        </p:cNvPr>
+        <p:cNvGrpSpPr/>
+        <p:nvPr/>
+      </p:nvGrpSpPr>
+      <p:grpSpPr>
+        <a:xfrm>
+          <a:off x="0" y="0"/>
+          <a:ext cx="0" cy="0"/>
+          <a:chOff x="0" y="0"/>
+          <a:chExt cx="0" cy="0"/>
+        </a:xfrm>
+      </p:grpSpPr>
+      <p:sp>
+        <p:nvSpPr>
+          <p:cNvPr id="4" name="Tijdelijke aanduiding voor inhoud 3">
+            <a:extLst>
+              <a:ext uri="{FF2B5EF4-FFF2-40B4-BE49-F238E27FC236}">
+                <a16:creationId xmlns:a16="http://schemas.microsoft.com/office/drawing/2014/main" id="{1FE2FBC4-8D09-76F6-6431-B4ED4BA9F3AD}"/>
+              </a:ext>
+            </a:extLst>
+          </p:cNvPr>
+          <p:cNvSpPr>
+            <a:spLocks noGrp="1"/>
+          </p:cNvSpPr>
+          <p:nvPr>
+            <p:ph sz="half" idx="1"/>
+          </p:nvPr>
+        </p:nvSpPr>
+        <p:spPr>
+          <a:xfrm>
+            <a:off x="609600" y="980728"/>
+            <a:ext cx="5918448" cy="5472608"/>
+          </a:xfrm>
+        </p:spPr>
+        <p:txBody>
+          <a:bodyPr wrap="square" anchor="t">
+            <a:normAutofit/>
+          </a:bodyPr>
+          <a:lstStyle/>
+          <a:p>
+            <a:pPr lvl="1"/>
+            <a:r>
+              <a:rPr lang="nl-BE" sz="2200" dirty="0"/>
+              <a:t>Twee versies van software:</a:t>
+            </a:r>
+          </a:p>
+          <a:p>
+            <a:pPr lvl="2"/>
+            <a:r>
+              <a:rPr lang="nl-BE" sz="2000" dirty="0"/>
+              <a:t>Basisversie</a:t>
+            </a:r>
+          </a:p>
+          <a:p>
+            <a:pPr lvl="2"/>
+            <a:r>
+              <a:rPr lang="nl-BE" sz="2000" dirty="0"/>
+              <a:t>Uitgebreide versie</a:t>
+            </a:r>
+          </a:p>
+          <a:p>
+            <a:pPr lvl="2"/>
+            <a:endParaRPr lang="nl-BE" sz="2000" dirty="0"/>
+          </a:p>
+          <a:p>
+            <a:pPr lvl="1"/>
+            <a:r>
+              <a:rPr lang="nl-BE" sz="2200" dirty="0"/>
+              <a:t>Basisversie -&gt; scenario 1</a:t>
+            </a:r>
+          </a:p>
+          <a:p>
+            <a:pPr lvl="1"/>
+            <a:endParaRPr lang="nl-BE" sz="2200" dirty="0"/>
+          </a:p>
+          <a:p>
+            <a:pPr lvl="1"/>
+            <a:r>
+              <a:rPr lang="nl-BE" sz="2200" dirty="0"/>
+              <a:t>Uitgebreide versie -&gt; scenario 2</a:t>
+            </a:r>
+          </a:p>
+        </p:txBody>
+      </p:sp>
+      <p:sp>
+        <p:nvSpPr>
+          <p:cNvPr id="6" name="Titel 5">
+            <a:extLst>
+              <a:ext uri="{FF2B5EF4-FFF2-40B4-BE49-F238E27FC236}">
+                <a16:creationId xmlns:a16="http://schemas.microsoft.com/office/drawing/2014/main" id="{9428A145-2926-9AF7-3E71-2BD7672429F1}"/>
+              </a:ext>
+            </a:extLst>
+          </p:cNvPr>
+          <p:cNvSpPr>
+            <a:spLocks noGrp="1"/>
+          </p:cNvSpPr>
+          <p:nvPr>
+            <p:ph type="title" idx="4294967295"/>
+          </p:nvPr>
+        </p:nvSpPr>
+        <p:spPr>
+          <a:xfrm>
+            <a:off x="143935" y="198981"/>
+            <a:ext cx="11987005" cy="549844"/>
+          </a:xfrm>
+        </p:spPr>
+        <p:txBody>
+          <a:bodyPr wrap="square" anchor="ctr">
+            <a:normAutofit fontScale="90000"/>
+          </a:bodyPr>
+          <a:lstStyle/>
+          <a:p>
+            <a:r>
+              <a:rPr lang="nl-BE" dirty="0"/>
+              <a:t>Gebruikersstudie</a:t>
+            </a:r>
+          </a:p>
+        </p:txBody>
+      </p:sp>
+      <p:pic>
+        <p:nvPicPr>
+          <p:cNvPr id="2" name="Afbeelding 1" descr="Afbeelding met tekst, schermopname, Lettertype, nummer&#10;&#10;Door AI gegenereerde inhoud is mogelijk onjuist.">
+            <a:extLst>
+              <a:ext uri="{FF2B5EF4-FFF2-40B4-BE49-F238E27FC236}">
+                <a16:creationId xmlns:a16="http://schemas.microsoft.com/office/drawing/2014/main" id="{DD0A9091-D483-712D-6D59-B9B59CC7B4ED}"/>
+              </a:ext>
+            </a:extLst>
+          </p:cNvPr>
+          <p:cNvPicPr>
+            <a:picLocks noChangeAspect="1"/>
+          </p:cNvPicPr>
+          <p:nvPr/>
+        </p:nvPicPr>
+        <p:blipFill>
+          <a:blip r:embed="rId2" cstate="print">
+            <a:extLst>
+              <a:ext uri="{28A0092B-C50C-407E-A947-70E740481C1C}">
+                <a14:useLocalDpi xmlns:a14="http://schemas.microsoft.com/office/drawing/2010/main" val="0"/>
+              </a:ext>
+            </a:extLst>
+          </a:blip>
+          <a:stretch>
+            <a:fillRect/>
+          </a:stretch>
+        </p:blipFill>
+        <p:spPr>
+          <a:xfrm>
+            <a:off x="5969562" y="748825"/>
+            <a:ext cx="6029904" cy="3040215"/>
+          </a:xfrm>
+          <a:prstGeom prst="rect">
+            <a:avLst/>
+          </a:prstGeom>
+        </p:spPr>
+      </p:pic>
+      <p:pic>
+        <p:nvPicPr>
+          <p:cNvPr id="3" name="Afbeelding 2" descr="Afbeelding met tekst, schermopname, Lettertype, lijn&#10;&#10;Door AI gegenereerde inhoud is mogelijk onjuist.">
+            <a:extLst>
+              <a:ext uri="{FF2B5EF4-FFF2-40B4-BE49-F238E27FC236}">
+                <a16:creationId xmlns:a16="http://schemas.microsoft.com/office/drawing/2014/main" id="{647EBD43-2BE2-D9DE-7BD7-1603E9AC447F}"/>
+              </a:ext>
+            </a:extLst>
+          </p:cNvPr>
+          <p:cNvPicPr>
+            <a:picLocks noChangeAspect="1"/>
+          </p:cNvPicPr>
+          <p:nvPr/>
+        </p:nvPicPr>
+        <p:blipFill>
+          <a:blip r:embed="rId3">
+            <a:extLst>
+              <a:ext uri="{28A0092B-C50C-407E-A947-70E740481C1C}">
+                <a14:useLocalDpi xmlns:a14="http://schemas.microsoft.com/office/drawing/2010/main" val="0"/>
+              </a:ext>
+            </a:extLst>
+          </a:blip>
+          <a:stretch>
+            <a:fillRect/>
+          </a:stretch>
+        </p:blipFill>
+        <p:spPr>
+          <a:xfrm>
+            <a:off x="6382224" y="4365104"/>
+            <a:ext cx="5229432" cy="1022727"/>
+          </a:xfrm>
+          <a:prstGeom prst="rect">
+            <a:avLst/>
+          </a:prstGeom>
+        </p:spPr>
+      </p:pic>
+      <p:pic>
+        <p:nvPicPr>
+          <p:cNvPr id="5" name="Afbeelding 4" descr="Afbeelding met tekst, schermopname, Lettertype, lijn&#10;&#10;Door AI gegenereerde inhoud is mogelijk onjuist.">
+            <a:extLst>
+              <a:ext uri="{FF2B5EF4-FFF2-40B4-BE49-F238E27FC236}">
+                <a16:creationId xmlns:a16="http://schemas.microsoft.com/office/drawing/2014/main" id="{8D68EC0F-D719-4D52-E34E-AD1CBF9BA920}"/>
+              </a:ext>
+            </a:extLst>
+          </p:cNvPr>
+          <p:cNvPicPr>
+            <a:picLocks noChangeAspect="1"/>
+          </p:cNvPicPr>
+          <p:nvPr/>
+        </p:nvPicPr>
+        <p:blipFill>
+          <a:blip r:embed="rId4">
+            <a:extLst>
+              <a:ext uri="{28A0092B-C50C-407E-A947-70E740481C1C}">
+                <a14:useLocalDpi xmlns:a14="http://schemas.microsoft.com/office/drawing/2010/main" val="0"/>
+              </a:ext>
+            </a:extLst>
+          </a:blip>
+          <a:stretch>
+            <a:fillRect/>
+          </a:stretch>
+        </p:blipFill>
+        <p:spPr>
+          <a:xfrm>
+            <a:off x="695400" y="4365104"/>
+            <a:ext cx="5043830" cy="1022727"/>
+          </a:xfrm>
+          <a:prstGeom prst="rect">
+            <a:avLst/>
+          </a:prstGeom>
+        </p:spPr>
+      </p:pic>
+    </p:spTree>
+    <p:extLst>
+      <p:ext uri="{BB962C8B-B14F-4D97-AF65-F5344CB8AC3E}">
+        <p14:creationId xmlns:p14="http://schemas.microsoft.com/office/powerpoint/2010/main" val="3678059623"/>
       </p:ext>
     </p:extLst>
   </p:cSld>
@@ -7973,257 +7659,6 @@
         <p:cNvPr id="1" name="">
           <a:extLst>
             <a:ext uri="{FF2B5EF4-FFF2-40B4-BE49-F238E27FC236}">
-              <a16:creationId xmlns:a16="http://schemas.microsoft.com/office/drawing/2014/main" id="{9D487CEC-8927-365D-00E7-852B087F7461}"/>
-            </a:ext>
-          </a:extLst>
-        </p:cNvPr>
-        <p:cNvGrpSpPr/>
-        <p:nvPr/>
-      </p:nvGrpSpPr>
-      <p:grpSpPr>
-        <a:xfrm>
-          <a:off x="0" y="0"/>
-          <a:ext cx="0" cy="0"/>
-          <a:chOff x="0" y="0"/>
-          <a:chExt cx="0" cy="0"/>
-        </a:xfrm>
-      </p:grpSpPr>
-      <p:sp>
-        <p:nvSpPr>
-          <p:cNvPr id="4" name="Tijdelijke aanduiding voor inhoud 3">
-            <a:extLst>
-              <a:ext uri="{FF2B5EF4-FFF2-40B4-BE49-F238E27FC236}">
-                <a16:creationId xmlns:a16="http://schemas.microsoft.com/office/drawing/2014/main" id="{1FE2FBC4-8D09-76F6-6431-B4ED4BA9F3AD}"/>
-              </a:ext>
-            </a:extLst>
-          </p:cNvPr>
-          <p:cNvSpPr>
-            <a:spLocks noGrp="1"/>
-          </p:cNvSpPr>
-          <p:nvPr>
-            <p:ph sz="half" idx="1"/>
-          </p:nvPr>
-        </p:nvSpPr>
-        <p:spPr>
-          <a:xfrm>
-            <a:off x="609600" y="980728"/>
-            <a:ext cx="5918448" cy="5472608"/>
-          </a:xfrm>
-        </p:spPr>
-        <p:txBody>
-          <a:bodyPr wrap="square" anchor="t">
-            <a:normAutofit/>
-          </a:bodyPr>
-          <a:lstStyle/>
-          <a:p>
-            <a:pPr lvl="1"/>
-            <a:r>
-              <a:rPr lang="nl-BE" sz="2200" dirty="0"/>
-              <a:t>Twee versies van software:</a:t>
-            </a:r>
-          </a:p>
-          <a:p>
-            <a:pPr lvl="2"/>
-            <a:r>
-              <a:rPr lang="nl-BE" sz="2000" dirty="0"/>
-              <a:t>Basisversie</a:t>
-            </a:r>
-          </a:p>
-          <a:p>
-            <a:pPr lvl="2"/>
-            <a:r>
-              <a:rPr lang="nl-BE" sz="2000" dirty="0"/>
-              <a:t>Uitgebreide versie</a:t>
-            </a:r>
-          </a:p>
-          <a:p>
-            <a:pPr lvl="2"/>
-            <a:endParaRPr lang="nl-BE" sz="2000" dirty="0"/>
-          </a:p>
-          <a:p>
-            <a:pPr lvl="1"/>
-            <a:r>
-              <a:rPr lang="nl-BE" sz="2200" dirty="0"/>
-              <a:t>Basisversie -&gt; scenario 1</a:t>
-            </a:r>
-          </a:p>
-          <a:p>
-            <a:pPr lvl="1"/>
-            <a:endParaRPr lang="nl-BE" sz="2200" dirty="0"/>
-          </a:p>
-          <a:p>
-            <a:pPr lvl="1"/>
-            <a:r>
-              <a:rPr lang="nl-BE" sz="2200" dirty="0"/>
-              <a:t>Uitgebreide versie -&gt; scenario 2</a:t>
-            </a:r>
-          </a:p>
-        </p:txBody>
-      </p:sp>
-      <p:sp>
-        <p:nvSpPr>
-          <p:cNvPr id="6" name="Titel 5">
-            <a:extLst>
-              <a:ext uri="{FF2B5EF4-FFF2-40B4-BE49-F238E27FC236}">
-                <a16:creationId xmlns:a16="http://schemas.microsoft.com/office/drawing/2014/main" id="{9428A145-2926-9AF7-3E71-2BD7672429F1}"/>
-              </a:ext>
-            </a:extLst>
-          </p:cNvPr>
-          <p:cNvSpPr>
-            <a:spLocks noGrp="1"/>
-          </p:cNvSpPr>
-          <p:nvPr>
-            <p:ph type="title" idx="4294967295"/>
-          </p:nvPr>
-        </p:nvSpPr>
-        <p:spPr>
-          <a:xfrm>
-            <a:off x="143935" y="198981"/>
-            <a:ext cx="11987005" cy="549844"/>
-          </a:xfrm>
-        </p:spPr>
-        <p:txBody>
-          <a:bodyPr wrap="square" anchor="ctr">
-            <a:normAutofit fontScale="90000"/>
-          </a:bodyPr>
-          <a:lstStyle/>
-          <a:p>
-            <a:r>
-              <a:rPr lang="nl-BE" dirty="0"/>
-              <a:t>Gebruikersstudie</a:t>
-            </a:r>
-          </a:p>
-        </p:txBody>
-      </p:sp>
-      <p:pic>
-        <p:nvPicPr>
-          <p:cNvPr id="2" name="Afbeelding 1" descr="Afbeelding met tekst, schermopname, Lettertype, nummer&#10;&#10;Door AI gegenereerde inhoud is mogelijk onjuist.">
-            <a:extLst>
-              <a:ext uri="{FF2B5EF4-FFF2-40B4-BE49-F238E27FC236}">
-                <a16:creationId xmlns:a16="http://schemas.microsoft.com/office/drawing/2014/main" id="{DD0A9091-D483-712D-6D59-B9B59CC7B4ED}"/>
-              </a:ext>
-            </a:extLst>
-          </p:cNvPr>
-          <p:cNvPicPr>
-            <a:picLocks noChangeAspect="1"/>
-          </p:cNvPicPr>
-          <p:nvPr/>
-        </p:nvPicPr>
-        <p:blipFill>
-          <a:blip r:embed="rId2" cstate="print">
-            <a:extLst>
-              <a:ext uri="{28A0092B-C50C-407E-A947-70E740481C1C}">
-                <a14:useLocalDpi xmlns:a14="http://schemas.microsoft.com/office/drawing/2010/main" val="0"/>
-              </a:ext>
-            </a:extLst>
-          </a:blip>
-          <a:stretch>
-            <a:fillRect/>
-          </a:stretch>
-        </p:blipFill>
-        <p:spPr>
-          <a:xfrm>
-            <a:off x="5969562" y="748825"/>
-            <a:ext cx="6029904" cy="3040215"/>
-          </a:xfrm>
-          <a:prstGeom prst="rect">
-            <a:avLst/>
-          </a:prstGeom>
-        </p:spPr>
-      </p:pic>
-      <p:pic>
-        <p:nvPicPr>
-          <p:cNvPr id="3" name="Afbeelding 2" descr="Afbeelding met tekst, schermopname, Lettertype, lijn&#10;&#10;Door AI gegenereerde inhoud is mogelijk onjuist.">
-            <a:extLst>
-              <a:ext uri="{FF2B5EF4-FFF2-40B4-BE49-F238E27FC236}">
-                <a16:creationId xmlns:a16="http://schemas.microsoft.com/office/drawing/2014/main" id="{647EBD43-2BE2-D9DE-7BD7-1603E9AC447F}"/>
-              </a:ext>
-            </a:extLst>
-          </p:cNvPr>
-          <p:cNvPicPr>
-            <a:picLocks noChangeAspect="1"/>
-          </p:cNvPicPr>
-          <p:nvPr/>
-        </p:nvPicPr>
-        <p:blipFill>
-          <a:blip r:embed="rId3">
-            <a:extLst>
-              <a:ext uri="{28A0092B-C50C-407E-A947-70E740481C1C}">
-                <a14:useLocalDpi xmlns:a14="http://schemas.microsoft.com/office/drawing/2010/main" val="0"/>
-              </a:ext>
-            </a:extLst>
-          </a:blip>
-          <a:stretch>
-            <a:fillRect/>
-          </a:stretch>
-        </p:blipFill>
-        <p:spPr>
-          <a:xfrm>
-            <a:off x="6382224" y="4365104"/>
-            <a:ext cx="5229432" cy="1022727"/>
-          </a:xfrm>
-          <a:prstGeom prst="rect">
-            <a:avLst/>
-          </a:prstGeom>
-        </p:spPr>
-      </p:pic>
-      <p:pic>
-        <p:nvPicPr>
-          <p:cNvPr id="5" name="Afbeelding 4" descr="Afbeelding met tekst, schermopname, Lettertype, lijn&#10;&#10;Door AI gegenereerde inhoud is mogelijk onjuist.">
-            <a:extLst>
-              <a:ext uri="{FF2B5EF4-FFF2-40B4-BE49-F238E27FC236}">
-                <a16:creationId xmlns:a16="http://schemas.microsoft.com/office/drawing/2014/main" id="{8D68EC0F-D719-4D52-E34E-AD1CBF9BA920}"/>
-              </a:ext>
-            </a:extLst>
-          </p:cNvPr>
-          <p:cNvPicPr>
-            <a:picLocks noChangeAspect="1"/>
-          </p:cNvPicPr>
-          <p:nvPr/>
-        </p:nvPicPr>
-        <p:blipFill>
-          <a:blip r:embed="rId4">
-            <a:extLst>
-              <a:ext uri="{28A0092B-C50C-407E-A947-70E740481C1C}">
-                <a14:useLocalDpi xmlns:a14="http://schemas.microsoft.com/office/drawing/2010/main" val="0"/>
-              </a:ext>
-            </a:extLst>
-          </a:blip>
-          <a:stretch>
-            <a:fillRect/>
-          </a:stretch>
-        </p:blipFill>
-        <p:spPr>
-          <a:xfrm>
-            <a:off x="695400" y="4365104"/>
-            <a:ext cx="5043830" cy="1022727"/>
-          </a:xfrm>
-          <a:prstGeom prst="rect">
-            <a:avLst/>
-          </a:prstGeom>
-        </p:spPr>
-      </p:pic>
-    </p:spTree>
-    <p:extLst>
-      <p:ext uri="{BB962C8B-B14F-4D97-AF65-F5344CB8AC3E}">
-        <p14:creationId xmlns:p14="http://schemas.microsoft.com/office/powerpoint/2010/main" val="3678059623"/>
-      </p:ext>
-    </p:extLst>
-  </p:cSld>
-  <p:clrMapOvr>
-    <a:masterClrMapping/>
-  </p:clrMapOvr>
-</p:sld>
-</file>
-
-<file path=ppt/slides/slide31.xml><?xml version="1.0" encoding="utf-8"?>
-<p:sld xmlns:a="http://schemas.openxmlformats.org/drawingml/2006/main" xmlns:r="http://schemas.openxmlformats.org/officeDocument/2006/relationships" xmlns:p="http://schemas.openxmlformats.org/presentationml/2006/main">
-  <p:cSld>
-    <p:spTree>
-      <p:nvGrpSpPr>
-        <p:cNvPr id="1" name="">
-          <a:extLst>
-            <a:ext uri="{FF2B5EF4-FFF2-40B4-BE49-F238E27FC236}">
               <a16:creationId xmlns:a16="http://schemas.microsoft.com/office/drawing/2014/main" id="{5F10D4BB-D4A2-A3B3-2078-2EE90BF1EE21}"/>
             </a:ext>
           </a:extLst>
@@ -8376,7 +7811,7 @@
 </p:sld>
 </file>
 
-<file path=ppt/slides/slide32.xml><?xml version="1.0" encoding="utf-8"?>
+<file path=ppt/slides/slide31.xml><?xml version="1.0" encoding="utf-8"?>
 <p:sld xmlns:a="http://schemas.openxmlformats.org/drawingml/2006/main" xmlns:r="http://schemas.openxmlformats.org/officeDocument/2006/relationships" xmlns:p="http://schemas.openxmlformats.org/presentationml/2006/main">
   <p:cSld>
     <p:spTree>
@@ -8445,7 +7880,7 @@
 </p:sld>
 </file>
 
-<file path=ppt/slides/slide33.xml><?xml version="1.0" encoding="utf-8"?>
+<file path=ppt/slides/slide32.xml><?xml version="1.0" encoding="utf-8"?>
 <p:sld xmlns:a="http://schemas.openxmlformats.org/drawingml/2006/main" xmlns:r="http://schemas.openxmlformats.org/officeDocument/2006/relationships" xmlns:p="http://schemas.openxmlformats.org/presentationml/2006/main">
   <p:cSld>
     <p:spTree>
@@ -8635,7 +8070,7 @@
 </p:sld>
 </file>
 
-<file path=ppt/slides/slide34.xml><?xml version="1.0" encoding="utf-8"?>
+<file path=ppt/slides/slide33.xml><?xml version="1.0" encoding="utf-8"?>
 <p:sld xmlns:a="http://schemas.openxmlformats.org/drawingml/2006/main" xmlns:r="http://schemas.openxmlformats.org/officeDocument/2006/relationships" xmlns:p="http://schemas.openxmlformats.org/presentationml/2006/main">
   <p:cSld>
     <p:spTree>
@@ -8704,7 +8139,7 @@
 </p:sld>
 </file>
 
-<file path=ppt/slides/slide35.xml><?xml version="1.0" encoding="utf-8"?>
+<file path=ppt/slides/slide34.xml><?xml version="1.0" encoding="utf-8"?>
 <p:sld xmlns:a="http://schemas.openxmlformats.org/drawingml/2006/main" xmlns:r="http://schemas.openxmlformats.org/officeDocument/2006/relationships" xmlns:p="http://schemas.openxmlformats.org/presentationml/2006/main">
   <p:cSld>
     <p:spTree>
@@ -9217,7 +8652,7 @@
 </p:sld>
 </file>
 
-<file path=ppt/slides/slide36.xml><?xml version="1.0" encoding="utf-8"?>
+<file path=ppt/slides/slide35.xml><?xml version="1.0" encoding="utf-8"?>
 <p:sld xmlns:a="http://schemas.openxmlformats.org/drawingml/2006/main" xmlns:r="http://schemas.openxmlformats.org/officeDocument/2006/relationships" xmlns:p="http://schemas.openxmlformats.org/presentationml/2006/main">
   <p:cSld>
     <p:spTree>
@@ -9669,7 +9104,7 @@
 </p:sld>
 </file>
 
-<file path=ppt/slides/slide37.xml><?xml version="1.0" encoding="utf-8"?>
+<file path=ppt/slides/slide36.xml><?xml version="1.0" encoding="utf-8"?>
 <p:sld xmlns:a="http://schemas.openxmlformats.org/drawingml/2006/main" xmlns:r="http://schemas.openxmlformats.org/officeDocument/2006/relationships" xmlns:p="http://schemas.openxmlformats.org/presentationml/2006/main">
   <p:cSld>
     <p:spTree>
@@ -9863,7 +9298,7 @@
 </p:sld>
 </file>
 
-<file path=ppt/slides/slide38.xml><?xml version="1.0" encoding="utf-8"?>
+<file path=ppt/slides/slide37.xml><?xml version="1.0" encoding="utf-8"?>
 <p:sld xmlns:a="http://schemas.openxmlformats.org/drawingml/2006/main" xmlns:r="http://schemas.openxmlformats.org/officeDocument/2006/relationships" xmlns:p="http://schemas.openxmlformats.org/presentationml/2006/main">
   <p:cSld>
     <p:spTree>
@@ -10035,7 +9470,7 @@
 </p:sld>
 </file>
 
-<file path=ppt/slides/slide39.xml><?xml version="1.0" encoding="utf-8"?>
+<file path=ppt/slides/slide38.xml><?xml version="1.0" encoding="utf-8"?>
 <p:sld xmlns:a="http://schemas.openxmlformats.org/drawingml/2006/main" xmlns:r="http://schemas.openxmlformats.org/officeDocument/2006/relationships" xmlns:p="http://schemas.openxmlformats.org/presentationml/2006/main">
   <p:cSld>
     <p:spTree>
@@ -10193,6 +9628,75 @@
     <p:extLst>
       <p:ext uri="{BB962C8B-B14F-4D97-AF65-F5344CB8AC3E}">
         <p14:creationId xmlns:p14="http://schemas.microsoft.com/office/powerpoint/2010/main" val="2226993802"/>
+      </p:ext>
+    </p:extLst>
+  </p:cSld>
+  <p:clrMapOvr>
+    <a:masterClrMapping/>
+  </p:clrMapOvr>
+</p:sld>
+</file>
+
+<file path=ppt/slides/slide39.xml><?xml version="1.0" encoding="utf-8"?>
+<p:sld xmlns:a="http://schemas.openxmlformats.org/drawingml/2006/main" xmlns:r="http://schemas.openxmlformats.org/officeDocument/2006/relationships" xmlns:p="http://schemas.openxmlformats.org/presentationml/2006/main">
+  <p:cSld>
+    <p:spTree>
+      <p:nvGrpSpPr>
+        <p:cNvPr id="1" name="">
+          <a:extLst>
+            <a:ext uri="{FF2B5EF4-FFF2-40B4-BE49-F238E27FC236}">
+              <a16:creationId xmlns:a16="http://schemas.microsoft.com/office/drawing/2014/main" id="{C3B2448A-A7C8-2CDA-EB9C-540BDBFA9397}"/>
+            </a:ext>
+          </a:extLst>
+        </p:cNvPr>
+        <p:cNvGrpSpPr/>
+        <p:nvPr/>
+      </p:nvGrpSpPr>
+      <p:grpSpPr>
+        <a:xfrm>
+          <a:off x="0" y="0"/>
+          <a:ext cx="0" cy="0"/>
+          <a:chOff x="0" y="0"/>
+          <a:chExt cx="0" cy="0"/>
+        </a:xfrm>
+      </p:grpSpPr>
+      <p:sp>
+        <p:nvSpPr>
+          <p:cNvPr id="3" name="Titel 2">
+            <a:extLst>
+              <a:ext uri="{FF2B5EF4-FFF2-40B4-BE49-F238E27FC236}">
+                <a16:creationId xmlns:a16="http://schemas.microsoft.com/office/drawing/2014/main" id="{DF3C199B-27AE-7C6F-FBB4-418D871E8501}"/>
+              </a:ext>
+            </a:extLst>
+          </p:cNvPr>
+          <p:cNvSpPr>
+            <a:spLocks noGrp="1"/>
+          </p:cNvSpPr>
+          <p:nvPr>
+            <p:ph type="title" idx="4294967295"/>
+          </p:nvPr>
+        </p:nvSpPr>
+        <p:spPr>
+          <a:xfrm>
+            <a:off x="624417" y="2851597"/>
+            <a:ext cx="10972800" cy="433387"/>
+          </a:xfrm>
+        </p:spPr>
+        <p:txBody>
+          <a:bodyPr/>
+          <a:lstStyle/>
+          <a:p>
+            <a:r>
+              <a:rPr lang="nl-BE" sz="6000" dirty="0"/>
+              <a:t>Antwoorden onderzoeksvragen</a:t>
+            </a:r>
+          </a:p>
+        </p:txBody>
+      </p:sp>
+    </p:spTree>
+    <p:extLst>
+      <p:ext uri="{BB962C8B-B14F-4D97-AF65-F5344CB8AC3E}">
+        <p14:creationId xmlns:p14="http://schemas.microsoft.com/office/powerpoint/2010/main" val="1609427968"/>
       </p:ext>
     </p:extLst>
   </p:cSld>
@@ -10459,75 +9963,6 @@
         <p:cNvPr id="1" name="">
           <a:extLst>
             <a:ext uri="{FF2B5EF4-FFF2-40B4-BE49-F238E27FC236}">
-              <a16:creationId xmlns:a16="http://schemas.microsoft.com/office/drawing/2014/main" id="{C3B2448A-A7C8-2CDA-EB9C-540BDBFA9397}"/>
-            </a:ext>
-          </a:extLst>
-        </p:cNvPr>
-        <p:cNvGrpSpPr/>
-        <p:nvPr/>
-      </p:nvGrpSpPr>
-      <p:grpSpPr>
-        <a:xfrm>
-          <a:off x="0" y="0"/>
-          <a:ext cx="0" cy="0"/>
-          <a:chOff x="0" y="0"/>
-          <a:chExt cx="0" cy="0"/>
-        </a:xfrm>
-      </p:grpSpPr>
-      <p:sp>
-        <p:nvSpPr>
-          <p:cNvPr id="3" name="Titel 2">
-            <a:extLst>
-              <a:ext uri="{FF2B5EF4-FFF2-40B4-BE49-F238E27FC236}">
-                <a16:creationId xmlns:a16="http://schemas.microsoft.com/office/drawing/2014/main" id="{DF3C199B-27AE-7C6F-FBB4-418D871E8501}"/>
-              </a:ext>
-            </a:extLst>
-          </p:cNvPr>
-          <p:cNvSpPr>
-            <a:spLocks noGrp="1"/>
-          </p:cNvSpPr>
-          <p:nvPr>
-            <p:ph type="title" idx="4294967295"/>
-          </p:nvPr>
-        </p:nvSpPr>
-        <p:spPr>
-          <a:xfrm>
-            <a:off x="624417" y="2851597"/>
-            <a:ext cx="10972800" cy="433387"/>
-          </a:xfrm>
-        </p:spPr>
-        <p:txBody>
-          <a:bodyPr/>
-          <a:lstStyle/>
-          <a:p>
-            <a:r>
-              <a:rPr lang="nl-BE" sz="6000" dirty="0"/>
-              <a:t>Antwoorden onderzoeksvragen</a:t>
-            </a:r>
-          </a:p>
-        </p:txBody>
-      </p:sp>
-    </p:spTree>
-    <p:extLst>
-      <p:ext uri="{BB962C8B-B14F-4D97-AF65-F5344CB8AC3E}">
-        <p14:creationId xmlns:p14="http://schemas.microsoft.com/office/powerpoint/2010/main" val="1609427968"/>
-      </p:ext>
-    </p:extLst>
-  </p:cSld>
-  <p:clrMapOvr>
-    <a:masterClrMapping/>
-  </p:clrMapOvr>
-</p:sld>
-</file>
-
-<file path=ppt/slides/slide41.xml><?xml version="1.0" encoding="utf-8"?>
-<p:sld xmlns:a="http://schemas.openxmlformats.org/drawingml/2006/main" xmlns:r="http://schemas.openxmlformats.org/officeDocument/2006/relationships" xmlns:p="http://schemas.openxmlformats.org/presentationml/2006/main">
-  <p:cSld>
-    <p:spTree>
-      <p:nvGrpSpPr>
-        <p:cNvPr id="1" name="">
-          <a:extLst>
-            <a:ext uri="{FF2B5EF4-FFF2-40B4-BE49-F238E27FC236}">
               <a16:creationId xmlns:a16="http://schemas.microsoft.com/office/drawing/2014/main" id="{B5199A43-750D-2F79-4926-3AAA195868F2}"/>
             </a:ext>
           </a:extLst>
@@ -10678,7 +10113,7 @@
 </p:sld>
 </file>
 
-<file path=ppt/slides/slide42.xml><?xml version="1.0" encoding="utf-8"?>
+<file path=ppt/slides/slide41.xml><?xml version="1.0" encoding="utf-8"?>
 <p:sld xmlns:a="http://schemas.openxmlformats.org/drawingml/2006/main" xmlns:r="http://schemas.openxmlformats.org/officeDocument/2006/relationships" xmlns:p="http://schemas.openxmlformats.org/presentationml/2006/main">
   <p:cSld>
     <p:spTree>
@@ -10831,7 +10266,7 @@
 </p:sld>
 </file>
 
-<file path=ppt/slides/slide43.xml><?xml version="1.0" encoding="utf-8"?>
+<file path=ppt/slides/slide42.xml><?xml version="1.0" encoding="utf-8"?>
 <p:sld xmlns:a="http://schemas.openxmlformats.org/drawingml/2006/main" xmlns:r="http://schemas.openxmlformats.org/officeDocument/2006/relationships" xmlns:p="http://schemas.openxmlformats.org/presentationml/2006/main">
   <p:cSld>
     <p:spTree>
@@ -11019,7 +10454,7 @@
 </p:sld>
 </file>
 
-<file path=ppt/slides/slide44.xml><?xml version="1.0" encoding="utf-8"?>
+<file path=ppt/slides/slide43.xml><?xml version="1.0" encoding="utf-8"?>
 <p:sld xmlns:a="http://schemas.openxmlformats.org/drawingml/2006/main" xmlns:r="http://schemas.openxmlformats.org/officeDocument/2006/relationships" xmlns:p="http://schemas.openxmlformats.org/presentationml/2006/main">
   <p:cSld>
     <p:spTree>
@@ -11088,7 +10523,7 @@
 </p:sld>
 </file>
 
-<file path=ppt/slides/slide45.xml><?xml version="1.0" encoding="utf-8"?>
+<file path=ppt/slides/slide44.xml><?xml version="1.0" encoding="utf-8"?>
 <p:sld xmlns:a="http://schemas.openxmlformats.org/drawingml/2006/main" xmlns:r="http://schemas.openxmlformats.org/officeDocument/2006/relationships" xmlns:p="http://schemas.openxmlformats.org/presentationml/2006/main">
   <p:cSld>
     <p:spTree>
@@ -11275,7 +10710,7 @@
 </p:sld>
 </file>
 
-<file path=ppt/slides/slide46.xml><?xml version="1.0" encoding="utf-8"?>
+<file path=ppt/slides/slide45.xml><?xml version="1.0" encoding="utf-8"?>
 <p:sld xmlns:a="http://schemas.openxmlformats.org/drawingml/2006/main" xmlns:r="http://schemas.openxmlformats.org/officeDocument/2006/relationships" xmlns:p="http://schemas.openxmlformats.org/presentationml/2006/main">
   <p:cSld>
     <p:spTree>
@@ -11444,7 +10879,7 @@
 </p:sld>
 </file>
 
-<file path=ppt/slides/slide47.xml><?xml version="1.0" encoding="utf-8"?>
+<file path=ppt/slides/slide46.xml><?xml version="1.0" encoding="utf-8"?>
 <p:sld xmlns:a="http://schemas.openxmlformats.org/drawingml/2006/main" xmlns:r="http://schemas.openxmlformats.org/officeDocument/2006/relationships" xmlns:p="http://schemas.openxmlformats.org/presentationml/2006/main">
   <p:cSld>
     <p:spTree>
@@ -11513,7 +10948,7 @@
 </p:sld>
 </file>
 
-<file path=ppt/slides/slide48.xml><?xml version="1.0" encoding="utf-8"?>
+<file path=ppt/slides/slide47.xml><?xml version="1.0" encoding="utf-8"?>
 <p:sld xmlns:a="http://schemas.openxmlformats.org/drawingml/2006/main" xmlns:r="http://schemas.openxmlformats.org/officeDocument/2006/relationships" xmlns:p="http://schemas.openxmlformats.org/presentationml/2006/main">
   <p:cSld>
     <p:spTree>
@@ -11614,7 +11049,7 @@
 </p:sld>
 </file>
 
-<file path=ppt/slides/slide49.xml><?xml version="1.0" encoding="utf-8"?>
+<file path=ppt/slides/slide48.xml><?xml version="1.0" encoding="utf-8"?>
 <p:sld xmlns:a="http://schemas.openxmlformats.org/drawingml/2006/main" xmlns:r="http://schemas.openxmlformats.org/officeDocument/2006/relationships" xmlns:p="http://schemas.openxmlformats.org/presentationml/2006/main">
   <p:cSld>
     <p:spTree>

--- a/MP2526_Verdediging.pptx
+++ b/MP2526_Verdediging.pptx
@@ -24,20 +24,20 @@
     <p:sldId id="279" r:id="rId15"/>
     <p:sldId id="283" r:id="rId16"/>
     <p:sldId id="281" r:id="rId17"/>
-    <p:sldId id="286" r:id="rId18"/>
-    <p:sldId id="287" r:id="rId19"/>
-    <p:sldId id="310" r:id="rId20"/>
-    <p:sldId id="290" r:id="rId21"/>
-    <p:sldId id="291" r:id="rId22"/>
-    <p:sldId id="293" r:id="rId23"/>
-    <p:sldId id="300" r:id="rId24"/>
+    <p:sldId id="311" r:id="rId18"/>
+    <p:sldId id="286" r:id="rId19"/>
+    <p:sldId id="287" r:id="rId20"/>
+    <p:sldId id="310" r:id="rId21"/>
+    <p:sldId id="290" r:id="rId22"/>
+    <p:sldId id="291" r:id="rId23"/>
+    <p:sldId id="293" r:id="rId24"/>
     <p:sldId id="301" r:id="rId25"/>
     <p:sldId id="302" r:id="rId26"/>
     <p:sldId id="297" r:id="rId27"/>
     <p:sldId id="304" r:id="rId28"/>
     <p:sldId id="305" r:id="rId29"/>
-    <p:sldId id="307" r:id="rId30"/>
-    <p:sldId id="306" r:id="rId31"/>
+    <p:sldId id="306" r:id="rId30"/>
+    <p:sldId id="307" r:id="rId31"/>
     <p:sldId id="309" r:id="rId32"/>
     <p:sldId id="273" r:id="rId33"/>
     <p:sldId id="308" r:id="rId34"/>
@@ -5093,18 +5093,38 @@
         <a:bodyPr/>
         <a:lstStyle/>
         <a:p>
-          <a:pPr algn="l">
+          <a:pPr algn="ctr">
             <a:lnSpc>
               <a:spcPct val="100000"/>
             </a:lnSpc>
           </a:pPr>
           <a:r>
+            <a:rPr lang="nl-BE" dirty="0"/>
+            <a:t>Het doel is het ontwikkelen van een gebruiksvriendelijke en efficiënte </a:t>
+          </a:r>
+          <a:r>
             <a:rPr lang="nl-BE" dirty="0" err="1"/>
-            <a:t>Fortunately-unfortunately</a:t>
+            <a:t>webtool</a:t>
           </a:r>
           <a:r>
             <a:rPr lang="nl-BE" dirty="0"/>
-            <a:t> methode</a:t>
+            <a:t> die, op basis van de </a:t>
+          </a:r>
+          <a:r>
+            <a:rPr lang="nl-BE" dirty="0" err="1"/>
+            <a:t>fortunately</a:t>
+          </a:r>
+          <a:r>
+            <a:rPr lang="nl-BE" dirty="0"/>
+            <a:t>–</a:t>
+          </a:r>
+          <a:r>
+            <a:rPr lang="nl-BE" dirty="0" err="1"/>
+            <a:t>unfortunately</a:t>
+          </a:r>
+          <a:r>
+            <a:rPr lang="nl-BE" dirty="0"/>
+            <a:t> methode, toegankelijk is voor niet‑security‑experts.</a:t>
           </a:r>
           <a:endParaRPr lang="en-US" dirty="0"/>
         </a:p>
@@ -5122,136 +5142,6 @@
       </dgm:t>
     </dgm:pt>
     <dgm:pt modelId="{5E66F3E0-1F03-4506-9CCA-9346F197ED25}" type="sibTrans" cxnId="{B79B7FFF-6BD0-4A95-9FA3-FBC9DCC51722}">
-      <dgm:prSet/>
-      <dgm:spPr/>
-      <dgm:t>
-        <a:bodyPr/>
-        <a:lstStyle/>
-        <a:p>
-          <a:endParaRPr lang="en-US"/>
-        </a:p>
-      </dgm:t>
-    </dgm:pt>
-    <dgm:pt modelId="{AE71CAED-B1D0-4156-BF7D-5CAC8A0654C8}">
-      <dgm:prSet/>
-      <dgm:spPr/>
-      <dgm:t>
-        <a:bodyPr/>
-        <a:lstStyle/>
-        <a:p>
-          <a:pPr algn="l">
-            <a:lnSpc>
-              <a:spcPct val="100000"/>
-            </a:lnSpc>
-          </a:pPr>
-          <a:r>
-            <a:rPr lang="nl-BE" dirty="0"/>
-            <a:t>Gebruiksvriendelijke </a:t>
-          </a:r>
-          <a:r>
-            <a:rPr lang="nl-BE" dirty="0" err="1"/>
-            <a:t>webtool</a:t>
-          </a:r>
-          <a:endParaRPr lang="en-US" dirty="0"/>
-        </a:p>
-      </dgm:t>
-    </dgm:pt>
-    <dgm:pt modelId="{8477E420-6020-4567-93DA-20129C377A37}" type="parTrans" cxnId="{95736D42-DA64-4177-97FC-C99DA97E86FB}">
-      <dgm:prSet/>
-      <dgm:spPr/>
-      <dgm:t>
-        <a:bodyPr/>
-        <a:lstStyle/>
-        <a:p>
-          <a:endParaRPr lang="en-US"/>
-        </a:p>
-      </dgm:t>
-    </dgm:pt>
-    <dgm:pt modelId="{DCB6099E-3CF8-4379-95B4-AD47F16B4710}" type="sibTrans" cxnId="{95736D42-DA64-4177-97FC-C99DA97E86FB}">
-      <dgm:prSet/>
-      <dgm:spPr/>
-      <dgm:t>
-        <a:bodyPr/>
-        <a:lstStyle/>
-        <a:p>
-          <a:endParaRPr lang="en-US"/>
-        </a:p>
-      </dgm:t>
-    </dgm:pt>
-    <dgm:pt modelId="{45AFEC64-F763-4EAE-9198-FD28259E4800}">
-      <dgm:prSet/>
-      <dgm:spPr/>
-      <dgm:t>
-        <a:bodyPr/>
-        <a:lstStyle/>
-        <a:p>
-          <a:pPr algn="l">
-            <a:lnSpc>
-              <a:spcPct val="100000"/>
-            </a:lnSpc>
-          </a:pPr>
-          <a:r>
-            <a:rPr lang="nl-BE" dirty="0"/>
-            <a:t>Efficiëntie</a:t>
-          </a:r>
-          <a:endParaRPr lang="en-US" dirty="0"/>
-        </a:p>
-      </dgm:t>
-    </dgm:pt>
-    <dgm:pt modelId="{522C9428-0413-43E4-BDFC-9B957E9DAAA2}" type="parTrans" cxnId="{C10B4285-DF44-4E01-94AD-DCF01830031D}">
-      <dgm:prSet/>
-      <dgm:spPr/>
-      <dgm:t>
-        <a:bodyPr/>
-        <a:lstStyle/>
-        <a:p>
-          <a:endParaRPr lang="en-US"/>
-        </a:p>
-      </dgm:t>
-    </dgm:pt>
-    <dgm:pt modelId="{BC0644AA-05E8-4E1A-8F53-0881A0DF2563}" type="sibTrans" cxnId="{C10B4285-DF44-4E01-94AD-DCF01830031D}">
-      <dgm:prSet/>
-      <dgm:spPr/>
-      <dgm:t>
-        <a:bodyPr/>
-        <a:lstStyle/>
-        <a:p>
-          <a:endParaRPr lang="en-US"/>
-        </a:p>
-      </dgm:t>
-    </dgm:pt>
-    <dgm:pt modelId="{284946A6-232C-41F8-8DB7-A27F45DF0ED5}">
-      <dgm:prSet/>
-      <dgm:spPr/>
-      <dgm:t>
-        <a:bodyPr/>
-        <a:lstStyle/>
-        <a:p>
-          <a:pPr algn="l">
-            <a:lnSpc>
-              <a:spcPct val="100000"/>
-            </a:lnSpc>
-          </a:pPr>
-          <a:r>
-            <a:rPr lang="nl-BE" dirty="0"/>
-            <a:t>Toegankelijk voor niet-security experts</a:t>
-          </a:r>
-          <a:endParaRPr lang="en-US" dirty="0"/>
-        </a:p>
-      </dgm:t>
-    </dgm:pt>
-    <dgm:pt modelId="{512B107B-8F83-4FF5-9E03-95BE4AE90B59}" type="parTrans" cxnId="{BDF0DE74-D343-4F55-A100-4B44D95A00E8}">
-      <dgm:prSet/>
-      <dgm:spPr/>
-      <dgm:t>
-        <a:bodyPr/>
-        <a:lstStyle/>
-        <a:p>
-          <a:endParaRPr lang="en-US"/>
-        </a:p>
-      </dgm:t>
-    </dgm:pt>
-    <dgm:pt modelId="{A3975C41-BCB5-4A5B-8C73-F1A771A07BB6}" type="sibTrans" cxnId="{BDF0DE74-D343-4F55-A100-4B44D95A00E8}">
       <dgm:prSet/>
       <dgm:spPr/>
       <dgm:t>
@@ -5388,23 +5278,17 @@
     <dgm:cxn modelId="{3209BD0B-F23C-4CD6-A977-8AAD7AD5F90A}" srcId="{D6175A2A-ED79-4C16-8FA2-8125E74A22CC}" destId="{1F7DD495-8349-446F-96CA-66905335B05B}" srcOrd="0" destOrd="0" parTransId="{9503D542-37A3-4E0F-BAF3-E8AE513A493F}" sibTransId="{38BB0B3D-04FA-4963-9C57-A8AB44A0C54A}"/>
     <dgm:cxn modelId="{CCA04F14-C0B6-4A12-804B-CBD15CE742BC}" srcId="{3BB455F7-5F84-40FD-B7BA-52245D12B67C}" destId="{D520DAC4-C4F9-4395-BB89-F15F114D662B}" srcOrd="1" destOrd="0" parTransId="{C4366986-B914-43BF-BFCB-988C89AE2D20}" sibTransId="{6C098103-286A-4302-819E-B4BA14126C2D}"/>
     <dgm:cxn modelId="{F901DE23-77FA-4EFF-A59C-8EF3E0D922FD}" srcId="{D6175A2A-ED79-4C16-8FA2-8125E74A22CC}" destId="{6CC528B5-C5A1-45D1-A5FA-AD48965E0283}" srcOrd="2" destOrd="0" parTransId="{8AB5426F-81FD-4CE2-8E43-FDA88B81041C}" sibTransId="{08DE4A5E-388E-4A64-9BA9-D0A6A74B0F1B}"/>
-    <dgm:cxn modelId="{F831AC2F-9F34-4A3B-9A8F-687623B81AC1}" type="presOf" srcId="{AE71CAED-B1D0-4156-BF7D-5CAC8A0654C8}" destId="{7A14753F-13CD-41E3-A4EB-68F61FC36167}" srcOrd="0" destOrd="1" presId="urn:microsoft.com/office/officeart/2018/5/layout/CenteredIconLabelDescriptionList"/>
     <dgm:cxn modelId="{C141073E-8C5F-472C-8110-376B7172CF2F}" type="presOf" srcId="{3BB455F7-5F84-40FD-B7BA-52245D12B67C}" destId="{E6EDD5CE-CE9A-4CC7-9F5D-1A21F551BA48}" srcOrd="0" destOrd="0" presId="urn:microsoft.com/office/officeart/2018/5/layout/CenteredIconLabelDescriptionList"/>
     <dgm:cxn modelId="{AEE4EC60-0CDA-42F5-A147-6E5A3DA21556}" type="presOf" srcId="{59568FAC-E0DC-474C-B82A-468E7A61884F}" destId="{7A14753F-13CD-41E3-A4EB-68F61FC36167}" srcOrd="0" destOrd="0" presId="urn:microsoft.com/office/officeart/2018/5/layout/CenteredIconLabelDescriptionList"/>
-    <dgm:cxn modelId="{95736D42-DA64-4177-97FC-C99DA97E86FB}" srcId="{D520DAC4-C4F9-4395-BB89-F15F114D662B}" destId="{AE71CAED-B1D0-4156-BF7D-5CAC8A0654C8}" srcOrd="1" destOrd="0" parTransId="{8477E420-6020-4567-93DA-20129C377A37}" sibTransId="{DCB6099E-3CF8-4379-95B4-AD47F16B4710}"/>
     <dgm:cxn modelId="{87581869-2DAB-4EE7-BFD7-B66D9E2CC56E}" srcId="{FB8CD078-590B-4D5B-921A-AD4C03189EF9}" destId="{D8652563-0468-4AE5-81F5-7441790B14A7}" srcOrd="0" destOrd="0" parTransId="{D094DF52-549A-4D2B-9C7D-73A9A94FC7E8}" sibTransId="{ED2F2CD6-AC2B-4E38-9B43-DE31E1E5E150}"/>
     <dgm:cxn modelId="{2A3ED649-22FF-48B2-A4E0-3DD97B98508B}" type="presOf" srcId="{1F7DD495-8349-446F-96CA-66905335B05B}" destId="{0E08AE28-0D68-44C6-B6EF-477CDEB88556}" srcOrd="0" destOrd="2" presId="urn:microsoft.com/office/officeart/2018/5/layout/CenteredIconLabelDescriptionList"/>
     <dgm:cxn modelId="{397EA54C-40D6-45F3-9D80-36189221837D}" type="presOf" srcId="{FB8CD078-590B-4D5B-921A-AD4C03189EF9}" destId="{0E08AE28-0D68-44C6-B6EF-477CDEB88556}" srcOrd="0" destOrd="5" presId="urn:microsoft.com/office/officeart/2018/5/layout/CenteredIconLabelDescriptionList"/>
     <dgm:cxn modelId="{43DC0370-A72F-4502-BDEF-42E23A171962}" type="presOf" srcId="{A7774577-4E74-47C0-AE7B-364524CB8B4E}" destId="{0E08AE28-0D68-44C6-B6EF-477CDEB88556}" srcOrd="0" destOrd="7" presId="urn:microsoft.com/office/officeart/2018/5/layout/CenteredIconLabelDescriptionList"/>
-    <dgm:cxn modelId="{BDF0DE74-D343-4F55-A100-4B44D95A00E8}" srcId="{D520DAC4-C4F9-4395-BB89-F15F114D662B}" destId="{284946A6-232C-41F8-8DB7-A27F45DF0ED5}" srcOrd="3" destOrd="0" parTransId="{512B107B-8F83-4FF5-9E03-95BE4AE90B59}" sibTransId="{A3975C41-BCB5-4A5B-8C73-F1A771A07BB6}"/>
     <dgm:cxn modelId="{3EA94858-E58A-4AF1-A49D-8572AB1CC849}" type="presOf" srcId="{9929466F-8CAB-46D5-91F2-9D6CD65727C8}" destId="{0E08AE28-0D68-44C6-B6EF-477CDEB88556}" srcOrd="0" destOrd="3" presId="urn:microsoft.com/office/officeart/2018/5/layout/CenteredIconLabelDescriptionList"/>
     <dgm:cxn modelId="{907E455A-4CD0-4390-A96A-490B622EE30F}" srcId="{C7E3F90A-167F-4058-BEDD-AA73590CF37A}" destId="{D6175A2A-ED79-4C16-8FA2-8125E74A22CC}" srcOrd="1" destOrd="0" parTransId="{E441147E-8E1B-45C6-AA71-8837F5B6EDAD}" sibTransId="{7587E2B1-8F06-4AC2-BE56-1A3961D83B65}"/>
-    <dgm:cxn modelId="{028E8E80-E76E-4ED8-A975-D36151AA59FE}" type="presOf" srcId="{284946A6-232C-41F8-8DB7-A27F45DF0ED5}" destId="{7A14753F-13CD-41E3-A4EB-68F61FC36167}" srcOrd="0" destOrd="3" presId="urn:microsoft.com/office/officeart/2018/5/layout/CenteredIconLabelDescriptionList"/>
     <dgm:cxn modelId="{985EB183-3A4C-41E8-831C-8626543A3788}" type="presOf" srcId="{6CC528B5-C5A1-45D1-A5FA-AD48965E0283}" destId="{0E08AE28-0D68-44C6-B6EF-477CDEB88556}" srcOrd="0" destOrd="4" presId="urn:microsoft.com/office/officeart/2018/5/layout/CenteredIconLabelDescriptionList"/>
-    <dgm:cxn modelId="{C10B4285-DF44-4E01-94AD-DCF01830031D}" srcId="{D520DAC4-C4F9-4395-BB89-F15F114D662B}" destId="{45AFEC64-F763-4EAE-9198-FD28259E4800}" srcOrd="2" destOrd="0" parTransId="{522C9428-0413-43E4-BDFC-9B957E9DAAA2}" sibTransId="{BC0644AA-05E8-4E1A-8F53-0881A0DF2563}"/>
     <dgm:cxn modelId="{6A645F88-A985-42A4-A6F2-756494C65EA1}" srcId="{FB8CD078-590B-4D5B-921A-AD4C03189EF9}" destId="{A7774577-4E74-47C0-AE7B-364524CB8B4E}" srcOrd="1" destOrd="0" parTransId="{7BBEB579-F537-4C1E-81CE-79B5BD94F637}" sibTransId="{8A6D21CA-9747-4FF3-B62F-D93A4599A66E}"/>
     <dgm:cxn modelId="{3E414F8A-3B56-4D5D-B9CF-4286EE230E67}" type="presOf" srcId="{D6175A2A-ED79-4C16-8FA2-8125E74A22CC}" destId="{0E08AE28-0D68-44C6-B6EF-477CDEB88556}" srcOrd="0" destOrd="1" presId="urn:microsoft.com/office/officeart/2018/5/layout/CenteredIconLabelDescriptionList"/>
-    <dgm:cxn modelId="{49707B8A-DE77-474A-91F6-5CF36EC38D1A}" type="presOf" srcId="{45AFEC64-F763-4EAE-9198-FD28259E4800}" destId="{7A14753F-13CD-41E3-A4EB-68F61FC36167}" srcOrd="0" destOrd="2" presId="urn:microsoft.com/office/officeart/2018/5/layout/CenteredIconLabelDescriptionList"/>
     <dgm:cxn modelId="{DE434197-2100-4A8D-9232-87E4E2CC6FD4}" srcId="{C7E3F90A-167F-4058-BEDD-AA73590CF37A}" destId="{751573BB-A373-4363-A0E1-53C550FF3833}" srcOrd="0" destOrd="0" parTransId="{C3CB5EC2-C8F8-4D6F-8266-ACF9E3D862E2}" sibTransId="{F4354797-4309-4FFE-A74F-4A5EEE92AB73}"/>
     <dgm:cxn modelId="{6ABB62A2-F645-470D-9F75-71F8020D5478}" srcId="{3BB455F7-5F84-40FD-B7BA-52245D12B67C}" destId="{C7E3F90A-167F-4058-BEDD-AA73590CF37A}" srcOrd="0" destOrd="0" parTransId="{46A64E96-6BF9-4063-B448-B73E2E9CA7C1}" sibTransId="{8A89B7EF-21B9-434B-9A74-262FC90295BB}"/>
     <dgm:cxn modelId="{CC3B5EA8-C12D-4E99-9602-AE4EBE55CE6F}" srcId="{D6175A2A-ED79-4C16-8FA2-8125E74A22CC}" destId="{9929466F-8CAB-46D5-91F2-9D6CD65727C8}" srcOrd="1" destOrd="0" parTransId="{13B77C23-5C28-4E99-A901-20375391A5FF}" sibTransId="{16FED7C9-4DE3-4B60-A2F9-C155BABAFD91}"/>
@@ -8405,30 +8289,7 @@
         </a:bodyPr>
         <a:lstStyle/>
         <a:p>
-          <a:pPr marL="0" lvl="0" indent="0" algn="l" defTabSz="755650">
-            <a:lnSpc>
-              <a:spcPct val="100000"/>
-            </a:lnSpc>
-            <a:spcBef>
-              <a:spcPct val="0"/>
-            </a:spcBef>
-            <a:spcAft>
-              <a:spcPct val="35000"/>
-            </a:spcAft>
-            <a:buNone/>
-          </a:pPr>
-          <a:r>
-            <a:rPr lang="nl-BE" sz="1700" kern="1200" dirty="0" err="1"/>
-            <a:t>Fortunately-unfortunately</a:t>
-          </a:r>
-          <a:r>
-            <a:rPr lang="nl-BE" sz="1700" kern="1200" dirty="0"/>
-            <a:t> methode</a:t>
-          </a:r>
-          <a:endParaRPr lang="en-US" sz="1700" kern="1200" dirty="0"/>
-        </a:p>
-        <a:p>
-          <a:pPr marL="0" lvl="0" indent="0" algn="l" defTabSz="755650">
+          <a:pPr marL="0" lvl="0" indent="0" algn="ctr" defTabSz="755650">
             <a:lnSpc>
               <a:spcPct val="100000"/>
             </a:lnSpc>
@@ -8442,49 +8303,31 @@
           </a:pPr>
           <a:r>
             <a:rPr lang="nl-BE" sz="1700" kern="1200" dirty="0"/>
-            <a:t>Gebruiksvriendelijke </a:t>
+            <a:t>Het doel is het ontwikkelen van een gebruiksvriendelijke en efficiënte </a:t>
           </a:r>
           <a:r>
             <a:rPr lang="nl-BE" sz="1700" kern="1200" dirty="0" err="1"/>
             <a:t>webtool</a:t>
           </a:r>
-          <a:endParaRPr lang="en-US" sz="1700" kern="1200" dirty="0"/>
-        </a:p>
-        <a:p>
-          <a:pPr marL="0" lvl="0" indent="0" algn="l" defTabSz="755650">
-            <a:lnSpc>
-              <a:spcPct val="100000"/>
-            </a:lnSpc>
-            <a:spcBef>
-              <a:spcPct val="0"/>
-            </a:spcBef>
-            <a:spcAft>
-              <a:spcPct val="35000"/>
-            </a:spcAft>
-            <a:buNone/>
-          </a:pPr>
           <a:r>
             <a:rPr lang="nl-BE" sz="1700" kern="1200" dirty="0"/>
-            <a:t>Efficiëntie</a:t>
+            <a:t> die, op basis van de </a:t>
           </a:r>
-          <a:endParaRPr lang="en-US" sz="1700" kern="1200" dirty="0"/>
-        </a:p>
-        <a:p>
-          <a:pPr marL="0" lvl="0" indent="0" algn="l" defTabSz="755650">
-            <a:lnSpc>
-              <a:spcPct val="100000"/>
-            </a:lnSpc>
-            <a:spcBef>
-              <a:spcPct val="0"/>
-            </a:spcBef>
-            <a:spcAft>
-              <a:spcPct val="35000"/>
-            </a:spcAft>
-            <a:buNone/>
-          </a:pPr>
+          <a:r>
+            <a:rPr lang="nl-BE" sz="1700" kern="1200" dirty="0" err="1"/>
+            <a:t>fortunately</a:t>
+          </a:r>
           <a:r>
             <a:rPr lang="nl-BE" sz="1700" kern="1200" dirty="0"/>
-            <a:t>Toegankelijk voor niet-security experts</a:t>
+            <a:t>–</a:t>
+          </a:r>
+          <a:r>
+            <a:rPr lang="nl-BE" sz="1700" kern="1200" dirty="0" err="1"/>
+            <a:t>unfortunately</a:t>
+          </a:r>
+          <a:r>
+            <a:rPr lang="nl-BE" sz="1700" kern="1200" dirty="0"/>
+            <a:t> methode, toegankelijk is voor niet‑security‑experts.</a:t>
           </a:r>
           <a:endParaRPr lang="en-US" sz="1700" kern="1200" dirty="0"/>
         </a:p>
@@ -18655,7 +18498,7 @@
               <a:pPr>
                 <a:defRPr/>
               </a:pPr>
-              <a:t>27-1-2026</a:t>
+              <a:t>28-1-2026</a:t>
             </a:fld>
             <a:endParaRPr lang="nl-NL"/>
           </a:p>
@@ -19205,110 +19048,13 @@
           <a:p>
             <a:r>
               <a:rPr lang="nl-BE" dirty="0"/>
-              <a:t>Verklaring observaties:</a:t>
-            </a:r>
-          </a:p>
-          <a:p>
-            <a:pPr lvl="1"/>
+              <a:t>Taken:</a:t>
+            </a:r>
+          </a:p>
+          <a:p>
             <a:r>
               <a:rPr lang="nl-BE" dirty="0"/>
-              <a:t>Basisversie:</a:t>
-            </a:r>
-          </a:p>
-          <a:p>
-            <a:pPr lvl="2"/>
-            <a:r>
-              <a:rPr lang="nl-BE" dirty="0"/>
-              <a:t>Veel scrollen en zoeken</a:t>
-            </a:r>
-          </a:p>
-          <a:p>
-            <a:pPr lvl="2"/>
-            <a:r>
-              <a:rPr lang="nl-BE" dirty="0"/>
-              <a:t>Zoekbalk-afhankelijkheid</a:t>
-            </a:r>
-          </a:p>
-          <a:p>
-            <a:pPr lvl="2"/>
-            <a:r>
-              <a:rPr lang="nl-BE" dirty="0"/>
-              <a:t>Handmatig tellen</a:t>
-            </a:r>
-          </a:p>
-          <a:p>
-            <a:pPr lvl="2"/>
-            <a:r>
-              <a:rPr lang="nl-BE" dirty="0" err="1"/>
-              <a:t>Danger</a:t>
-            </a:r>
-            <a:r>
-              <a:rPr lang="nl-BE" dirty="0"/>
-              <a:t> rating/status vergeten</a:t>
-            </a:r>
-          </a:p>
-          <a:p>
-            <a:pPr lvl="2"/>
-            <a:r>
-              <a:rPr lang="nl-BE" dirty="0"/>
-              <a:t>Manuele kettingreconstructie</a:t>
-            </a:r>
-          </a:p>
-          <a:p>
-            <a:pPr lvl="1"/>
-            <a:endParaRPr lang="nl-BE" dirty="0"/>
-          </a:p>
-          <a:p>
-            <a:pPr lvl="1"/>
-            <a:r>
-              <a:rPr lang="nl-BE" dirty="0"/>
-              <a:t>Problemen:</a:t>
-            </a:r>
-          </a:p>
-          <a:p>
-            <a:pPr lvl="2"/>
-            <a:r>
-              <a:rPr lang="nl-BE" dirty="0"/>
-              <a:t>Te veel tijd</a:t>
-            </a:r>
-          </a:p>
-          <a:p>
-            <a:pPr lvl="2"/>
-            <a:r>
-              <a:rPr lang="nl-BE" dirty="0"/>
-              <a:t>Foutgevoelig</a:t>
-            </a:r>
-          </a:p>
-          <a:p>
-            <a:pPr lvl="2"/>
-            <a:r>
-              <a:rPr lang="nl-BE" dirty="0"/>
-              <a:t>typefouten</a:t>
-            </a:r>
-          </a:p>
-          <a:p>
-            <a:pPr lvl="1"/>
-            <a:endParaRPr lang="nl-BE" dirty="0"/>
-          </a:p>
-          <a:p>
-            <a:pPr lvl="1"/>
-            <a:r>
-              <a:rPr lang="nl-BE" dirty="0"/>
-              <a:t>Uitgebreide versie oplossingen:</a:t>
-            </a:r>
-          </a:p>
-          <a:p>
-            <a:pPr lvl="2"/>
-            <a:r>
-              <a:rPr lang="nl-BE" dirty="0"/>
-              <a:t>Standaard status</a:t>
-            </a:r>
-          </a:p>
-          <a:p>
-            <a:pPr lvl="2"/>
-            <a:r>
-              <a:rPr lang="nl-BE" dirty="0"/>
-              <a:t>Visueel prominente </a:t>
+              <a:t>	Nodes toevoegen, status en </a:t>
             </a:r>
             <a:r>
               <a:rPr lang="nl-BE" dirty="0" err="1"/>
@@ -19320,40 +19066,36 @@
             </a:r>
           </a:p>
           <a:p>
-            <a:pPr lvl="2"/>
             <a:r>
               <a:rPr lang="nl-BE" dirty="0"/>
-              <a:t>Directe filtering</a:t>
-            </a:r>
-          </a:p>
-          <a:p>
-            <a:pPr lvl="2"/>
+              <a:t>	Status overzicht + ranking </a:t>
+            </a:r>
             <a:r>
               <a:rPr lang="nl-BE" dirty="0" err="1"/>
-              <a:t>Branch</a:t>
+              <a:t>danger</a:t>
             </a:r>
             <a:r>
               <a:rPr lang="nl-BE" dirty="0"/>
-              <a:t> Summary </a:t>
-            </a:r>
-            <a:r>
-              <a:rPr lang="nl-BE" dirty="0" err="1"/>
-              <a:t>ipv</a:t>
-            </a:r>
+              <a:t> rating</a:t>
+            </a:r>
+          </a:p>
+          <a:p>
             <a:r>
               <a:rPr lang="nl-BE" dirty="0"/>
-              <a:t> manueel</a:t>
-            </a:r>
-          </a:p>
-          <a:p>
-            <a:pPr lvl="2"/>
+              <a:t>		Werkoverzicht</a:t>
+            </a:r>
+          </a:p>
+          <a:p>
             <a:r>
               <a:rPr lang="nl-BE" dirty="0"/>
-              <a:t>Sneller en minder foutgevoelig</a:t>
-            </a:r>
-          </a:p>
-          <a:p>
-            <a:endParaRPr lang="nl-BE" dirty="0"/>
+              <a:t>	Samenvatting keten</a:t>
+            </a:r>
+          </a:p>
+          <a:p>
+            <a:r>
+              <a:rPr lang="nl-BE" dirty="0"/>
+              <a:t>		Besprekingen</a:t>
+            </a:r>
           </a:p>
         </p:txBody>
       </p:sp>
@@ -19375,7 +19117,7 @@
             <a:fld id="{EE766661-4A69-4D38-9B93-78F7EA23D71A}" type="slidenum">
               <a:rPr lang="nl-NL" altLang="en-US" smtClean="0"/>
               <a:pPr/>
-              <a:t>21</a:t>
+              <a:t>20</a:t>
             </a:fld>
             <a:endParaRPr lang="nl-NL" altLang="en-US"/>
           </a:p>
@@ -19384,7 +19126,7 @@
     </p:spTree>
     <p:extLst>
       <p:ext uri="{BB962C8B-B14F-4D97-AF65-F5344CB8AC3E}">
-        <p14:creationId xmlns:p14="http://schemas.microsoft.com/office/powerpoint/2010/main" val="3648720770"/>
+        <p14:creationId xmlns:p14="http://schemas.microsoft.com/office/powerpoint/2010/main" val="1871128967"/>
       </p:ext>
     </p:extLst>
   </p:cSld>
@@ -19440,85 +19182,154 @@
           <a:p>
             <a:r>
               <a:rPr lang="nl-BE" dirty="0"/>
-              <a:t>Vraag 3:</a:t>
-            </a:r>
-          </a:p>
-          <a:p>
+              <a:t>Verklaring observaties:</a:t>
+            </a:r>
+          </a:p>
+          <a:p>
+            <a:pPr lvl="1"/>
             <a:r>
               <a:rPr lang="nl-BE" dirty="0"/>
-              <a:t>	Betere </a:t>
-            </a:r>
-            <a:r>
-              <a:rPr lang="nl-BE" dirty="0" err="1"/>
-              <a:t>gebruiksvriendelijheid</a:t>
-            </a:r>
-            <a:endParaRPr lang="nl-BE" dirty="0"/>
-          </a:p>
-          <a:p>
+              <a:t>Basisversie:</a:t>
+            </a:r>
+          </a:p>
+          <a:p>
+            <a:pPr lvl="2"/>
             <a:r>
               <a:rPr lang="nl-BE" dirty="0"/>
-              <a:t>		Positieve UEQ-scores</a:t>
-            </a:r>
-          </a:p>
-          <a:p>
+              <a:t>Veel scrollen en zoeken</a:t>
+            </a:r>
+          </a:p>
+          <a:p>
+            <a:pPr lvl="2"/>
             <a:r>
               <a:rPr lang="nl-BE" dirty="0"/>
-              <a:t>	Betere effectiviteit</a:t>
-            </a:r>
-          </a:p>
-          <a:p>
+              <a:t>Zoekbalk-afhankelijkheid</a:t>
+            </a:r>
+          </a:p>
+          <a:p>
+            <a:pPr lvl="2"/>
             <a:r>
               <a:rPr lang="nl-BE" dirty="0"/>
-              <a:t>		Positieve UEQ-score</a:t>
-            </a:r>
-          </a:p>
-          <a:p>
-            <a:r>
-              <a:rPr lang="nl-BE" dirty="0"/>
-              <a:t>		Vragen</a:t>
-            </a:r>
-          </a:p>
-          <a:p>
-            <a:r>
-              <a:rPr lang="nl-BE" dirty="0"/>
-              <a:t>	</a:t>
-            </a:r>
+              <a:t>Handmatig tellen</a:t>
+            </a:r>
+          </a:p>
+          <a:p>
+            <a:pPr lvl="2"/>
             <a:r>
               <a:rPr lang="nl-BE" dirty="0" err="1"/>
               <a:t>Danger</a:t>
             </a:r>
             <a:r>
               <a:rPr lang="nl-BE" dirty="0"/>
-              <a:t> ratings</a:t>
-            </a:r>
-          </a:p>
-          <a:p>
+              <a:t> rating/status vergeten</a:t>
+            </a:r>
+          </a:p>
+          <a:p>
+            <a:pPr lvl="2"/>
             <a:r>
               <a:rPr lang="nl-BE" dirty="0"/>
-              <a:t>	Status en filter</a:t>
-            </a:r>
-          </a:p>
-          <a:p>
+              <a:t>Manuele kettingreconstructie</a:t>
+            </a:r>
+          </a:p>
+          <a:p>
+            <a:pPr lvl="1"/>
+            <a:endParaRPr lang="nl-BE" dirty="0"/>
+          </a:p>
+          <a:p>
+            <a:pPr lvl="1"/>
             <a:r>
               <a:rPr lang="nl-BE" dirty="0"/>
-              <a:t>	</a:t>
-            </a:r>
-            <a:r>
-              <a:rPr lang="nl-BE" i="0" dirty="0"/>
-              <a:t>Toegankelijker voor niet security-experts</a:t>
-            </a:r>
-          </a:p>
-          <a:p>
-            <a:r>
-              <a:rPr lang="nl-BE" i="0" dirty="0"/>
-              <a:t>		Makkelijk te begrijpen</a:t>
-            </a:r>
-          </a:p>
-          <a:p>
-            <a:r>
-              <a:rPr lang="nl-BE" i="0" dirty="0"/>
-              <a:t>		Af te leiden uit vragen</a:t>
-            </a:r>
+              <a:t>Problemen:</a:t>
+            </a:r>
+          </a:p>
+          <a:p>
+            <a:pPr lvl="2"/>
+            <a:r>
+              <a:rPr lang="nl-BE" dirty="0"/>
+              <a:t>Te veel tijd</a:t>
+            </a:r>
+          </a:p>
+          <a:p>
+            <a:pPr lvl="2"/>
+            <a:r>
+              <a:rPr lang="nl-BE" dirty="0"/>
+              <a:t>Foutgevoelig</a:t>
+            </a:r>
+          </a:p>
+          <a:p>
+            <a:pPr lvl="2"/>
+            <a:r>
+              <a:rPr lang="nl-BE" dirty="0"/>
+              <a:t>typefouten</a:t>
+            </a:r>
+          </a:p>
+          <a:p>
+            <a:pPr lvl="1"/>
+            <a:endParaRPr lang="nl-BE" dirty="0"/>
+          </a:p>
+          <a:p>
+            <a:pPr lvl="1"/>
+            <a:r>
+              <a:rPr lang="nl-BE" dirty="0"/>
+              <a:t>Uitgebreide versie oplossingen:</a:t>
+            </a:r>
+          </a:p>
+          <a:p>
+            <a:pPr lvl="2"/>
+            <a:r>
+              <a:rPr lang="nl-BE" dirty="0"/>
+              <a:t>Standaard status</a:t>
+            </a:r>
+          </a:p>
+          <a:p>
+            <a:pPr lvl="2"/>
+            <a:r>
+              <a:rPr lang="nl-BE" dirty="0"/>
+              <a:t>Visueel prominente </a:t>
+            </a:r>
+            <a:r>
+              <a:rPr lang="nl-BE" dirty="0" err="1"/>
+              <a:t>danger</a:t>
+            </a:r>
+            <a:r>
+              <a:rPr lang="nl-BE" dirty="0"/>
+              <a:t> rating</a:t>
+            </a:r>
+          </a:p>
+          <a:p>
+            <a:pPr lvl="2"/>
+            <a:r>
+              <a:rPr lang="nl-BE" dirty="0"/>
+              <a:t>Directe filtering</a:t>
+            </a:r>
+          </a:p>
+          <a:p>
+            <a:pPr lvl="2"/>
+            <a:r>
+              <a:rPr lang="nl-BE" dirty="0" err="1"/>
+              <a:t>Branch</a:t>
+            </a:r>
+            <a:r>
+              <a:rPr lang="nl-BE" dirty="0"/>
+              <a:t> Summary </a:t>
+            </a:r>
+            <a:r>
+              <a:rPr lang="nl-BE" dirty="0" err="1"/>
+              <a:t>ipv</a:t>
+            </a:r>
+            <a:r>
+              <a:rPr lang="nl-BE" dirty="0"/>
+              <a:t> manueel</a:t>
+            </a:r>
+          </a:p>
+          <a:p>
+            <a:pPr lvl="2"/>
+            <a:r>
+              <a:rPr lang="nl-BE" dirty="0"/>
+              <a:t>Sneller en minder foutgevoelig</a:t>
+            </a:r>
+          </a:p>
+          <a:p>
             <a:endParaRPr lang="nl-BE" dirty="0"/>
           </a:p>
         </p:txBody>
@@ -19541,7 +19352,7 @@
             <a:fld id="{EE766661-4A69-4D38-9B93-78F7EA23D71A}" type="slidenum">
               <a:rPr lang="nl-NL" altLang="en-US" smtClean="0"/>
               <a:pPr/>
-              <a:t>26</a:t>
+              <a:t>22</a:t>
             </a:fld>
             <a:endParaRPr lang="nl-NL" altLang="en-US"/>
           </a:p>
@@ -19550,7 +19361,7 @@
     </p:spTree>
     <p:extLst>
       <p:ext uri="{BB962C8B-B14F-4D97-AF65-F5344CB8AC3E}">
-        <p14:creationId xmlns:p14="http://schemas.microsoft.com/office/powerpoint/2010/main" val="3145629799"/>
+        <p14:creationId xmlns:p14="http://schemas.microsoft.com/office/powerpoint/2010/main" val="3648720770"/>
       </p:ext>
     </p:extLst>
   </p:cSld>
@@ -19604,6 +19415,87 @@
           <a:bodyPr/>
           <a:lstStyle/>
           <a:p>
+            <a:r>
+              <a:rPr lang="nl-BE" dirty="0"/>
+              <a:t>Vraag 3:</a:t>
+            </a:r>
+          </a:p>
+          <a:p>
+            <a:r>
+              <a:rPr lang="nl-BE" dirty="0"/>
+              <a:t>	Betere </a:t>
+            </a:r>
+            <a:r>
+              <a:rPr lang="nl-BE" dirty="0" err="1"/>
+              <a:t>gebruiksvriendelijheid</a:t>
+            </a:r>
+            <a:endParaRPr lang="nl-BE" dirty="0"/>
+          </a:p>
+          <a:p>
+            <a:r>
+              <a:rPr lang="nl-BE" dirty="0"/>
+              <a:t>		Positieve UEQ-scores</a:t>
+            </a:r>
+          </a:p>
+          <a:p>
+            <a:r>
+              <a:rPr lang="nl-BE" dirty="0"/>
+              <a:t>	Betere effectiviteit</a:t>
+            </a:r>
+          </a:p>
+          <a:p>
+            <a:r>
+              <a:rPr lang="nl-BE" dirty="0"/>
+              <a:t>		Positieve UEQ-score</a:t>
+            </a:r>
+          </a:p>
+          <a:p>
+            <a:r>
+              <a:rPr lang="nl-BE" dirty="0"/>
+              <a:t>		Vragen</a:t>
+            </a:r>
+          </a:p>
+          <a:p>
+            <a:r>
+              <a:rPr lang="nl-BE" dirty="0"/>
+              <a:t>	</a:t>
+            </a:r>
+            <a:r>
+              <a:rPr lang="nl-BE" dirty="0" err="1"/>
+              <a:t>Danger</a:t>
+            </a:r>
+            <a:r>
+              <a:rPr lang="nl-BE" dirty="0"/>
+              <a:t> ratings</a:t>
+            </a:r>
+          </a:p>
+          <a:p>
+            <a:r>
+              <a:rPr lang="nl-BE" dirty="0"/>
+              <a:t>	Status en filter</a:t>
+            </a:r>
+          </a:p>
+          <a:p>
+            <a:r>
+              <a:rPr lang="nl-BE" dirty="0"/>
+              <a:t>	</a:t>
+            </a:r>
+            <a:r>
+              <a:rPr lang="nl-BE" i="0" dirty="0"/>
+              <a:t>Toegankelijker voor niet security-experts</a:t>
+            </a:r>
+          </a:p>
+          <a:p>
+            <a:r>
+              <a:rPr lang="nl-BE" i="0" dirty="0"/>
+              <a:t>		Makkelijk te begrijpen</a:t>
+            </a:r>
+          </a:p>
+          <a:p>
+            <a:r>
+              <a:rPr lang="nl-BE" i="0" dirty="0"/>
+              <a:t>		Af te leiden uit vragen</a:t>
+            </a:r>
             <a:endParaRPr lang="nl-BE" dirty="0"/>
           </a:p>
         </p:txBody>
@@ -19626,7 +19518,7 @@
             <a:fld id="{EE766661-4A69-4D38-9B93-78F7EA23D71A}" type="slidenum">
               <a:rPr lang="nl-NL" altLang="en-US" smtClean="0"/>
               <a:pPr/>
-              <a:t>30</a:t>
+              <a:t>26</a:t>
             </a:fld>
             <a:endParaRPr lang="nl-NL" altLang="en-US"/>
           </a:p>
@@ -19635,7 +19527,7 @@
     </p:spTree>
     <p:extLst>
       <p:ext uri="{BB962C8B-B14F-4D97-AF65-F5344CB8AC3E}">
-        <p14:creationId xmlns:p14="http://schemas.microsoft.com/office/powerpoint/2010/main" val="4158798506"/>
+        <p14:creationId xmlns:p14="http://schemas.microsoft.com/office/powerpoint/2010/main" val="3145629799"/>
       </p:ext>
     </p:extLst>
   </p:cSld>
@@ -19689,60 +19581,6 @@
           <a:bodyPr/>
           <a:lstStyle/>
           <a:p>
-            <a:r>
-              <a:rPr lang="nl-BE" dirty="0"/>
-              <a:t>Kleinere feature</a:t>
-            </a:r>
-          </a:p>
-          <a:p>
-            <a:r>
-              <a:rPr lang="nl-BE" dirty="0"/>
-              <a:t>Globale context</a:t>
-            </a:r>
-          </a:p>
-          <a:p>
-            <a:r>
-              <a:rPr lang="nl-BE" dirty="0"/>
-              <a:t>Verhoging overzicht</a:t>
-            </a:r>
-          </a:p>
-          <a:p>
-            <a:r>
-              <a:rPr lang="nl-BE" dirty="0"/>
-              <a:t>Zijpaneel</a:t>
-            </a:r>
-          </a:p>
-          <a:p>
-            <a:r>
-              <a:rPr lang="nl-BE" dirty="0"/>
-              <a:t>Reconstructie:</a:t>
-            </a:r>
-          </a:p>
-          <a:p>
-            <a:r>
-              <a:rPr lang="nl-BE" dirty="0"/>
-              <a:t>	Root –&gt; geselecteerde node</a:t>
-            </a:r>
-          </a:p>
-          <a:p>
-            <a:r>
-              <a:rPr lang="nl-BE" dirty="0"/>
-              <a:t>Ondersteuning taken als:</a:t>
-            </a:r>
-          </a:p>
-          <a:p>
-            <a:r>
-              <a:rPr lang="nl-BE" dirty="0"/>
-              <a:t>	Samenvatten</a:t>
-            </a:r>
-          </a:p>
-          <a:p>
-            <a:r>
-              <a:rPr lang="nl-BE" dirty="0"/>
-              <a:t>	Controleren keten</a:t>
-            </a:r>
-          </a:p>
-          <a:p>
             <a:endParaRPr lang="nl-BE" dirty="0"/>
           </a:p>
         </p:txBody>
@@ -19765,6 +19603,145 @@
             <a:fld id="{EE766661-4A69-4D38-9B93-78F7EA23D71A}" type="slidenum">
               <a:rPr lang="nl-NL" altLang="en-US" smtClean="0"/>
               <a:pPr/>
+              <a:t>29</a:t>
+            </a:fld>
+            <a:endParaRPr lang="nl-NL" altLang="en-US"/>
+          </a:p>
+        </p:txBody>
+      </p:sp>
+    </p:spTree>
+    <p:extLst>
+      <p:ext uri="{BB962C8B-B14F-4D97-AF65-F5344CB8AC3E}">
+        <p14:creationId xmlns:p14="http://schemas.microsoft.com/office/powerpoint/2010/main" val="4158798506"/>
+      </p:ext>
+    </p:extLst>
+  </p:cSld>
+  <p:clrMapOvr>
+    <a:masterClrMapping/>
+  </p:clrMapOvr>
+</p:notes>
+</file>
+
+<file path=ppt/notesSlides/notesSlide14.xml><?xml version="1.0" encoding="utf-8"?>
+<p:notes xmlns:a="http://schemas.openxmlformats.org/drawingml/2006/main" xmlns:r="http://schemas.openxmlformats.org/officeDocument/2006/relationships" xmlns:p="http://schemas.openxmlformats.org/presentationml/2006/main">
+  <p:cSld>
+    <p:spTree>
+      <p:nvGrpSpPr>
+        <p:cNvPr id="1" name=""/>
+        <p:cNvGrpSpPr/>
+        <p:nvPr/>
+      </p:nvGrpSpPr>
+      <p:grpSpPr>
+        <a:xfrm>
+          <a:off x="0" y="0"/>
+          <a:ext cx="0" cy="0"/>
+          <a:chOff x="0" y="0"/>
+          <a:chExt cx="0" cy="0"/>
+        </a:xfrm>
+      </p:grpSpPr>
+      <p:sp>
+        <p:nvSpPr>
+          <p:cNvPr id="2" name="Tijdelijke aanduiding voor dia-afbeelding 1"/>
+          <p:cNvSpPr>
+            <a:spLocks noGrp="1" noRot="1" noChangeAspect="1"/>
+          </p:cNvSpPr>
+          <p:nvPr>
+            <p:ph type="sldImg"/>
+          </p:nvPr>
+        </p:nvSpPr>
+        <p:spPr/>
+      </p:sp>
+      <p:sp>
+        <p:nvSpPr>
+          <p:cNvPr id="3" name="Tijdelijke aanduiding voor notities 2"/>
+          <p:cNvSpPr>
+            <a:spLocks noGrp="1"/>
+          </p:cNvSpPr>
+          <p:nvPr>
+            <p:ph type="body" idx="1"/>
+          </p:nvPr>
+        </p:nvSpPr>
+        <p:spPr/>
+        <p:txBody>
+          <a:bodyPr/>
+          <a:lstStyle/>
+          <a:p>
+            <a:r>
+              <a:rPr lang="nl-BE" dirty="0"/>
+              <a:t>Kleinere feature</a:t>
+            </a:r>
+          </a:p>
+          <a:p>
+            <a:r>
+              <a:rPr lang="nl-BE" dirty="0"/>
+              <a:t>Globale context</a:t>
+            </a:r>
+          </a:p>
+          <a:p>
+            <a:r>
+              <a:rPr lang="nl-BE" dirty="0"/>
+              <a:t>Verhoging overzicht</a:t>
+            </a:r>
+          </a:p>
+          <a:p>
+            <a:r>
+              <a:rPr lang="nl-BE" dirty="0"/>
+              <a:t>Zijpaneel</a:t>
+            </a:r>
+          </a:p>
+          <a:p>
+            <a:r>
+              <a:rPr lang="nl-BE" dirty="0"/>
+              <a:t>Reconstructie:</a:t>
+            </a:r>
+          </a:p>
+          <a:p>
+            <a:r>
+              <a:rPr lang="nl-BE" dirty="0"/>
+              <a:t>	Root –&gt; geselecteerde node</a:t>
+            </a:r>
+          </a:p>
+          <a:p>
+            <a:r>
+              <a:rPr lang="nl-BE" dirty="0"/>
+              <a:t>Ondersteuning taken als:</a:t>
+            </a:r>
+          </a:p>
+          <a:p>
+            <a:r>
+              <a:rPr lang="nl-BE" dirty="0"/>
+              <a:t>	Samenvatten</a:t>
+            </a:r>
+          </a:p>
+          <a:p>
+            <a:r>
+              <a:rPr lang="nl-BE" dirty="0"/>
+              <a:t>	Controleren keten</a:t>
+            </a:r>
+          </a:p>
+          <a:p>
+            <a:endParaRPr lang="nl-BE" dirty="0"/>
+          </a:p>
+        </p:txBody>
+      </p:sp>
+      <p:sp>
+        <p:nvSpPr>
+          <p:cNvPr id="4" name="Tijdelijke aanduiding voor dianummer 3"/>
+          <p:cNvSpPr>
+            <a:spLocks noGrp="1"/>
+          </p:cNvSpPr>
+          <p:nvPr>
+            <p:ph type="sldNum" sz="quarter" idx="5"/>
+          </p:nvPr>
+        </p:nvSpPr>
+        <p:spPr/>
+        <p:txBody>
+          <a:bodyPr/>
+          <a:lstStyle/>
+          <a:p>
+            <a:fld id="{EE766661-4A69-4D38-9B93-78F7EA23D71A}" type="slidenum">
+              <a:rPr lang="nl-NL" altLang="en-US" smtClean="0"/>
+              <a:pPr/>
               <a:t>34</a:t>
             </a:fld>
             <a:endParaRPr lang="nl-NL" altLang="en-US"/>
@@ -19784,7 +19761,7 @@
 </p:notes>
 </file>
 
-<file path=ppt/notesSlides/notesSlide14.xml><?xml version="1.0" encoding="utf-8"?>
+<file path=ppt/notesSlides/notesSlide15.xml><?xml version="1.0" encoding="utf-8"?>
 <p:notes xmlns:a="http://schemas.openxmlformats.org/drawingml/2006/main" xmlns:r="http://schemas.openxmlformats.org/officeDocument/2006/relationships" xmlns:p="http://schemas.openxmlformats.org/presentationml/2006/main">
   <p:cSld>
     <p:spTree>
@@ -21199,7 +21176,13 @@
   <p:cSld>
     <p:spTree>
       <p:nvGrpSpPr>
-        <p:cNvPr id="1" name=""/>
+        <p:cNvPr id="1" name="">
+          <a:extLst>
+            <a:ext uri="{FF2B5EF4-FFF2-40B4-BE49-F238E27FC236}">
+              <a16:creationId xmlns:a16="http://schemas.microsoft.com/office/drawing/2014/main" id="{C88908C7-C93B-E4DD-B8D5-8F6480977BA3}"/>
+            </a:ext>
+          </a:extLst>
+        </p:cNvPr>
         <p:cNvGrpSpPr/>
         <p:nvPr/>
       </p:nvGrpSpPr>
@@ -21213,7 +21196,13 @@
       </p:grpSpPr>
       <p:sp>
         <p:nvSpPr>
-          <p:cNvPr id="2" name="Tijdelijke aanduiding voor dia-afbeelding 1"/>
+          <p:cNvPr id="2" name="Tijdelijke aanduiding voor dia-afbeelding 1">
+            <a:extLst>
+              <a:ext uri="{FF2B5EF4-FFF2-40B4-BE49-F238E27FC236}">
+                <a16:creationId xmlns:a16="http://schemas.microsoft.com/office/drawing/2014/main" id="{51823BEF-FBAA-FEE6-4B4C-ADE87EB30178}"/>
+              </a:ext>
+            </a:extLst>
+          </p:cNvPr>
           <p:cNvSpPr>
             <a:spLocks noGrp="1" noRot="1" noChangeAspect="1"/>
           </p:cNvSpPr>
@@ -21225,7 +21214,13 @@
       </p:sp>
       <p:sp>
         <p:nvSpPr>
-          <p:cNvPr id="3" name="Tijdelijke aanduiding voor notities 2"/>
+          <p:cNvPr id="3" name="Tijdelijke aanduiding voor notities 2">
+            <a:extLst>
+              <a:ext uri="{FF2B5EF4-FFF2-40B4-BE49-F238E27FC236}">
+                <a16:creationId xmlns:a16="http://schemas.microsoft.com/office/drawing/2014/main" id="{E3B5F4B3-A6DF-3CE9-6044-6A1CF2AF5F28}"/>
+              </a:ext>
+            </a:extLst>
+          </p:cNvPr>
           <p:cNvSpPr>
             <a:spLocks noGrp="1"/>
           </p:cNvSpPr>
@@ -21240,60 +21235,109 @@
           <a:p>
             <a:r>
               <a:rPr lang="nl-BE" dirty="0"/>
-              <a:t>Taken:</a:t>
-            </a:r>
-          </a:p>
-          <a:p>
+              <a:t>Kwantitatieve risico inschatting</a:t>
+            </a:r>
+          </a:p>
+          <a:p>
+            <a:endParaRPr lang="nl-BE" dirty="0"/>
+          </a:p>
+          <a:p>
+            <a:r>
+              <a:rPr lang="nl-BE" dirty="0" err="1"/>
+              <a:t>Adhv</a:t>
+            </a:r>
             <a:r>
               <a:rPr lang="nl-BE" dirty="0"/>
-              <a:t>	Nodes toevoegen, status en </a:t>
+              <a:t> impact en </a:t>
             </a:r>
             <a:r>
               <a:rPr lang="nl-BE" dirty="0" err="1"/>
-              <a:t>danger</a:t>
+              <a:t>likelihood</a:t>
             </a:r>
             <a:r>
               <a:rPr lang="nl-BE" dirty="0"/>
-              <a:t> rating</a:t>
-            </a:r>
-          </a:p>
-          <a:p>
+              <a:t>: waarde van 1-5</a:t>
+            </a:r>
+          </a:p>
+          <a:p>
+            <a:endParaRPr lang="nl-BE" dirty="0"/>
+          </a:p>
+          <a:p>
+            <a:r>
+              <a:rPr lang="nl-BE" dirty="0" err="1"/>
+              <a:t>Waarschuwingdriehoek</a:t>
+            </a:r>
             <a:r>
               <a:rPr lang="nl-BE" dirty="0"/>
-              <a:t>	Status overzicht + ranking </a:t>
+              <a:t>-icoon</a:t>
+            </a:r>
+          </a:p>
+          <a:p>
+            <a:endParaRPr lang="nl-BE" dirty="0"/>
+          </a:p>
+          <a:p>
+            <a:r>
+              <a:rPr lang="nl-BE" dirty="0"/>
+              <a:t>Gevaaraanduiding dagelijks leven</a:t>
+            </a:r>
+          </a:p>
+          <a:p>
+            <a:endParaRPr lang="nl-BE" dirty="0"/>
+          </a:p>
+          <a:p>
+            <a:r>
+              <a:rPr lang="nl-BE" dirty="0"/>
+              <a:t>Intuïtieve interpretatie</a:t>
+            </a:r>
+          </a:p>
+          <a:p>
+            <a:endParaRPr lang="nl-BE" dirty="0"/>
+          </a:p>
+          <a:p>
+            <a:r>
+              <a:rPr lang="nl-BE" dirty="0"/>
+              <a:t>Constant zichtbaar</a:t>
+            </a:r>
+          </a:p>
+          <a:p>
+            <a:endParaRPr lang="nl-BE" dirty="0"/>
+          </a:p>
+          <a:p>
+            <a:r>
+              <a:rPr lang="nl-BE" dirty="0"/>
+              <a:t>Bij </a:t>
             </a:r>
             <a:r>
               <a:rPr lang="nl-BE" dirty="0" err="1"/>
-              <a:t>danger</a:t>
+              <a:t>weaknesses</a:t>
             </a:r>
             <a:r>
               <a:rPr lang="nl-BE" dirty="0"/>
-              <a:t> rating</a:t>
-            </a:r>
-          </a:p>
-          <a:p>
+              <a:t> (</a:t>
+            </a:r>
+            <a:r>
+              <a:rPr lang="nl-BE" dirty="0" err="1"/>
+              <a:t>under</a:t>
+            </a:r>
             <a:r>
               <a:rPr lang="nl-BE" dirty="0"/>
-              <a:t>		Werkoverzicht</a:t>
-            </a:r>
-          </a:p>
-          <a:p>
-            <a:r>
-              <a:rPr lang="nl-BE" dirty="0"/>
-              <a:t>	Samenvatting keten</a:t>
-            </a:r>
-          </a:p>
-          <a:p>
-            <a:r>
-              <a:rPr lang="nl-BE" dirty="0"/>
-              <a:t>		Besprekingen</a:t>
-            </a:r>
+              <a:t> review)</a:t>
+            </a:r>
+          </a:p>
+          <a:p>
+            <a:endParaRPr lang="nl-BE" dirty="0"/>
           </a:p>
         </p:txBody>
       </p:sp>
       <p:sp>
         <p:nvSpPr>
-          <p:cNvPr id="4" name="Tijdelijke aanduiding voor dianummer 3"/>
+          <p:cNvPr id="4" name="Tijdelijke aanduiding voor dianummer 3">
+            <a:extLst>
+              <a:ext uri="{FF2B5EF4-FFF2-40B4-BE49-F238E27FC236}">
+                <a16:creationId xmlns:a16="http://schemas.microsoft.com/office/drawing/2014/main" id="{7BBB6F69-E95A-2B69-C008-B99FA0D66342}"/>
+              </a:ext>
+            </a:extLst>
+          </p:cNvPr>
           <p:cNvSpPr>
             <a:spLocks noGrp="1"/>
           </p:cNvSpPr>
@@ -21309,7 +21353,7 @@
             <a:fld id="{EE766661-4A69-4D38-9B93-78F7EA23D71A}" type="slidenum">
               <a:rPr lang="nl-NL" altLang="en-US" smtClean="0"/>
               <a:pPr/>
-              <a:t>19</a:t>
+              <a:t>17</a:t>
             </a:fld>
             <a:endParaRPr lang="nl-NL" altLang="en-US"/>
           </a:p>
@@ -21318,7 +21362,7 @@
     </p:spTree>
     <p:extLst>
       <p:ext uri="{BB962C8B-B14F-4D97-AF65-F5344CB8AC3E}">
-        <p14:creationId xmlns:p14="http://schemas.microsoft.com/office/powerpoint/2010/main" val="1871128967"/>
+        <p14:creationId xmlns:p14="http://schemas.microsoft.com/office/powerpoint/2010/main" val="1395670683"/>
       </p:ext>
     </p:extLst>
   </p:cSld>
@@ -22711,7 +22755,7 @@
               <a:pPr>
                 <a:defRPr/>
               </a:pPr>
-              <a:t>27/01/2026</a:t>
+              <a:t>28/01/2026</a:t>
             </a:fld>
             <a:endParaRPr lang="nl-BE"/>
           </a:p>
@@ -23639,36 +23683,6 @@
       </p:pic>
       <p:pic>
         <p:nvPicPr>
-          <p:cNvPr id="9" name="Afbeelding 8" descr="Afbeelding met symbool, Graphics, Lettertype, logo&#10;&#10;Door AI gegenereerde inhoud is mogelijk onjuist.">
-            <a:extLst>
-              <a:ext uri="{FF2B5EF4-FFF2-40B4-BE49-F238E27FC236}">
-                <a16:creationId xmlns:a16="http://schemas.microsoft.com/office/drawing/2014/main" id="{A8649FFA-0CAE-4BA1-BE31-9DC0D5461D37}"/>
-              </a:ext>
-            </a:extLst>
-          </p:cNvPr>
-          <p:cNvPicPr>
-            <a:picLocks noChangeAspect="1"/>
-          </p:cNvPicPr>
-          <p:nvPr/>
-        </p:nvPicPr>
-        <p:blipFill>
-          <a:blip r:embed="rId4"/>
-          <a:stretch>
-            <a:fillRect/>
-          </a:stretch>
-        </p:blipFill>
-        <p:spPr>
-          <a:xfrm>
-            <a:off x="4447945" y="2047585"/>
-            <a:ext cx="3296110" cy="3191320"/>
-          </a:xfrm>
-          <a:prstGeom prst="rect">
-            <a:avLst/>
-          </a:prstGeom>
-        </p:spPr>
-      </p:pic>
-      <p:pic>
-        <p:nvPicPr>
           <p:cNvPr id="11" name="Afbeelding 10" descr="Afbeelding met Graphics, symbool, Lettertype, ontwerp&#10;&#10;Door AI gegenereerde inhoud is mogelijk onjuist.">
             <a:extLst>
               <a:ext uri="{FF2B5EF4-FFF2-40B4-BE49-F238E27FC236}">
@@ -23682,7 +23696,7 @@
           <p:nvPr/>
         </p:nvPicPr>
         <p:blipFill>
-          <a:blip r:embed="rId5"/>
+          <a:blip r:embed="rId4"/>
           <a:stretch>
             <a:fillRect/>
           </a:stretch>
@@ -23711,8 +23725,8 @@
         </p:nvSpPr>
         <p:spPr>
           <a:xfrm>
-            <a:off x="3935760" y="5013176"/>
-            <a:ext cx="4403770" cy="369332"/>
+            <a:off x="3592573" y="5082426"/>
+            <a:ext cx="4833374" cy="230832"/>
           </a:xfrm>
           <a:prstGeom prst="rect">
             <a:avLst/>
@@ -23726,12 +23740,12 @@
           <a:lstStyle/>
           <a:p>
             <a:r>
-              <a:rPr lang="nl-BE" dirty="0">
-                <a:hlinkClick r:id="rId6"/>
+              <a:rPr lang="nl-BE" sz="900" dirty="0">
+                <a:hlinkClick r:id="rId5"/>
               </a:rPr>
-              <a:t>https://majordigital.com/technology/nextjs</a:t>
-            </a:r>
-            <a:endParaRPr lang="nl-BE" dirty="0"/>
+              <a:t>https://www.cosmicjs.com/blog/nextjs-15-vs-16-building-modern-blogs-in-the-turbopack-era</a:t>
+            </a:r>
+            <a:endParaRPr lang="nl-BE" sz="900" dirty="0"/>
           </a:p>
         </p:txBody>
       </p:sp>
@@ -23765,7 +23779,7 @@
           <a:p>
             <a:r>
               <a:rPr lang="nl-BE" dirty="0">
-                <a:hlinkClick r:id="rId7"/>
+                <a:hlinkClick r:id="rId6"/>
               </a:rPr>
               <a:t>https://d3js.org</a:t>
             </a:r>
@@ -23803,7 +23817,7 @@
           <a:p>
             <a:r>
               <a:rPr lang="nl-BE" dirty="0">
-                <a:hlinkClick r:id="rId8"/>
+                <a:hlinkClick r:id="rId7"/>
               </a:rPr>
               <a:t>https://react.dev</a:t>
             </a:r>
@@ -23811,6 +23825,53 @@
           </a:p>
         </p:txBody>
       </p:sp>
+      <p:pic>
+        <p:nvPicPr>
+          <p:cNvPr id="1026" name="Picture 2" descr="cover image">
+            <a:extLst>
+              <a:ext uri="{FF2B5EF4-FFF2-40B4-BE49-F238E27FC236}">
+                <a16:creationId xmlns:a16="http://schemas.microsoft.com/office/drawing/2014/main" id="{56E48E05-537A-92A8-0158-B3C2882D8B9B}"/>
+              </a:ext>
+            </a:extLst>
+          </p:cNvPr>
+          <p:cNvPicPr>
+            <a:picLocks noChangeAspect="1" noChangeArrowheads="1"/>
+          </p:cNvPicPr>
+          <p:nvPr/>
+        </p:nvPicPr>
+        <p:blipFill>
+          <a:blip r:embed="rId8" cstate="print">
+            <a:extLst>
+              <a:ext uri="{28A0092B-C50C-407E-A947-70E740481C1C}">
+                <a14:useLocalDpi xmlns:a14="http://schemas.microsoft.com/office/drawing/2010/main" val="0"/>
+              </a:ext>
+            </a:extLst>
+          </a:blip>
+          <a:srcRect/>
+          <a:stretch>
+            <a:fillRect/>
+          </a:stretch>
+        </p:blipFill>
+        <p:spPr bwMode="auto">
+          <a:xfrm>
+            <a:off x="4144173" y="2420888"/>
+            <a:ext cx="3904994" cy="2384055"/>
+          </a:xfrm>
+          <a:prstGeom prst="rect">
+            <a:avLst/>
+          </a:prstGeom>
+          <a:noFill/>
+          <a:extLst>
+            <a:ext uri="{909E8E84-426E-40DD-AFC4-6F175D3DCCD1}">
+              <a14:hiddenFill xmlns:a14="http://schemas.microsoft.com/office/drawing/2010/main">
+                <a:solidFill>
+                  <a:srgbClr val="FFFFFF"/>
+                </a:solidFill>
+              </a14:hiddenFill>
+            </a:ext>
+          </a:extLst>
+        </p:spPr>
+      </p:pic>
     </p:spTree>
     <p:extLst>
       <p:ext uri="{BB962C8B-B14F-4D97-AF65-F5344CB8AC3E}">
@@ -24315,7 +24376,7 @@
         </p:blipFill>
         <p:spPr>
           <a:xfrm>
-            <a:off x="1271464" y="620688"/>
+            <a:off x="839416" y="569829"/>
             <a:ext cx="5328592" cy="2643147"/>
           </a:xfrm>
           <a:prstGeom prst="rect">
@@ -24352,7 +24413,7 @@
         </p:blipFill>
         <p:spPr>
           <a:xfrm>
-            <a:off x="47328" y="3645024"/>
+            <a:off x="47328" y="3655170"/>
             <a:ext cx="7848872" cy="2366118"/>
           </a:xfrm>
           <a:prstGeom prst="rect">
@@ -24388,7 +24449,7 @@
         </p:blipFill>
         <p:spPr>
           <a:xfrm>
-            <a:off x="7896200" y="404664"/>
+            <a:off x="7990097" y="358486"/>
             <a:ext cx="4197469" cy="5113802"/>
           </a:xfrm>
           <a:prstGeom prst="rect">
@@ -24396,6 +24457,92 @@
           </a:prstGeom>
         </p:spPr>
       </p:pic>
+      <p:cxnSp>
+        <p:nvCxnSpPr>
+          <p:cNvPr id="4" name="Rechte verbindingslijn 3">
+            <a:extLst>
+              <a:ext uri="{FF2B5EF4-FFF2-40B4-BE49-F238E27FC236}">
+                <a16:creationId xmlns:a16="http://schemas.microsoft.com/office/drawing/2014/main" id="{D946FB00-74A2-BCFF-6289-FA9387BDCC62}"/>
+              </a:ext>
+            </a:extLst>
+          </p:cNvPr>
+          <p:cNvCxnSpPr>
+            <a:cxnSpLocks/>
+          </p:cNvCxnSpPr>
+          <p:nvPr/>
+        </p:nvCxnSpPr>
+        <p:spPr>
+          <a:xfrm>
+            <a:off x="0" y="3573016"/>
+            <a:ext cx="7968208" cy="0"/>
+          </a:xfrm>
+          <a:prstGeom prst="line">
+            <a:avLst/>
+          </a:prstGeom>
+          <a:ln w="57150">
+            <a:solidFill>
+              <a:schemeClr val="tx1"/>
+            </a:solidFill>
+          </a:ln>
+        </p:spPr>
+        <p:style>
+          <a:lnRef idx="1">
+            <a:schemeClr val="accent1"/>
+          </a:lnRef>
+          <a:fillRef idx="0">
+            <a:schemeClr val="accent1"/>
+          </a:fillRef>
+          <a:effectRef idx="0">
+            <a:schemeClr val="accent1"/>
+          </a:effectRef>
+          <a:fontRef idx="minor">
+            <a:schemeClr val="tx1"/>
+          </a:fontRef>
+        </p:style>
+      </p:cxnSp>
+      <p:cxnSp>
+        <p:nvCxnSpPr>
+          <p:cNvPr id="8" name="Rechte verbindingslijn 7">
+            <a:extLst>
+              <a:ext uri="{FF2B5EF4-FFF2-40B4-BE49-F238E27FC236}">
+                <a16:creationId xmlns:a16="http://schemas.microsoft.com/office/drawing/2014/main" id="{6915313C-EB3D-386D-96D7-85F5D023D3EF}"/>
+              </a:ext>
+            </a:extLst>
+          </p:cNvPr>
+          <p:cNvCxnSpPr>
+            <a:cxnSpLocks/>
+          </p:cNvCxnSpPr>
+          <p:nvPr/>
+        </p:nvCxnSpPr>
+        <p:spPr>
+          <a:xfrm flipV="1">
+            <a:off x="7968208" y="404664"/>
+            <a:ext cx="0" cy="5832648"/>
+          </a:xfrm>
+          <a:prstGeom prst="line">
+            <a:avLst/>
+          </a:prstGeom>
+          <a:ln w="57150">
+            <a:solidFill>
+              <a:schemeClr val="tx1"/>
+            </a:solidFill>
+          </a:ln>
+        </p:spPr>
+        <p:style>
+          <a:lnRef idx="1">
+            <a:schemeClr val="accent1"/>
+          </a:lnRef>
+          <a:fillRef idx="0">
+            <a:schemeClr val="accent1"/>
+          </a:fillRef>
+          <a:effectRef idx="0">
+            <a:schemeClr val="accent1"/>
+          </a:effectRef>
+          <a:fontRef idx="minor">
+            <a:schemeClr val="tx1"/>
+          </a:fontRef>
+        </p:style>
+      </p:cxnSp>
     </p:spTree>
     <p:extLst>
       <p:ext uri="{BB962C8B-B14F-4D97-AF65-F5344CB8AC3E}">
@@ -25200,6 +25347,77 @@
         <p:cNvPr id="1" name="">
           <a:extLst>
             <a:ext uri="{FF2B5EF4-FFF2-40B4-BE49-F238E27FC236}">
+              <a16:creationId xmlns:a16="http://schemas.microsoft.com/office/drawing/2014/main" id="{7C3871BB-B871-7518-2D76-2A143ADF51C3}"/>
+            </a:ext>
+          </a:extLst>
+        </p:cNvPr>
+        <p:cNvGrpSpPr/>
+        <p:nvPr/>
+      </p:nvGrpSpPr>
+      <p:grpSpPr>
+        <a:xfrm>
+          <a:off x="0" y="0"/>
+          <a:ext cx="0" cy="0"/>
+          <a:chOff x="0" y="0"/>
+          <a:chExt cx="0" cy="0"/>
+        </a:xfrm>
+      </p:grpSpPr>
+      <p:sp>
+        <p:nvSpPr>
+          <p:cNvPr id="6" name="Titel 5">
+            <a:extLst>
+              <a:ext uri="{FF2B5EF4-FFF2-40B4-BE49-F238E27FC236}">
+                <a16:creationId xmlns:a16="http://schemas.microsoft.com/office/drawing/2014/main" id="{C6F74E8C-FDCA-AB55-2631-11C0918C6F18}"/>
+              </a:ext>
+            </a:extLst>
+          </p:cNvPr>
+          <p:cNvSpPr>
+            <a:spLocks noGrp="1"/>
+          </p:cNvSpPr>
+          <p:nvPr>
+            <p:ph type="title" idx="4294967295"/>
+          </p:nvPr>
+        </p:nvSpPr>
+        <p:spPr>
+          <a:xfrm>
+            <a:off x="143935" y="198981"/>
+            <a:ext cx="11987005" cy="549844"/>
+          </a:xfrm>
+        </p:spPr>
+        <p:txBody>
+          <a:bodyPr wrap="square" anchor="ctr">
+            <a:normAutofit fontScale="90000"/>
+          </a:bodyPr>
+          <a:lstStyle/>
+          <a:p>
+            <a:r>
+              <a:rPr lang="nl-BE" dirty="0"/>
+              <a:t>Gehele tool</a:t>
+            </a:r>
+          </a:p>
+        </p:txBody>
+      </p:sp>
+    </p:spTree>
+    <p:extLst>
+      <p:ext uri="{BB962C8B-B14F-4D97-AF65-F5344CB8AC3E}">
+        <p14:creationId xmlns:p14="http://schemas.microsoft.com/office/powerpoint/2010/main" val="2043376595"/>
+      </p:ext>
+    </p:extLst>
+  </p:cSld>
+  <p:clrMapOvr>
+    <a:masterClrMapping/>
+  </p:clrMapOvr>
+</p:sld>
+</file>
+
+<file path=ppt/slides/slide18.xml><?xml version="1.0" encoding="utf-8"?>
+<p:sld xmlns:a="http://schemas.openxmlformats.org/drawingml/2006/main" xmlns:r="http://schemas.openxmlformats.org/officeDocument/2006/relationships" xmlns:p="http://schemas.openxmlformats.org/presentationml/2006/main">
+  <p:cSld>
+    <p:spTree>
+      <p:nvGrpSpPr>
+        <p:cNvPr id="1" name="">
+          <a:extLst>
+            <a:ext uri="{FF2B5EF4-FFF2-40B4-BE49-F238E27FC236}">
               <a16:creationId xmlns:a16="http://schemas.microsoft.com/office/drawing/2014/main" id="{E63659E3-C05A-5F26-598E-0E9716F4779E}"/>
             </a:ext>
           </a:extLst>
@@ -25261,7 +25479,7 @@
 </p:sld>
 </file>
 
-<file path=ppt/slides/slide18.xml><?xml version="1.0" encoding="utf-8"?>
+<file path=ppt/slides/slide19.xml><?xml version="1.0" encoding="utf-8"?>
 <p:sld xmlns:a="http://schemas.openxmlformats.org/drawingml/2006/main" xmlns:r="http://schemas.openxmlformats.org/officeDocument/2006/relationships" xmlns:p="http://schemas.openxmlformats.org/presentationml/2006/main">
   <p:cSld>
     <p:spTree>
@@ -25354,171 +25572,6 @@
     <p:extLst>
       <p:ext uri="{BB962C8B-B14F-4D97-AF65-F5344CB8AC3E}">
         <p14:creationId xmlns:p14="http://schemas.microsoft.com/office/powerpoint/2010/main" val="3026849845"/>
-      </p:ext>
-    </p:extLst>
-  </p:cSld>
-  <p:clrMapOvr>
-    <a:masterClrMapping/>
-  </p:clrMapOvr>
-</p:sld>
-</file>
-
-<file path=ppt/slides/slide19.xml><?xml version="1.0" encoding="utf-8"?>
-<p:sld xmlns:a="http://schemas.openxmlformats.org/drawingml/2006/main" xmlns:r="http://schemas.openxmlformats.org/officeDocument/2006/relationships" xmlns:p="http://schemas.openxmlformats.org/presentationml/2006/main">
-  <p:cSld>
-    <p:spTree>
-      <p:nvGrpSpPr>
-        <p:cNvPr id="1" name="">
-          <a:extLst>
-            <a:ext uri="{FF2B5EF4-FFF2-40B4-BE49-F238E27FC236}">
-              <a16:creationId xmlns:a16="http://schemas.microsoft.com/office/drawing/2014/main" id="{3F465B1C-B8CE-8ED0-C297-460C38E74354}"/>
-            </a:ext>
-          </a:extLst>
-        </p:cNvPr>
-        <p:cNvGrpSpPr/>
-        <p:nvPr/>
-      </p:nvGrpSpPr>
-      <p:grpSpPr>
-        <a:xfrm>
-          <a:off x="0" y="0"/>
-          <a:ext cx="0" cy="0"/>
-          <a:chOff x="0" y="0"/>
-          <a:chExt cx="0" cy="0"/>
-        </a:xfrm>
-      </p:grpSpPr>
-      <p:sp>
-        <p:nvSpPr>
-          <p:cNvPr id="4" name="Tijdelijke aanduiding voor inhoud 3">
-            <a:extLst>
-              <a:ext uri="{FF2B5EF4-FFF2-40B4-BE49-F238E27FC236}">
-                <a16:creationId xmlns:a16="http://schemas.microsoft.com/office/drawing/2014/main" id="{7910B10B-BFF4-A13F-74C6-9BC63825B44E}"/>
-              </a:ext>
-            </a:extLst>
-          </p:cNvPr>
-          <p:cNvSpPr>
-            <a:spLocks noGrp="1"/>
-          </p:cNvSpPr>
-          <p:nvPr>
-            <p:ph sz="half" idx="1"/>
-          </p:nvPr>
-        </p:nvSpPr>
-        <p:spPr>
-          <a:xfrm>
-            <a:off x="609600" y="980731"/>
-            <a:ext cx="5384800" cy="5145435"/>
-          </a:xfrm>
-        </p:spPr>
-        <p:txBody>
-          <a:bodyPr wrap="square" anchor="t">
-            <a:normAutofit/>
-          </a:bodyPr>
-          <a:lstStyle/>
-          <a:p>
-            <a:r>
-              <a:rPr lang="nl-BE" dirty="0"/>
-              <a:t>Twee scenario’s</a:t>
-            </a:r>
-          </a:p>
-          <a:p>
-            <a:pPr lvl="1"/>
-            <a:r>
-              <a:rPr lang="nl-BE" sz="2000" dirty="0"/>
-              <a:t>Scenario 1: Inlog- en authenticatiesysteem (basisversie)</a:t>
-            </a:r>
-          </a:p>
-          <a:p>
-            <a:pPr lvl="1"/>
-            <a:r>
-              <a:rPr lang="nl-BE" sz="2000" dirty="0"/>
-              <a:t>Scenario 2: AI‑fraudedetectiesysteem (uitgebreide versie)</a:t>
-            </a:r>
-          </a:p>
-          <a:p>
-            <a:pPr lvl="1"/>
-            <a:endParaRPr lang="nl-BE" sz="2000" dirty="0"/>
-          </a:p>
-          <a:p>
-            <a:pPr lvl="2"/>
-            <a:endParaRPr lang="nl-BE" sz="2000" dirty="0"/>
-          </a:p>
-        </p:txBody>
-      </p:sp>
-      <p:sp>
-        <p:nvSpPr>
-          <p:cNvPr id="6" name="Titel 5">
-            <a:extLst>
-              <a:ext uri="{FF2B5EF4-FFF2-40B4-BE49-F238E27FC236}">
-                <a16:creationId xmlns:a16="http://schemas.microsoft.com/office/drawing/2014/main" id="{9880BB0E-F4C7-691D-E178-BCDDF6FCAC2C}"/>
-              </a:ext>
-            </a:extLst>
-          </p:cNvPr>
-          <p:cNvSpPr>
-            <a:spLocks noGrp="1"/>
-          </p:cNvSpPr>
-          <p:nvPr>
-            <p:ph type="title" idx="4294967295"/>
-          </p:nvPr>
-        </p:nvSpPr>
-        <p:spPr>
-          <a:xfrm>
-            <a:off x="143935" y="198981"/>
-            <a:ext cx="11987005" cy="549844"/>
-          </a:xfrm>
-        </p:spPr>
-        <p:txBody>
-          <a:bodyPr wrap="square" anchor="ctr">
-            <a:normAutofit fontScale="90000"/>
-          </a:bodyPr>
-          <a:lstStyle/>
-          <a:p>
-            <a:r>
-              <a:rPr lang="nl-BE" dirty="0"/>
-              <a:t>Gebruikersstudie</a:t>
-            </a:r>
-          </a:p>
-        </p:txBody>
-      </p:sp>
-      <p:pic>
-        <p:nvPicPr>
-          <p:cNvPr id="2" name="Afbeelding 1" descr="Afbeelding met tekst, schermopname, Lettertype, nummer&#10;&#10;Door AI gegenereerde inhoud is mogelijk onjuist.">
-            <a:extLst>
-              <a:ext uri="{FF2B5EF4-FFF2-40B4-BE49-F238E27FC236}">
-                <a16:creationId xmlns:a16="http://schemas.microsoft.com/office/drawing/2014/main" id="{FCFD101C-E7A1-A14B-36DF-381BBF4640D9}"/>
-              </a:ext>
-            </a:extLst>
-          </p:cNvPr>
-          <p:cNvPicPr>
-            <a:picLocks noChangeAspect="1"/>
-          </p:cNvPicPr>
-          <p:nvPr/>
-        </p:nvPicPr>
-        <p:blipFill>
-          <a:blip r:embed="rId3" cstate="print">
-            <a:extLst>
-              <a:ext uri="{28A0092B-C50C-407E-A947-70E740481C1C}">
-                <a14:useLocalDpi xmlns:a14="http://schemas.microsoft.com/office/drawing/2010/main" val="0"/>
-              </a:ext>
-            </a:extLst>
-          </a:blip>
-          <a:stretch>
-            <a:fillRect/>
-          </a:stretch>
-        </p:blipFill>
-        <p:spPr>
-          <a:xfrm>
-            <a:off x="6197602" y="834125"/>
-            <a:ext cx="5384800" cy="2719323"/>
-          </a:xfrm>
-          <a:prstGeom prst="rect">
-            <a:avLst/>
-          </a:prstGeom>
-          <a:noFill/>
-        </p:spPr>
-      </p:pic>
-    </p:spTree>
-    <p:extLst>
-      <p:ext uri="{BB962C8B-B14F-4D97-AF65-F5344CB8AC3E}">
-        <p14:creationId xmlns:p14="http://schemas.microsoft.com/office/powerpoint/2010/main" val="1322244663"/>
       </p:ext>
     </p:extLst>
   </p:cSld>
@@ -25605,6 +25658,178 @@
         <p:cNvPr id="1" name="">
           <a:extLst>
             <a:ext uri="{FF2B5EF4-FFF2-40B4-BE49-F238E27FC236}">
+              <a16:creationId xmlns:a16="http://schemas.microsoft.com/office/drawing/2014/main" id="{3F465B1C-B8CE-8ED0-C297-460C38E74354}"/>
+            </a:ext>
+          </a:extLst>
+        </p:cNvPr>
+        <p:cNvGrpSpPr/>
+        <p:nvPr/>
+      </p:nvGrpSpPr>
+      <p:grpSpPr>
+        <a:xfrm>
+          <a:off x="0" y="0"/>
+          <a:ext cx="0" cy="0"/>
+          <a:chOff x="0" y="0"/>
+          <a:chExt cx="0" cy="0"/>
+        </a:xfrm>
+      </p:grpSpPr>
+      <p:pic>
+        <p:nvPicPr>
+          <p:cNvPr id="2" name="Afbeelding 1" descr="Afbeelding met tekst, schermopname, Lettertype, nummer&#10;&#10;Door AI gegenereerde inhoud is mogelijk onjuist.">
+            <a:extLst>
+              <a:ext uri="{FF2B5EF4-FFF2-40B4-BE49-F238E27FC236}">
+                <a16:creationId xmlns:a16="http://schemas.microsoft.com/office/drawing/2014/main" id="{FCFD101C-E7A1-A14B-36DF-381BBF4640D9}"/>
+              </a:ext>
+            </a:extLst>
+          </p:cNvPr>
+          <p:cNvPicPr>
+            <a:picLocks noChangeAspect="1"/>
+          </p:cNvPicPr>
+          <p:nvPr/>
+        </p:nvPicPr>
+        <p:blipFill>
+          <a:blip r:embed="rId3" cstate="print">
+            <a:extLst>
+              <a:ext uri="{28A0092B-C50C-407E-A947-70E740481C1C}">
+                <a14:useLocalDpi xmlns:a14="http://schemas.microsoft.com/office/drawing/2010/main" val="0"/>
+              </a:ext>
+            </a:extLst>
+          </a:blip>
+          <a:stretch>
+            <a:fillRect/>
+          </a:stretch>
+        </p:blipFill>
+        <p:spPr>
+          <a:xfrm>
+            <a:off x="609600" y="2193787"/>
+            <a:ext cx="5384800" cy="2719323"/>
+          </a:xfrm>
+          <a:prstGeom prst="rect">
+            <a:avLst/>
+          </a:prstGeom>
+          <a:noFill/>
+        </p:spPr>
+      </p:pic>
+      <p:sp>
+        <p:nvSpPr>
+          <p:cNvPr id="6" name="Titel 5">
+            <a:extLst>
+              <a:ext uri="{FF2B5EF4-FFF2-40B4-BE49-F238E27FC236}">
+                <a16:creationId xmlns:a16="http://schemas.microsoft.com/office/drawing/2014/main" id="{9880BB0E-F4C7-691D-E178-BCDDF6FCAC2C}"/>
+              </a:ext>
+            </a:extLst>
+          </p:cNvPr>
+          <p:cNvSpPr>
+            <a:spLocks noGrp="1"/>
+          </p:cNvSpPr>
+          <p:nvPr>
+            <p:ph type="title" idx="4294967295"/>
+          </p:nvPr>
+        </p:nvSpPr>
+        <p:spPr>
+          <a:xfrm>
+            <a:off x="143935" y="198981"/>
+            <a:ext cx="11987005" cy="549844"/>
+          </a:xfrm>
+        </p:spPr>
+        <p:txBody>
+          <a:bodyPr wrap="square" anchor="ctr">
+            <a:normAutofit fontScale="90000"/>
+          </a:bodyPr>
+          <a:lstStyle/>
+          <a:p>
+            <a:r>
+              <a:rPr lang="nl-BE" dirty="0"/>
+              <a:t>Gebruikersstudie</a:t>
+            </a:r>
+          </a:p>
+        </p:txBody>
+      </p:sp>
+      <p:sp>
+        <p:nvSpPr>
+          <p:cNvPr id="4" name="Tijdelijke aanduiding voor inhoud 3">
+            <a:extLst>
+              <a:ext uri="{FF2B5EF4-FFF2-40B4-BE49-F238E27FC236}">
+                <a16:creationId xmlns:a16="http://schemas.microsoft.com/office/drawing/2014/main" id="{7910B10B-BFF4-A13F-74C6-9BC63825B44E}"/>
+              </a:ext>
+            </a:extLst>
+          </p:cNvPr>
+          <p:cNvSpPr>
+            <a:spLocks noGrp="1"/>
+          </p:cNvSpPr>
+          <p:nvPr>
+            <p:ph sz="half" idx="10"/>
+          </p:nvPr>
+        </p:nvSpPr>
+        <p:spPr>
+          <a:xfrm>
+            <a:off x="6197602" y="980731"/>
+            <a:ext cx="5384800" cy="5145435"/>
+          </a:xfrm>
+        </p:spPr>
+        <p:txBody>
+          <a:bodyPr wrap="square" anchor="t">
+            <a:normAutofit/>
+          </a:bodyPr>
+          <a:lstStyle/>
+          <a:p>
+            <a:r>
+              <a:rPr lang="nl-BE" dirty="0"/>
+              <a:t>Twee scenario’s</a:t>
+            </a:r>
+          </a:p>
+          <a:p>
+            <a:pPr lvl="1"/>
+            <a:r>
+              <a:rPr lang="nl-BE" sz="2000" dirty="0"/>
+              <a:t>Scenario 1: Inlog- en authenticatiesysteem (basisversie)</a:t>
+            </a:r>
+          </a:p>
+          <a:p>
+            <a:pPr lvl="1"/>
+            <a:r>
+              <a:rPr lang="nl-BE" sz="2000" dirty="0"/>
+              <a:t>Scenario 2: AI‑fraudedetectiesysteem (uitgebreide versie)</a:t>
+            </a:r>
+          </a:p>
+          <a:p>
+            <a:pPr lvl="1"/>
+            <a:r>
+              <a:rPr lang="nl-BE" sz="2000" dirty="0"/>
+              <a:t>Per scenario vier opdrachten</a:t>
+            </a:r>
+          </a:p>
+          <a:p>
+            <a:pPr lvl="1"/>
+            <a:endParaRPr lang="nl-BE" sz="2000" dirty="0"/>
+          </a:p>
+          <a:p>
+            <a:pPr lvl="2"/>
+            <a:endParaRPr lang="nl-BE" sz="2000" dirty="0"/>
+          </a:p>
+        </p:txBody>
+      </p:sp>
+    </p:spTree>
+    <p:extLst>
+      <p:ext uri="{BB962C8B-B14F-4D97-AF65-F5344CB8AC3E}">
+        <p14:creationId xmlns:p14="http://schemas.microsoft.com/office/powerpoint/2010/main" val="1322244663"/>
+      </p:ext>
+    </p:extLst>
+  </p:cSld>
+  <p:clrMapOvr>
+    <a:masterClrMapping/>
+  </p:clrMapOvr>
+</p:sld>
+</file>
+
+<file path=ppt/slides/slide21.xml><?xml version="1.0" encoding="utf-8"?>
+<p:sld xmlns:a="http://schemas.openxmlformats.org/drawingml/2006/main" xmlns:r="http://schemas.openxmlformats.org/officeDocument/2006/relationships" xmlns:p="http://schemas.openxmlformats.org/presentationml/2006/main">
+  <p:cSld>
+    <p:spTree>
+      <p:nvGrpSpPr>
+        <p:cNvPr id="1" name="">
+          <a:extLst>
+            <a:ext uri="{FF2B5EF4-FFF2-40B4-BE49-F238E27FC236}">
               <a16:creationId xmlns:a16="http://schemas.microsoft.com/office/drawing/2014/main" id="{3A48F2E3-64DC-0766-D725-13D770318680}"/>
             </a:ext>
           </a:extLst>
@@ -25666,7 +25891,7 @@
 </p:sld>
 </file>
 
-<file path=ppt/slides/slide21.xml><?xml version="1.0" encoding="utf-8"?>
+<file path=ppt/slides/slide22.xml><?xml version="1.0" encoding="utf-8"?>
 <p:sld xmlns:a="http://schemas.openxmlformats.org/drawingml/2006/main" xmlns:r="http://schemas.openxmlformats.org/officeDocument/2006/relationships" xmlns:p="http://schemas.openxmlformats.org/presentationml/2006/main">
   <p:cSld>
     <p:spTree>
@@ -25813,7 +26038,7 @@
 </p:sld>
 </file>
 
-<file path=ppt/slides/slide22.xml><?xml version="1.0" encoding="utf-8"?>
+<file path=ppt/slides/slide23.xml><?xml version="1.0" encoding="utf-8"?>
 <p:sld xmlns:a="http://schemas.openxmlformats.org/drawingml/2006/main" xmlns:r="http://schemas.openxmlformats.org/officeDocument/2006/relationships" xmlns:p="http://schemas.openxmlformats.org/presentationml/2006/main">
   <p:cSld>
     <p:spTree>
@@ -25998,75 +26223,6 @@
     <p:extLst>
       <p:ext uri="{BB962C8B-B14F-4D97-AF65-F5344CB8AC3E}">
         <p14:creationId xmlns:p14="http://schemas.microsoft.com/office/powerpoint/2010/main" val="1552609365"/>
-      </p:ext>
-    </p:extLst>
-  </p:cSld>
-  <p:clrMapOvr>
-    <a:masterClrMapping/>
-  </p:clrMapOvr>
-</p:sld>
-</file>
-
-<file path=ppt/slides/slide23.xml><?xml version="1.0" encoding="utf-8"?>
-<p:sld xmlns:a="http://schemas.openxmlformats.org/drawingml/2006/main" xmlns:r="http://schemas.openxmlformats.org/officeDocument/2006/relationships" xmlns:p="http://schemas.openxmlformats.org/presentationml/2006/main">
-  <p:cSld>
-    <p:spTree>
-      <p:nvGrpSpPr>
-        <p:cNvPr id="1" name="">
-          <a:extLst>
-            <a:ext uri="{FF2B5EF4-FFF2-40B4-BE49-F238E27FC236}">
-              <a16:creationId xmlns:a16="http://schemas.microsoft.com/office/drawing/2014/main" id="{4E0E02BE-83C5-1141-E372-F4483B3EF79A}"/>
-            </a:ext>
-          </a:extLst>
-        </p:cNvPr>
-        <p:cNvGrpSpPr/>
-        <p:nvPr/>
-      </p:nvGrpSpPr>
-      <p:grpSpPr>
-        <a:xfrm>
-          <a:off x="0" y="0"/>
-          <a:ext cx="0" cy="0"/>
-          <a:chOff x="0" y="0"/>
-          <a:chExt cx="0" cy="0"/>
-        </a:xfrm>
-      </p:grpSpPr>
-      <p:sp>
-        <p:nvSpPr>
-          <p:cNvPr id="3" name="Titel 2">
-            <a:extLst>
-              <a:ext uri="{FF2B5EF4-FFF2-40B4-BE49-F238E27FC236}">
-                <a16:creationId xmlns:a16="http://schemas.microsoft.com/office/drawing/2014/main" id="{31C9B3CB-7DBE-1119-87EE-42E255EDC789}"/>
-              </a:ext>
-            </a:extLst>
-          </p:cNvPr>
-          <p:cNvSpPr>
-            <a:spLocks noGrp="1"/>
-          </p:cNvSpPr>
-          <p:nvPr>
-            <p:ph type="title" idx="4294967295"/>
-          </p:nvPr>
-        </p:nvSpPr>
-        <p:spPr>
-          <a:xfrm>
-            <a:off x="624417" y="2851597"/>
-            <a:ext cx="10972800" cy="433387"/>
-          </a:xfrm>
-        </p:spPr>
-        <p:txBody>
-          <a:bodyPr/>
-          <a:lstStyle/>
-          <a:p>
-            <a:r>
-              <a:rPr lang="nl-BE" sz="6000" dirty="0"/>
-              <a:t>Beperkingen gebruikersstudie</a:t>
-            </a:r>
-          </a:p>
-        </p:txBody>
-      </p:sp>
-    </p:spTree>
-    <p:extLst>
-      <p:ext uri="{BB962C8B-B14F-4D97-AF65-F5344CB8AC3E}">
-        <p14:creationId xmlns:p14="http://schemas.microsoft.com/office/powerpoint/2010/main" val="334877976"/>
       </p:ext>
     </p:extLst>
   </p:cSld>
@@ -26502,7 +26658,7 @@
           <a:p>
             <a:r>
               <a:rPr lang="nl-BE" sz="6000" dirty="0"/>
-              <a:t>Vragen?</a:t>
+              <a:t>Q&amp;A</a:t>
             </a:r>
           </a:p>
         </p:txBody>
@@ -26528,7 +26684,7 @@
         <p:cNvPr id="1" name="">
           <a:extLst>
             <a:ext uri="{FF2B5EF4-FFF2-40B4-BE49-F238E27FC236}">
-              <a16:creationId xmlns:a16="http://schemas.microsoft.com/office/drawing/2014/main" id="{944036FD-DE73-CDEB-9E10-E44964860457}"/>
+              <a16:creationId xmlns:a16="http://schemas.microsoft.com/office/drawing/2014/main" id="{120D166B-C515-47F6-0C70-E76140552FF0}"/>
             </a:ext>
           </a:extLst>
         </p:cNvPr>
@@ -26548,7 +26704,7 @@
           <p:cNvPr id="6" name="Titel 5">
             <a:extLst>
               <a:ext uri="{FF2B5EF4-FFF2-40B4-BE49-F238E27FC236}">
-                <a16:creationId xmlns:a16="http://schemas.microsoft.com/office/drawing/2014/main" id="{87FA232E-BE82-E879-B04C-24F52934AC18}"/>
+                <a16:creationId xmlns:a16="http://schemas.microsoft.com/office/drawing/2014/main" id="{72EBBAEF-E143-554C-1C1F-54399F37FE40}"/>
               </a:ext>
             </a:extLst>
           </p:cNvPr>
@@ -26573,15 +26729,45 @@
           <a:p>
             <a:r>
               <a:rPr lang="nl-BE" dirty="0"/>
-              <a:t>Referenties</a:t>
+              <a:t>Q&amp;A</a:t>
             </a:r>
           </a:p>
         </p:txBody>
       </p:sp>
+      <p:pic>
+        <p:nvPicPr>
+          <p:cNvPr id="3" name="Afbeelding 2" descr="Afbeelding met tekst, elektronica, computer, schermopname&#10;&#10;Door AI gegenereerde inhoud is mogelijk onjuist.">
+            <a:extLst>
+              <a:ext uri="{FF2B5EF4-FFF2-40B4-BE49-F238E27FC236}">
+                <a16:creationId xmlns:a16="http://schemas.microsoft.com/office/drawing/2014/main" id="{C637C3D5-907D-D041-00C2-7F9F44D64F3C}"/>
+              </a:ext>
+            </a:extLst>
+          </p:cNvPr>
+          <p:cNvPicPr>
+            <a:picLocks noChangeAspect="1"/>
+          </p:cNvPicPr>
+          <p:nvPr/>
+        </p:nvPicPr>
+        <p:blipFill>
+          <a:blip r:embed="rId3"/>
+          <a:stretch>
+            <a:fillRect/>
+          </a:stretch>
+        </p:blipFill>
+        <p:spPr>
+          <a:xfrm>
+            <a:off x="4144355" y="670675"/>
+            <a:ext cx="3903290" cy="5516649"/>
+          </a:xfrm>
+          <a:prstGeom prst="rect">
+            <a:avLst/>
+          </a:prstGeom>
+        </p:spPr>
+      </p:pic>
     </p:spTree>
     <p:extLst>
       <p:ext uri="{BB962C8B-B14F-4D97-AF65-F5344CB8AC3E}">
-        <p14:creationId xmlns:p14="http://schemas.microsoft.com/office/powerpoint/2010/main" val="1874179169"/>
+        <p14:creationId xmlns:p14="http://schemas.microsoft.com/office/powerpoint/2010/main" val="3606537337"/>
       </p:ext>
     </p:extLst>
   </p:cSld>
@@ -26659,7 +26845,7 @@
             <p:ph idx="1"/>
             <p:extLst>
               <p:ext uri="{D42A27DB-BD31-4B8C-83A1-F6EECF244321}">
-                <p14:modId xmlns:p14="http://schemas.microsoft.com/office/powerpoint/2010/main" val="417635338"/>
+                <p14:modId xmlns:p14="http://schemas.microsoft.com/office/powerpoint/2010/main" val="1120614393"/>
               </p:ext>
             </p:extLst>
           </p:nvPr>
@@ -26695,7 +26881,7 @@
         <p:cNvPr id="1" name="">
           <a:extLst>
             <a:ext uri="{FF2B5EF4-FFF2-40B4-BE49-F238E27FC236}">
-              <a16:creationId xmlns:a16="http://schemas.microsoft.com/office/drawing/2014/main" id="{120D166B-C515-47F6-0C70-E76140552FF0}"/>
+              <a16:creationId xmlns:a16="http://schemas.microsoft.com/office/drawing/2014/main" id="{944036FD-DE73-CDEB-9E10-E44964860457}"/>
             </a:ext>
           </a:extLst>
         </p:cNvPr>
@@ -26715,7 +26901,7 @@
           <p:cNvPr id="6" name="Titel 5">
             <a:extLst>
               <a:ext uri="{FF2B5EF4-FFF2-40B4-BE49-F238E27FC236}">
-                <a16:creationId xmlns:a16="http://schemas.microsoft.com/office/drawing/2014/main" id="{72EBBAEF-E143-554C-1C1F-54399F37FE40}"/>
+                <a16:creationId xmlns:a16="http://schemas.microsoft.com/office/drawing/2014/main" id="{87FA232E-BE82-E879-B04C-24F52934AC18}"/>
               </a:ext>
             </a:extLst>
           </p:cNvPr>
@@ -26740,45 +26926,15 @@
           <a:p>
             <a:r>
               <a:rPr lang="nl-BE" dirty="0"/>
-              <a:t>Vragen?</a:t>
+              <a:t>Referenties</a:t>
             </a:r>
           </a:p>
         </p:txBody>
       </p:sp>
-      <p:pic>
-        <p:nvPicPr>
-          <p:cNvPr id="3" name="Afbeelding 2" descr="Afbeelding met tekst, elektronica, computer, schermopname&#10;&#10;Door AI gegenereerde inhoud is mogelijk onjuist.">
-            <a:extLst>
-              <a:ext uri="{FF2B5EF4-FFF2-40B4-BE49-F238E27FC236}">
-                <a16:creationId xmlns:a16="http://schemas.microsoft.com/office/drawing/2014/main" id="{C637C3D5-907D-D041-00C2-7F9F44D64F3C}"/>
-              </a:ext>
-            </a:extLst>
-          </p:cNvPr>
-          <p:cNvPicPr>
-            <a:picLocks noChangeAspect="1"/>
-          </p:cNvPicPr>
-          <p:nvPr/>
-        </p:nvPicPr>
-        <p:blipFill>
-          <a:blip r:embed="rId3"/>
-          <a:stretch>
-            <a:fillRect/>
-          </a:stretch>
-        </p:blipFill>
-        <p:spPr>
-          <a:xfrm>
-            <a:off x="4144355" y="670675"/>
-            <a:ext cx="3903290" cy="5516649"/>
-          </a:xfrm>
-          <a:prstGeom prst="rect">
-            <a:avLst/>
-          </a:prstGeom>
-        </p:spPr>
-      </p:pic>
     </p:spTree>
     <p:extLst>
       <p:ext uri="{BB962C8B-B14F-4D97-AF65-F5344CB8AC3E}">
-        <p14:creationId xmlns:p14="http://schemas.microsoft.com/office/powerpoint/2010/main" val="3606537337"/>
+        <p14:creationId xmlns:p14="http://schemas.microsoft.com/office/powerpoint/2010/main" val="1874179169"/>
       </p:ext>
     </p:extLst>
   </p:cSld>

--- a/MP2526_Verdediging.pptx
+++ b/MP2526_Verdediging.pptx
@@ -6304,10 +6304,10 @@
         <a:lstStyle/>
         <a:p>
           <a:r>
-            <a:rPr lang="nl-BE"/>
+            <a:rPr lang="nl-BE" dirty="0"/>
             <a:t>Realistische simulatie</a:t>
           </a:r>
-          <a:endParaRPr lang="en-US"/>
+          <a:endParaRPr lang="en-US" dirty="0"/>
         </a:p>
       </dgm:t>
     </dgm:pt>
@@ -6323,43 +6323,6 @@
       </dgm:t>
     </dgm:pt>
     <dgm:pt modelId="{9591D8EF-6769-452A-B02B-68D8200637D8}" type="sibTrans" cxnId="{19752EFF-5D8B-46EE-BA2B-15B2D2C14DD8}">
-      <dgm:prSet/>
-      <dgm:spPr/>
-      <dgm:t>
-        <a:bodyPr/>
-        <a:lstStyle/>
-        <a:p>
-          <a:endParaRPr lang="en-US"/>
-        </a:p>
-      </dgm:t>
-    </dgm:pt>
-    <dgm:pt modelId="{0C9B5DA7-B648-49D1-8A7C-9BD667734B13}">
-      <dgm:prSet/>
-      <dgm:spPr/>
-      <dgm:t>
-        <a:bodyPr/>
-        <a:lstStyle/>
-        <a:p>
-          <a:r>
-            <a:rPr lang="nl-BE"/>
-            <a:t>Ontbreken van security-experts</a:t>
-          </a:r>
-          <a:endParaRPr lang="en-US"/>
-        </a:p>
-      </dgm:t>
-    </dgm:pt>
-    <dgm:pt modelId="{48B86A60-DAB7-4CA4-A1BF-4EE3672A3DFD}" type="parTrans" cxnId="{0AD45A2E-370F-4230-86BC-20460B9C49AB}">
-      <dgm:prSet/>
-      <dgm:spPr/>
-      <dgm:t>
-        <a:bodyPr/>
-        <a:lstStyle/>
-        <a:p>
-          <a:endParaRPr lang="en-US"/>
-        </a:p>
-      </dgm:t>
-    </dgm:pt>
-    <dgm:pt modelId="{0E879F87-87FB-491D-9E38-7A7F09E4F7D1}" type="sibTrans" cxnId="{0AD45A2E-370F-4230-86BC-20460B9C49AB}">
       <dgm:prSet/>
       <dgm:spPr/>
       <dgm:t>
@@ -6758,9 +6721,7 @@
     <dgm:cxn modelId="{FC3DE627-1B18-4D9A-B779-B2DC10D20F8D}" srcId="{E4AF1AB0-4D94-4ABB-9746-6D8E023A59B9}" destId="{118A89D0-BF7D-48ED-B541-BF1D0EE76666}" srcOrd="1" destOrd="0" parTransId="{12601A6B-C0E2-4A20-B344-EEEE996127C3}" sibTransId="{47019823-4A93-4A0C-8117-C0C31BFCBB6F}"/>
     <dgm:cxn modelId="{1A352228-C2F3-4A41-BD52-933B01221019}" type="presOf" srcId="{E4AF1AB0-4D94-4ABB-9746-6D8E023A59B9}" destId="{D4705AEE-85E2-4B3C-B61B-32C373317FBB}" srcOrd="0" destOrd="0" presId="urn:microsoft.com/office/officeart/2005/8/layout/vList5"/>
     <dgm:cxn modelId="{83C9F028-13B2-4550-B6E9-9392FEDF3323}" type="presOf" srcId="{12622C59-2A63-421C-9632-DF55200C7DA9}" destId="{D8C66BE8-87AC-4519-B969-33B689DEEB55}" srcOrd="0" destOrd="0" presId="urn:microsoft.com/office/officeart/2005/8/layout/vList5"/>
-    <dgm:cxn modelId="{0AD45A2E-370F-4230-86BC-20460B9C49AB}" srcId="{9D9DE977-E466-47E8-871B-50CF2A42F42A}" destId="{0C9B5DA7-B648-49D1-8A7C-9BD667734B13}" srcOrd="2" destOrd="0" parTransId="{48B86A60-DAB7-4CA4-A1BF-4EE3672A3DFD}" sibTransId="{0E879F87-87FB-491D-9E38-7A7F09E4F7D1}"/>
     <dgm:cxn modelId="{02CF1E30-F1C4-412E-8757-E8C3DE14BBFB}" srcId="{881A1406-9127-4129-BA13-5E09D46FDB56}" destId="{12622C59-2A63-421C-9632-DF55200C7DA9}" srcOrd="2" destOrd="0" parTransId="{9B94453D-ED3D-4FFC-B28D-F5B2F7802A79}" sibTransId="{D64E5E42-E508-4DC2-8363-758DBA3C0973}"/>
-    <dgm:cxn modelId="{092BC631-A7FC-4B54-B925-3FCD569B88B0}" type="presOf" srcId="{0C9B5DA7-B648-49D1-8A7C-9BD667734B13}" destId="{F4863EB9-8377-46EF-9E38-4A1D8CBA9C97}" srcOrd="0" destOrd="2" presId="urn:microsoft.com/office/officeart/2005/8/layout/vList5"/>
     <dgm:cxn modelId="{0F14A448-BA4F-4818-A355-118AF28F4023}" type="presOf" srcId="{1036628A-C737-43A0-887E-45C0C4E23B6D}" destId="{6F4BC45A-D1AC-49CD-BD34-B5EB8607B10B}" srcOrd="0" destOrd="0" presId="urn:microsoft.com/office/officeart/2005/8/layout/vList5"/>
     <dgm:cxn modelId="{A0308D4F-3C5E-4275-ADCD-45D8A9738DE9}" type="presOf" srcId="{9D9DE977-E466-47E8-871B-50CF2A42F42A}" destId="{EB3BF74B-1FD8-406A-A88E-FFA420A685F8}" srcOrd="0" destOrd="0" presId="urn:microsoft.com/office/officeart/2005/8/layout/vList5"/>
     <dgm:cxn modelId="{77F00650-4789-4A7A-9363-65DA32EC649D}" type="presOf" srcId="{F85F3B0E-DC9D-4FAA-B5D7-05AE8D82599B}" destId="{F4863EB9-8377-46EF-9E38-4A1D8CBA9C97}" srcOrd="0" destOrd="1" presId="urn:microsoft.com/office/officeart/2005/8/layout/vList5"/>
@@ -9383,29 +9344,10 @@
             <a:buChar char="•"/>
           </a:pPr>
           <a:r>
-            <a:rPr lang="nl-BE" sz="2400" kern="1200"/>
+            <a:rPr lang="nl-BE" sz="2400" kern="1200" dirty="0"/>
             <a:t>Realistische simulatie</a:t>
           </a:r>
-          <a:endParaRPr lang="en-US" sz="2400" kern="1200"/>
-        </a:p>
-        <a:p>
-          <a:pPr marL="228600" lvl="1" indent="-228600" algn="l" defTabSz="1066800">
-            <a:lnSpc>
-              <a:spcPct val="90000"/>
-            </a:lnSpc>
-            <a:spcBef>
-              <a:spcPct val="0"/>
-            </a:spcBef>
-            <a:spcAft>
-              <a:spcPct val="15000"/>
-            </a:spcAft>
-            <a:buChar char="•"/>
-          </a:pPr>
-          <a:r>
-            <a:rPr lang="nl-BE" sz="2400" kern="1200"/>
-            <a:t>Ontbreken van security-experts</a:t>
-          </a:r>
-          <a:endParaRPr lang="en-US" sz="2400" kern="1200"/>
+          <a:endParaRPr lang="en-US" sz="2400" kern="1200" dirty="0"/>
         </a:p>
       </dsp:txBody>
       <dsp:txXfrm rot="-5400000">
@@ -18498,7 +18440,7 @@
               <a:pPr>
                 <a:defRPr/>
               </a:pPr>
-              <a:t>28-1-2026</a:t>
+              <a:t>29-1-2026</a:t>
             </a:fld>
             <a:endParaRPr lang="nl-NL"/>
           </a:p>
@@ -19211,24 +19153,6 @@
             <a:r>
               <a:rPr lang="nl-BE" dirty="0"/>
               <a:t>Handmatig tellen</a:t>
-            </a:r>
-          </a:p>
-          <a:p>
-            <a:pPr lvl="2"/>
-            <a:r>
-              <a:rPr lang="nl-BE" dirty="0" err="1"/>
-              <a:t>Danger</a:t>
-            </a:r>
-            <a:r>
-              <a:rPr lang="nl-BE" dirty="0"/>
-              <a:t> rating/status vergeten</a:t>
-            </a:r>
-          </a:p>
-          <a:p>
-            <a:pPr lvl="2"/>
-            <a:r>
-              <a:rPr lang="nl-BE" dirty="0"/>
-              <a:t>Manuele kettingreconstructie</a:t>
             </a:r>
           </a:p>
           <a:p>
@@ -22755,7 +22679,7 @@
               <a:pPr>
                 <a:defRPr/>
               </a:pPr>
-              <a:t>28/01/2026</a:t>
+              <a:t>29/01/2026</a:t>
             </a:fld>
             <a:endParaRPr lang="nl-BE"/>
           </a:p>
@@ -23725,7 +23649,7 @@
         </p:nvSpPr>
         <p:spPr>
           <a:xfrm>
-            <a:off x="3592573" y="5082426"/>
+            <a:off x="3592573" y="5805264"/>
             <a:ext cx="4833374" cy="230832"/>
           </a:xfrm>
           <a:prstGeom prst="rect">
@@ -23763,7 +23687,7 @@
         </p:nvSpPr>
         <p:spPr>
           <a:xfrm>
-            <a:off x="9222625" y="5013176"/>
+            <a:off x="9222625" y="5723964"/>
             <a:ext cx="1697911" cy="369332"/>
           </a:xfrm>
           <a:prstGeom prst="rect">
@@ -23801,7 +23725,7 @@
         </p:nvSpPr>
         <p:spPr>
           <a:xfrm>
-            <a:off x="1036441" y="5013176"/>
+            <a:off x="1036441" y="5651956"/>
             <a:ext cx="2016224" cy="369332"/>
           </a:xfrm>
           <a:prstGeom prst="rect">
@@ -23817,7 +23741,16 @@
           <a:p>
             <a:r>
               <a:rPr lang="nl-BE" dirty="0">
-                <a:hlinkClick r:id="rId7"/>
+                <a:solidFill>
+                  <a:srgbClr val="0000FF"/>
+                </a:solidFill>
+                <a:hlinkClick r:id="rId7">
+                  <a:extLst>
+                    <a:ext uri="{A12FA001-AC4F-418D-AE19-62706E023703}">
+                      <ahyp:hlinkClr xmlns:ahyp="http://schemas.microsoft.com/office/drawing/2018/hyperlinkcolor" val="tx"/>
+                    </a:ext>
+                  </a:extLst>
+                </a:hlinkClick>
               </a:rPr>
               <a:t>https://react.dev</a:t>
             </a:r>
@@ -23872,6 +23805,122 @@
           </a:extLst>
         </p:spPr>
       </p:pic>
+      <p:sp>
+        <p:nvSpPr>
+          <p:cNvPr id="2" name="Tekstvak 1">
+            <a:extLst>
+              <a:ext uri="{FF2B5EF4-FFF2-40B4-BE49-F238E27FC236}">
+                <a16:creationId xmlns:a16="http://schemas.microsoft.com/office/drawing/2014/main" id="{C53D1F6E-889F-7C7C-DCE3-3AE90606C04C}"/>
+              </a:ext>
+            </a:extLst>
+          </p:cNvPr>
+          <p:cNvSpPr txBox="1"/>
+          <p:nvPr/>
+        </p:nvSpPr>
+        <p:spPr>
+          <a:xfrm>
+            <a:off x="407368" y="4941168"/>
+            <a:ext cx="3157482" cy="338554"/>
+          </a:xfrm>
+          <a:prstGeom prst="rect">
+            <a:avLst/>
+          </a:prstGeom>
+          <a:noFill/>
+        </p:spPr>
+        <p:txBody>
+          <a:bodyPr wrap="square" rtlCol="0">
+            <a:spAutoFit/>
+          </a:bodyPr>
+          <a:lstStyle/>
+          <a:p>
+            <a:pPr algn="ctr"/>
+            <a:r>
+              <a:rPr lang="nl-BE" sz="1600" dirty="0"/>
+              <a:t>Fig. X: </a:t>
+            </a:r>
+            <a:r>
+              <a:rPr lang="nl-BE" sz="1600" dirty="0" err="1"/>
+              <a:t>React</a:t>
+            </a:r>
+            <a:r>
+              <a:rPr lang="nl-BE" sz="1600" dirty="0"/>
+              <a:t> logo</a:t>
+            </a:r>
+          </a:p>
+        </p:txBody>
+      </p:sp>
+      <p:sp>
+        <p:nvSpPr>
+          <p:cNvPr id="5" name="Tekstvak 4">
+            <a:extLst>
+              <a:ext uri="{FF2B5EF4-FFF2-40B4-BE49-F238E27FC236}">
+                <a16:creationId xmlns:a16="http://schemas.microsoft.com/office/drawing/2014/main" id="{901C5F47-2FC1-82D5-54AD-645BE48B57D9}"/>
+              </a:ext>
+            </a:extLst>
+          </p:cNvPr>
+          <p:cNvSpPr txBox="1"/>
+          <p:nvPr/>
+        </p:nvSpPr>
+        <p:spPr>
+          <a:xfrm>
+            <a:off x="4144173" y="4797152"/>
+            <a:ext cx="3904994" cy="338554"/>
+          </a:xfrm>
+          <a:prstGeom prst="rect">
+            <a:avLst/>
+          </a:prstGeom>
+          <a:noFill/>
+        </p:spPr>
+        <p:txBody>
+          <a:bodyPr wrap="square" rtlCol="0">
+            <a:spAutoFit/>
+          </a:bodyPr>
+          <a:lstStyle/>
+          <a:p>
+            <a:pPr algn="ctr"/>
+            <a:r>
+              <a:rPr lang="nl-BE" sz="1600" dirty="0"/>
+              <a:t>Fig. X: Next.js logo</a:t>
+            </a:r>
+          </a:p>
+        </p:txBody>
+      </p:sp>
+      <p:sp>
+        <p:nvSpPr>
+          <p:cNvPr id="7" name="Tekstvak 6">
+            <a:extLst>
+              <a:ext uri="{FF2B5EF4-FFF2-40B4-BE49-F238E27FC236}">
+                <a16:creationId xmlns:a16="http://schemas.microsoft.com/office/drawing/2014/main" id="{E2112B29-7248-43A3-D802-156D123459F7}"/>
+              </a:ext>
+            </a:extLst>
+          </p:cNvPr>
+          <p:cNvSpPr txBox="1"/>
+          <p:nvPr/>
+        </p:nvSpPr>
+        <p:spPr>
+          <a:xfrm>
+            <a:off x="8627151" y="4869160"/>
+            <a:ext cx="2952328" cy="338554"/>
+          </a:xfrm>
+          <a:prstGeom prst="rect">
+            <a:avLst/>
+          </a:prstGeom>
+          <a:noFill/>
+        </p:spPr>
+        <p:txBody>
+          <a:bodyPr wrap="square" rtlCol="0">
+            <a:spAutoFit/>
+          </a:bodyPr>
+          <a:lstStyle/>
+          <a:p>
+            <a:pPr algn="ctr"/>
+            <a:r>
+              <a:rPr lang="nl-BE" sz="1600" dirty="0"/>
+              <a:t>Fig. X: D3-library logo</a:t>
+            </a:r>
+          </a:p>
+        </p:txBody>
+      </p:sp>
     </p:spTree>
     <p:extLst>
       <p:ext uri="{BB962C8B-B14F-4D97-AF65-F5344CB8AC3E}">
@@ -23964,7 +24013,7 @@
         </p:blipFill>
         <p:spPr>
           <a:xfrm>
-            <a:off x="2999655" y="1268760"/>
+            <a:off x="2999655" y="985380"/>
             <a:ext cx="6192688" cy="1593046"/>
           </a:xfrm>
           <a:prstGeom prst="rect">
@@ -24000,7 +24049,7 @@
         </p:blipFill>
         <p:spPr>
           <a:xfrm>
-            <a:off x="2783632" y="3861048"/>
+            <a:off x="2783632" y="4211183"/>
             <a:ext cx="6541463" cy="1584176"/>
           </a:xfrm>
           <a:prstGeom prst="rect">
@@ -24022,7 +24071,7 @@
         </p:nvSpPr>
         <p:spPr>
           <a:xfrm>
-            <a:off x="6672064" y="2705083"/>
+            <a:off x="6672064" y="2421703"/>
             <a:ext cx="432048" cy="656344"/>
           </a:xfrm>
           <a:prstGeom prst="upArrow">
@@ -24068,7 +24117,7 @@
         </p:nvSpPr>
         <p:spPr>
           <a:xfrm>
-            <a:off x="7752184" y="2276872"/>
+            <a:off x="7752184" y="1993492"/>
             <a:ext cx="432048" cy="656344"/>
           </a:xfrm>
           <a:prstGeom prst="upArrow">
@@ -24114,7 +24163,7 @@
         </p:nvSpPr>
         <p:spPr>
           <a:xfrm>
-            <a:off x="5705696" y="2705083"/>
+            <a:off x="5705696" y="2421703"/>
             <a:ext cx="432048" cy="656344"/>
           </a:xfrm>
           <a:prstGeom prst="upArrow">
@@ -24160,7 +24209,7 @@
         </p:nvSpPr>
         <p:spPr>
           <a:xfrm>
-            <a:off x="5195459" y="2705083"/>
+            <a:off x="5195459" y="2421703"/>
             <a:ext cx="432048" cy="656344"/>
           </a:xfrm>
           <a:prstGeom prst="upArrow">
@@ -24206,7 +24255,7 @@
         </p:nvSpPr>
         <p:spPr>
           <a:xfrm rot="7488290">
-            <a:off x="3320413" y="940589"/>
+            <a:off x="3320413" y="657209"/>
             <a:ext cx="432048" cy="656344"/>
           </a:xfrm>
           <a:prstGeom prst="upArrow">
@@ -24252,7 +24301,7 @@
         </p:nvSpPr>
         <p:spPr>
           <a:xfrm rot="11280905">
-            <a:off x="8371896" y="3177789"/>
+            <a:off x="8443905" y="439157"/>
             <a:ext cx="432048" cy="656344"/>
           </a:xfrm>
           <a:prstGeom prst="upArrow">
@@ -24284,6 +24333,140 @@
           </a:p>
         </p:txBody>
       </p:sp>
+      <p:sp>
+        <p:nvSpPr>
+          <p:cNvPr id="4" name="Tekstvak 3">
+            <a:extLst>
+              <a:ext uri="{FF2B5EF4-FFF2-40B4-BE49-F238E27FC236}">
+                <a16:creationId xmlns:a16="http://schemas.microsoft.com/office/drawing/2014/main" id="{938CDA72-81FF-B3F8-7D3F-559FFC677966}"/>
+              </a:ext>
+            </a:extLst>
+          </p:cNvPr>
+          <p:cNvSpPr txBox="1"/>
+          <p:nvPr/>
+        </p:nvSpPr>
+        <p:spPr>
+          <a:xfrm>
+            <a:off x="2999656" y="3132678"/>
+            <a:ext cx="6192688" cy="338554"/>
+          </a:xfrm>
+          <a:prstGeom prst="rect">
+            <a:avLst/>
+          </a:prstGeom>
+          <a:noFill/>
+        </p:spPr>
+        <p:txBody>
+          <a:bodyPr wrap="square" rtlCol="0">
+            <a:spAutoFit/>
+          </a:bodyPr>
+          <a:lstStyle/>
+          <a:p>
+            <a:pPr algn="ctr"/>
+            <a:r>
+              <a:rPr lang="nl-BE" sz="1600" dirty="0"/>
+              <a:t>Fig. X: Visuele representatie van een </a:t>
+            </a:r>
+            <a:r>
+              <a:rPr lang="nl-BE" sz="1600" dirty="0" err="1"/>
+              <a:t>fortunately</a:t>
+            </a:r>
+            <a:r>
+              <a:rPr lang="nl-BE" sz="1600" dirty="0"/>
+              <a:t>-node</a:t>
+            </a:r>
+          </a:p>
+        </p:txBody>
+      </p:sp>
+      <p:sp>
+        <p:nvSpPr>
+          <p:cNvPr id="5" name="Tekstvak 4">
+            <a:extLst>
+              <a:ext uri="{FF2B5EF4-FFF2-40B4-BE49-F238E27FC236}">
+                <a16:creationId xmlns:a16="http://schemas.microsoft.com/office/drawing/2014/main" id="{2DA395A0-D3BB-A402-0907-A871DDF3337E}"/>
+              </a:ext>
+            </a:extLst>
+          </p:cNvPr>
+          <p:cNvSpPr txBox="1"/>
+          <p:nvPr/>
+        </p:nvSpPr>
+        <p:spPr>
+          <a:xfrm>
+            <a:off x="2783632" y="5785843"/>
+            <a:ext cx="6541463" cy="338554"/>
+          </a:xfrm>
+          <a:prstGeom prst="rect">
+            <a:avLst/>
+          </a:prstGeom>
+          <a:noFill/>
+        </p:spPr>
+        <p:txBody>
+          <a:bodyPr wrap="square" rtlCol="0">
+            <a:spAutoFit/>
+          </a:bodyPr>
+          <a:lstStyle/>
+          <a:p>
+            <a:pPr algn="ctr"/>
+            <a:r>
+              <a:rPr lang="nl-BE" sz="1600" dirty="0"/>
+              <a:t>Fig. X: Visuele representatie van een </a:t>
+            </a:r>
+            <a:r>
+              <a:rPr lang="nl-BE" sz="1600" dirty="0" err="1"/>
+              <a:t>unfortunately</a:t>
+            </a:r>
+            <a:r>
+              <a:rPr lang="nl-BE" sz="1600" dirty="0"/>
+              <a:t>-node</a:t>
+            </a:r>
+          </a:p>
+        </p:txBody>
+      </p:sp>
+      <p:sp>
+        <p:nvSpPr>
+          <p:cNvPr id="13" name="Pijl: omhoog 12">
+            <a:extLst>
+              <a:ext uri="{FF2B5EF4-FFF2-40B4-BE49-F238E27FC236}">
+                <a16:creationId xmlns:a16="http://schemas.microsoft.com/office/drawing/2014/main" id="{5250E832-E5E6-9A5E-AF23-E370B9824002}"/>
+              </a:ext>
+            </a:extLst>
+          </p:cNvPr>
+          <p:cNvSpPr/>
+          <p:nvPr/>
+        </p:nvSpPr>
+        <p:spPr>
+          <a:xfrm rot="11280905">
+            <a:off x="8371895" y="3491122"/>
+            <a:ext cx="432048" cy="656344"/>
+          </a:xfrm>
+          <a:prstGeom prst="upArrow">
+            <a:avLst/>
+          </a:prstGeom>
+        </p:spPr>
+        <p:style>
+          <a:lnRef idx="2">
+            <a:schemeClr val="dk1">
+              <a:shade val="15000"/>
+            </a:schemeClr>
+          </a:lnRef>
+          <a:fillRef idx="1">
+            <a:schemeClr val="dk1"/>
+          </a:fillRef>
+          <a:effectRef idx="0">
+            <a:schemeClr val="dk1"/>
+          </a:effectRef>
+          <a:fontRef idx="minor">
+            <a:schemeClr val="lt1"/>
+          </a:fontRef>
+        </p:style>
+        <p:txBody>
+          <a:bodyPr rtlCol="0" anchor="ctr"/>
+          <a:lstStyle/>
+          <a:p>
+            <a:pPr algn="ctr"/>
+            <a:endParaRPr lang="nl-BE"/>
+          </a:p>
+        </p:txBody>
+      </p:sp>
     </p:spTree>
     <p:extLst>
       <p:ext uri="{BB962C8B-B14F-4D97-AF65-F5344CB8AC3E}">
@@ -24294,6 +24477,868 @@
   <p:clrMapOvr>
     <a:masterClrMapping/>
   </p:clrMapOvr>
+  <p:timing>
+    <p:tnLst>
+      <p:par>
+        <p:cTn id="1" dur="indefinite" restart="never" nodeType="tmRoot">
+          <p:childTnLst>
+            <p:seq concurrent="1" nextAc="seek">
+              <p:cTn id="2" dur="indefinite" nodeType="mainSeq">
+                <p:childTnLst>
+                  <p:par>
+                    <p:cTn id="3" fill="hold">
+                      <p:stCondLst>
+                        <p:cond delay="indefinite"/>
+                      </p:stCondLst>
+                      <p:childTnLst>
+                        <p:par>
+                          <p:cTn id="4" fill="hold">
+                            <p:stCondLst>
+                              <p:cond delay="0"/>
+                            </p:stCondLst>
+                            <p:childTnLst>
+                              <p:par>
+                                <p:cTn id="5" presetID="42" presetClass="entr" presetSubtype="0" fill="hold" grpId="0" nodeType="clickEffect">
+                                  <p:stCondLst>
+                                    <p:cond delay="0"/>
+                                  </p:stCondLst>
+                                  <p:childTnLst>
+                                    <p:set>
+                                      <p:cBhvr>
+                                        <p:cTn id="6" dur="1" fill="hold">
+                                          <p:stCondLst>
+                                            <p:cond delay="0"/>
+                                          </p:stCondLst>
+                                        </p:cTn>
+                                        <p:tgtEl>
+                                          <p:spTgt spid="11"/>
+                                        </p:tgtEl>
+                                        <p:attrNameLst>
+                                          <p:attrName>style.visibility</p:attrName>
+                                        </p:attrNameLst>
+                                      </p:cBhvr>
+                                      <p:to>
+                                        <p:strVal val="visible"/>
+                                      </p:to>
+                                    </p:set>
+                                    <p:animEffect transition="in" filter="fade">
+                                      <p:cBhvr>
+                                        <p:cTn id="7" dur="250"/>
+                                        <p:tgtEl>
+                                          <p:spTgt spid="11"/>
+                                        </p:tgtEl>
+                                      </p:cBhvr>
+                                    </p:animEffect>
+                                    <p:anim calcmode="lin" valueType="num">
+                                      <p:cBhvr>
+                                        <p:cTn id="8" dur="250" fill="hold"/>
+                                        <p:tgtEl>
+                                          <p:spTgt spid="11"/>
+                                        </p:tgtEl>
+                                        <p:attrNameLst>
+                                          <p:attrName>ppt_x</p:attrName>
+                                        </p:attrNameLst>
+                                      </p:cBhvr>
+                                      <p:tavLst>
+                                        <p:tav tm="0">
+                                          <p:val>
+                                            <p:strVal val="#ppt_x"/>
+                                          </p:val>
+                                        </p:tav>
+                                        <p:tav tm="100000">
+                                          <p:val>
+                                            <p:strVal val="#ppt_x"/>
+                                          </p:val>
+                                        </p:tav>
+                                      </p:tavLst>
+                                    </p:anim>
+                                    <p:anim calcmode="lin" valueType="num">
+                                      <p:cBhvr>
+                                        <p:cTn id="9" dur="250" fill="hold"/>
+                                        <p:tgtEl>
+                                          <p:spTgt spid="11"/>
+                                        </p:tgtEl>
+                                        <p:attrNameLst>
+                                          <p:attrName>ppt_y</p:attrName>
+                                        </p:attrNameLst>
+                                      </p:cBhvr>
+                                      <p:tavLst>
+                                        <p:tav tm="0">
+                                          <p:val>
+                                            <p:strVal val="#ppt_y+.1"/>
+                                          </p:val>
+                                        </p:tav>
+                                        <p:tav tm="100000">
+                                          <p:val>
+                                            <p:strVal val="#ppt_y"/>
+                                          </p:val>
+                                        </p:tav>
+                                      </p:tavLst>
+                                    </p:anim>
+                                  </p:childTnLst>
+                                </p:cTn>
+                              </p:par>
+                            </p:childTnLst>
+                          </p:cTn>
+                        </p:par>
+                      </p:childTnLst>
+                    </p:cTn>
+                  </p:par>
+                  <p:par>
+                    <p:cTn id="10" fill="hold">
+                      <p:stCondLst>
+                        <p:cond delay="indefinite"/>
+                      </p:stCondLst>
+                      <p:childTnLst>
+                        <p:par>
+                          <p:cTn id="11" fill="hold">
+                            <p:stCondLst>
+                              <p:cond delay="0"/>
+                            </p:stCondLst>
+                            <p:childTnLst>
+                              <p:par>
+                                <p:cTn id="12" presetID="42" presetClass="entr" presetSubtype="0" fill="hold" grpId="0" nodeType="clickEffect">
+                                  <p:stCondLst>
+                                    <p:cond delay="0"/>
+                                  </p:stCondLst>
+                                  <p:childTnLst>
+                                    <p:set>
+                                      <p:cBhvr>
+                                        <p:cTn id="13" dur="1" fill="hold">
+                                          <p:stCondLst>
+                                            <p:cond delay="0"/>
+                                          </p:stCondLst>
+                                        </p:cTn>
+                                        <p:tgtEl>
+                                          <p:spTgt spid="9"/>
+                                        </p:tgtEl>
+                                        <p:attrNameLst>
+                                          <p:attrName>style.visibility</p:attrName>
+                                        </p:attrNameLst>
+                                      </p:cBhvr>
+                                      <p:to>
+                                        <p:strVal val="visible"/>
+                                      </p:to>
+                                    </p:set>
+                                    <p:animEffect transition="in" filter="fade">
+                                      <p:cBhvr>
+                                        <p:cTn id="14" dur="250"/>
+                                        <p:tgtEl>
+                                          <p:spTgt spid="9"/>
+                                        </p:tgtEl>
+                                      </p:cBhvr>
+                                    </p:animEffect>
+                                    <p:anim calcmode="lin" valueType="num">
+                                      <p:cBhvr>
+                                        <p:cTn id="15" dur="250" fill="hold"/>
+                                        <p:tgtEl>
+                                          <p:spTgt spid="9"/>
+                                        </p:tgtEl>
+                                        <p:attrNameLst>
+                                          <p:attrName>ppt_x</p:attrName>
+                                        </p:attrNameLst>
+                                      </p:cBhvr>
+                                      <p:tavLst>
+                                        <p:tav tm="0">
+                                          <p:val>
+                                            <p:strVal val="#ppt_x"/>
+                                          </p:val>
+                                        </p:tav>
+                                        <p:tav tm="100000">
+                                          <p:val>
+                                            <p:strVal val="#ppt_x"/>
+                                          </p:val>
+                                        </p:tav>
+                                      </p:tavLst>
+                                    </p:anim>
+                                    <p:anim calcmode="lin" valueType="num">
+                                      <p:cBhvr>
+                                        <p:cTn id="16" dur="250" fill="hold"/>
+                                        <p:tgtEl>
+                                          <p:spTgt spid="9"/>
+                                        </p:tgtEl>
+                                        <p:attrNameLst>
+                                          <p:attrName>ppt_y</p:attrName>
+                                        </p:attrNameLst>
+                                      </p:cBhvr>
+                                      <p:tavLst>
+                                        <p:tav tm="0">
+                                          <p:val>
+                                            <p:strVal val="#ppt_y+.1"/>
+                                          </p:val>
+                                        </p:tav>
+                                        <p:tav tm="100000">
+                                          <p:val>
+                                            <p:strVal val="#ppt_y"/>
+                                          </p:val>
+                                        </p:tav>
+                                      </p:tavLst>
+                                    </p:anim>
+                                  </p:childTnLst>
+                                </p:cTn>
+                              </p:par>
+                            </p:childTnLst>
+                          </p:cTn>
+                        </p:par>
+                      </p:childTnLst>
+                    </p:cTn>
+                  </p:par>
+                  <p:par>
+                    <p:cTn id="17" fill="hold">
+                      <p:stCondLst>
+                        <p:cond delay="indefinite"/>
+                      </p:stCondLst>
+                      <p:childTnLst>
+                        <p:par>
+                          <p:cTn id="18" fill="hold">
+                            <p:stCondLst>
+                              <p:cond delay="0"/>
+                            </p:stCondLst>
+                            <p:childTnLst>
+                              <p:par>
+                                <p:cTn id="19" presetID="42" presetClass="entr" presetSubtype="0" fill="hold" grpId="0" nodeType="clickEffect">
+                                  <p:stCondLst>
+                                    <p:cond delay="0"/>
+                                  </p:stCondLst>
+                                  <p:childTnLst>
+                                    <p:set>
+                                      <p:cBhvr>
+                                        <p:cTn id="20" dur="1" fill="hold">
+                                          <p:stCondLst>
+                                            <p:cond delay="0"/>
+                                          </p:stCondLst>
+                                        </p:cTn>
+                                        <p:tgtEl>
+                                          <p:spTgt spid="7"/>
+                                        </p:tgtEl>
+                                        <p:attrNameLst>
+                                          <p:attrName>style.visibility</p:attrName>
+                                        </p:attrNameLst>
+                                      </p:cBhvr>
+                                      <p:to>
+                                        <p:strVal val="visible"/>
+                                      </p:to>
+                                    </p:set>
+                                    <p:animEffect transition="in" filter="fade">
+                                      <p:cBhvr>
+                                        <p:cTn id="21" dur="250"/>
+                                        <p:tgtEl>
+                                          <p:spTgt spid="7"/>
+                                        </p:tgtEl>
+                                      </p:cBhvr>
+                                    </p:animEffect>
+                                    <p:anim calcmode="lin" valueType="num">
+                                      <p:cBhvr>
+                                        <p:cTn id="22" dur="250" fill="hold"/>
+                                        <p:tgtEl>
+                                          <p:spTgt spid="7"/>
+                                        </p:tgtEl>
+                                        <p:attrNameLst>
+                                          <p:attrName>ppt_x</p:attrName>
+                                        </p:attrNameLst>
+                                      </p:cBhvr>
+                                      <p:tavLst>
+                                        <p:tav tm="0">
+                                          <p:val>
+                                            <p:strVal val="#ppt_x"/>
+                                          </p:val>
+                                        </p:tav>
+                                        <p:tav tm="100000">
+                                          <p:val>
+                                            <p:strVal val="#ppt_x"/>
+                                          </p:val>
+                                        </p:tav>
+                                      </p:tavLst>
+                                    </p:anim>
+                                    <p:anim calcmode="lin" valueType="num">
+                                      <p:cBhvr>
+                                        <p:cTn id="23" dur="250" fill="hold"/>
+                                        <p:tgtEl>
+                                          <p:spTgt spid="7"/>
+                                        </p:tgtEl>
+                                        <p:attrNameLst>
+                                          <p:attrName>ppt_y</p:attrName>
+                                        </p:attrNameLst>
+                                      </p:cBhvr>
+                                      <p:tavLst>
+                                        <p:tav tm="0">
+                                          <p:val>
+                                            <p:strVal val="#ppt_y+.1"/>
+                                          </p:val>
+                                        </p:tav>
+                                        <p:tav tm="100000">
+                                          <p:val>
+                                            <p:strVal val="#ppt_y"/>
+                                          </p:val>
+                                        </p:tav>
+                                      </p:tavLst>
+                                    </p:anim>
+                                  </p:childTnLst>
+                                </p:cTn>
+                              </p:par>
+                            </p:childTnLst>
+                          </p:cTn>
+                        </p:par>
+                      </p:childTnLst>
+                    </p:cTn>
+                  </p:par>
+                  <p:par>
+                    <p:cTn id="24" fill="hold">
+                      <p:stCondLst>
+                        <p:cond delay="indefinite"/>
+                      </p:stCondLst>
+                      <p:childTnLst>
+                        <p:par>
+                          <p:cTn id="25" fill="hold">
+                            <p:stCondLst>
+                              <p:cond delay="0"/>
+                            </p:stCondLst>
+                            <p:childTnLst>
+                              <p:par>
+                                <p:cTn id="26" presetID="42" presetClass="entr" presetSubtype="0" fill="hold" grpId="0" nodeType="clickEffect">
+                                  <p:stCondLst>
+                                    <p:cond delay="0"/>
+                                  </p:stCondLst>
+                                  <p:childTnLst>
+                                    <p:set>
+                                      <p:cBhvr>
+                                        <p:cTn id="27" dur="1" fill="hold">
+                                          <p:stCondLst>
+                                            <p:cond delay="0"/>
+                                          </p:stCondLst>
+                                        </p:cTn>
+                                        <p:tgtEl>
+                                          <p:spTgt spid="8"/>
+                                        </p:tgtEl>
+                                        <p:attrNameLst>
+                                          <p:attrName>style.visibility</p:attrName>
+                                        </p:attrNameLst>
+                                      </p:cBhvr>
+                                      <p:to>
+                                        <p:strVal val="visible"/>
+                                      </p:to>
+                                    </p:set>
+                                    <p:animEffect transition="in" filter="fade">
+                                      <p:cBhvr>
+                                        <p:cTn id="28" dur="250"/>
+                                        <p:tgtEl>
+                                          <p:spTgt spid="8"/>
+                                        </p:tgtEl>
+                                      </p:cBhvr>
+                                    </p:animEffect>
+                                    <p:anim calcmode="lin" valueType="num">
+                                      <p:cBhvr>
+                                        <p:cTn id="29" dur="250" fill="hold"/>
+                                        <p:tgtEl>
+                                          <p:spTgt spid="8"/>
+                                        </p:tgtEl>
+                                        <p:attrNameLst>
+                                          <p:attrName>ppt_x</p:attrName>
+                                        </p:attrNameLst>
+                                      </p:cBhvr>
+                                      <p:tavLst>
+                                        <p:tav tm="0">
+                                          <p:val>
+                                            <p:strVal val="#ppt_x"/>
+                                          </p:val>
+                                        </p:tav>
+                                        <p:tav tm="100000">
+                                          <p:val>
+                                            <p:strVal val="#ppt_x"/>
+                                          </p:val>
+                                        </p:tav>
+                                      </p:tavLst>
+                                    </p:anim>
+                                    <p:anim calcmode="lin" valueType="num">
+                                      <p:cBhvr>
+                                        <p:cTn id="30" dur="250" fill="hold"/>
+                                        <p:tgtEl>
+                                          <p:spTgt spid="8"/>
+                                        </p:tgtEl>
+                                        <p:attrNameLst>
+                                          <p:attrName>ppt_y</p:attrName>
+                                        </p:attrNameLst>
+                                      </p:cBhvr>
+                                      <p:tavLst>
+                                        <p:tav tm="0">
+                                          <p:val>
+                                            <p:strVal val="#ppt_y+.1"/>
+                                          </p:val>
+                                        </p:tav>
+                                        <p:tav tm="100000">
+                                          <p:val>
+                                            <p:strVal val="#ppt_y"/>
+                                          </p:val>
+                                        </p:tav>
+                                      </p:tavLst>
+                                    </p:anim>
+                                  </p:childTnLst>
+                                </p:cTn>
+                              </p:par>
+                            </p:childTnLst>
+                          </p:cTn>
+                        </p:par>
+                      </p:childTnLst>
+                    </p:cTn>
+                  </p:par>
+                  <p:par>
+                    <p:cTn id="31" fill="hold">
+                      <p:stCondLst>
+                        <p:cond delay="indefinite"/>
+                      </p:stCondLst>
+                      <p:childTnLst>
+                        <p:par>
+                          <p:cTn id="32" fill="hold">
+                            <p:stCondLst>
+                              <p:cond delay="0"/>
+                            </p:stCondLst>
+                            <p:childTnLst>
+                              <p:par>
+                                <p:cTn id="33" presetID="1" presetClass="exit" presetSubtype="0" fill="hold" grpId="1" nodeType="clickEffect">
+                                  <p:stCondLst>
+                                    <p:cond delay="0"/>
+                                  </p:stCondLst>
+                                  <p:childTnLst>
+                                    <p:set>
+                                      <p:cBhvr>
+                                        <p:cTn id="34" dur="1" fill="hold">
+                                          <p:stCondLst>
+                                            <p:cond delay="0"/>
+                                          </p:stCondLst>
+                                        </p:cTn>
+                                        <p:tgtEl>
+                                          <p:spTgt spid="11"/>
+                                        </p:tgtEl>
+                                        <p:attrNameLst>
+                                          <p:attrName>style.visibility</p:attrName>
+                                        </p:attrNameLst>
+                                      </p:cBhvr>
+                                      <p:to>
+                                        <p:strVal val="hidden"/>
+                                      </p:to>
+                                    </p:set>
+                                  </p:childTnLst>
+                                </p:cTn>
+                              </p:par>
+                              <p:par>
+                                <p:cTn id="35" presetID="1" presetClass="exit" presetSubtype="0" fill="hold" grpId="1" nodeType="withEffect">
+                                  <p:stCondLst>
+                                    <p:cond delay="0"/>
+                                  </p:stCondLst>
+                                  <p:childTnLst>
+                                    <p:set>
+                                      <p:cBhvr>
+                                        <p:cTn id="36" dur="1" fill="hold">
+                                          <p:stCondLst>
+                                            <p:cond delay="0"/>
+                                          </p:stCondLst>
+                                        </p:cTn>
+                                        <p:tgtEl>
+                                          <p:spTgt spid="9"/>
+                                        </p:tgtEl>
+                                        <p:attrNameLst>
+                                          <p:attrName>style.visibility</p:attrName>
+                                        </p:attrNameLst>
+                                      </p:cBhvr>
+                                      <p:to>
+                                        <p:strVal val="hidden"/>
+                                      </p:to>
+                                    </p:set>
+                                  </p:childTnLst>
+                                </p:cTn>
+                              </p:par>
+                              <p:par>
+                                <p:cTn id="37" presetID="1" presetClass="exit" presetSubtype="0" fill="hold" grpId="1" nodeType="withEffect">
+                                  <p:stCondLst>
+                                    <p:cond delay="0"/>
+                                  </p:stCondLst>
+                                  <p:childTnLst>
+                                    <p:set>
+                                      <p:cBhvr>
+                                        <p:cTn id="38" dur="1" fill="hold">
+                                          <p:stCondLst>
+                                            <p:cond delay="0"/>
+                                          </p:stCondLst>
+                                        </p:cTn>
+                                        <p:tgtEl>
+                                          <p:spTgt spid="7"/>
+                                        </p:tgtEl>
+                                        <p:attrNameLst>
+                                          <p:attrName>style.visibility</p:attrName>
+                                        </p:attrNameLst>
+                                      </p:cBhvr>
+                                      <p:to>
+                                        <p:strVal val="hidden"/>
+                                      </p:to>
+                                    </p:set>
+                                  </p:childTnLst>
+                                </p:cTn>
+                              </p:par>
+                              <p:par>
+                                <p:cTn id="39" presetID="1" presetClass="exit" presetSubtype="0" fill="hold" grpId="1" nodeType="withEffect">
+                                  <p:stCondLst>
+                                    <p:cond delay="0"/>
+                                  </p:stCondLst>
+                                  <p:childTnLst>
+                                    <p:set>
+                                      <p:cBhvr>
+                                        <p:cTn id="40" dur="1" fill="hold">
+                                          <p:stCondLst>
+                                            <p:cond delay="0"/>
+                                          </p:stCondLst>
+                                        </p:cTn>
+                                        <p:tgtEl>
+                                          <p:spTgt spid="8"/>
+                                        </p:tgtEl>
+                                        <p:attrNameLst>
+                                          <p:attrName>style.visibility</p:attrName>
+                                        </p:attrNameLst>
+                                      </p:cBhvr>
+                                      <p:to>
+                                        <p:strVal val="hidden"/>
+                                      </p:to>
+                                    </p:set>
+                                  </p:childTnLst>
+                                </p:cTn>
+                              </p:par>
+                            </p:childTnLst>
+                          </p:cTn>
+                        </p:par>
+                      </p:childTnLst>
+                    </p:cTn>
+                  </p:par>
+                  <p:par>
+                    <p:cTn id="41" fill="hold">
+                      <p:stCondLst>
+                        <p:cond delay="indefinite"/>
+                      </p:stCondLst>
+                      <p:childTnLst>
+                        <p:par>
+                          <p:cTn id="42" fill="hold">
+                            <p:stCondLst>
+                              <p:cond delay="0"/>
+                            </p:stCondLst>
+                            <p:childTnLst>
+                              <p:par>
+                                <p:cTn id="43" presetID="42" presetClass="entr" presetSubtype="0" fill="hold" grpId="0" nodeType="clickEffect">
+                                  <p:stCondLst>
+                                    <p:cond delay="0"/>
+                                  </p:stCondLst>
+                                  <p:childTnLst>
+                                    <p:set>
+                                      <p:cBhvr>
+                                        <p:cTn id="44" dur="1" fill="hold">
+                                          <p:stCondLst>
+                                            <p:cond delay="0"/>
+                                          </p:stCondLst>
+                                        </p:cTn>
+                                        <p:tgtEl>
+                                          <p:spTgt spid="10"/>
+                                        </p:tgtEl>
+                                        <p:attrNameLst>
+                                          <p:attrName>style.visibility</p:attrName>
+                                        </p:attrNameLst>
+                                      </p:cBhvr>
+                                      <p:to>
+                                        <p:strVal val="visible"/>
+                                      </p:to>
+                                    </p:set>
+                                    <p:animEffect transition="in" filter="fade">
+                                      <p:cBhvr>
+                                        <p:cTn id="45" dur="250"/>
+                                        <p:tgtEl>
+                                          <p:spTgt spid="10"/>
+                                        </p:tgtEl>
+                                      </p:cBhvr>
+                                    </p:animEffect>
+                                    <p:anim calcmode="lin" valueType="num">
+                                      <p:cBhvr>
+                                        <p:cTn id="46" dur="250" fill="hold"/>
+                                        <p:tgtEl>
+                                          <p:spTgt spid="10"/>
+                                        </p:tgtEl>
+                                        <p:attrNameLst>
+                                          <p:attrName>ppt_x</p:attrName>
+                                        </p:attrNameLst>
+                                      </p:cBhvr>
+                                      <p:tavLst>
+                                        <p:tav tm="0">
+                                          <p:val>
+                                            <p:strVal val="#ppt_x"/>
+                                          </p:val>
+                                        </p:tav>
+                                        <p:tav tm="100000">
+                                          <p:val>
+                                            <p:strVal val="#ppt_x"/>
+                                          </p:val>
+                                        </p:tav>
+                                      </p:tavLst>
+                                    </p:anim>
+                                    <p:anim calcmode="lin" valueType="num">
+                                      <p:cBhvr>
+                                        <p:cTn id="47" dur="250" fill="hold"/>
+                                        <p:tgtEl>
+                                          <p:spTgt spid="10"/>
+                                        </p:tgtEl>
+                                        <p:attrNameLst>
+                                          <p:attrName>ppt_y</p:attrName>
+                                        </p:attrNameLst>
+                                      </p:cBhvr>
+                                      <p:tavLst>
+                                        <p:tav tm="0">
+                                          <p:val>
+                                            <p:strVal val="#ppt_y+.1"/>
+                                          </p:val>
+                                        </p:tav>
+                                        <p:tav tm="100000">
+                                          <p:val>
+                                            <p:strVal val="#ppt_y"/>
+                                          </p:val>
+                                        </p:tav>
+                                      </p:tavLst>
+                                    </p:anim>
+                                  </p:childTnLst>
+                                </p:cTn>
+                              </p:par>
+                            </p:childTnLst>
+                          </p:cTn>
+                        </p:par>
+                      </p:childTnLst>
+                    </p:cTn>
+                  </p:par>
+                  <p:par>
+                    <p:cTn id="48" fill="hold">
+                      <p:stCondLst>
+                        <p:cond delay="indefinite"/>
+                      </p:stCondLst>
+                      <p:childTnLst>
+                        <p:par>
+                          <p:cTn id="49" fill="hold">
+                            <p:stCondLst>
+                              <p:cond delay="0"/>
+                            </p:stCondLst>
+                            <p:childTnLst>
+                              <p:par>
+                                <p:cTn id="50" presetID="42" presetClass="entr" presetSubtype="0" fill="hold" grpId="0" nodeType="clickEffect">
+                                  <p:stCondLst>
+                                    <p:cond delay="0"/>
+                                  </p:stCondLst>
+                                  <p:childTnLst>
+                                    <p:set>
+                                      <p:cBhvr>
+                                        <p:cTn id="51" dur="1" fill="hold">
+                                          <p:stCondLst>
+                                            <p:cond delay="0"/>
+                                          </p:stCondLst>
+                                        </p:cTn>
+                                        <p:tgtEl>
+                                          <p:spTgt spid="12"/>
+                                        </p:tgtEl>
+                                        <p:attrNameLst>
+                                          <p:attrName>style.visibility</p:attrName>
+                                        </p:attrNameLst>
+                                      </p:cBhvr>
+                                      <p:to>
+                                        <p:strVal val="visible"/>
+                                      </p:to>
+                                    </p:set>
+                                    <p:animEffect transition="in" filter="fade">
+                                      <p:cBhvr>
+                                        <p:cTn id="52" dur="250"/>
+                                        <p:tgtEl>
+                                          <p:spTgt spid="12"/>
+                                        </p:tgtEl>
+                                      </p:cBhvr>
+                                    </p:animEffect>
+                                    <p:anim calcmode="lin" valueType="num">
+                                      <p:cBhvr>
+                                        <p:cTn id="53" dur="250" fill="hold"/>
+                                        <p:tgtEl>
+                                          <p:spTgt spid="12"/>
+                                        </p:tgtEl>
+                                        <p:attrNameLst>
+                                          <p:attrName>ppt_x</p:attrName>
+                                        </p:attrNameLst>
+                                      </p:cBhvr>
+                                      <p:tavLst>
+                                        <p:tav tm="0">
+                                          <p:val>
+                                            <p:strVal val="#ppt_x"/>
+                                          </p:val>
+                                        </p:tav>
+                                        <p:tav tm="100000">
+                                          <p:val>
+                                            <p:strVal val="#ppt_x"/>
+                                          </p:val>
+                                        </p:tav>
+                                      </p:tavLst>
+                                    </p:anim>
+                                    <p:anim calcmode="lin" valueType="num">
+                                      <p:cBhvr>
+                                        <p:cTn id="54" dur="250" fill="hold"/>
+                                        <p:tgtEl>
+                                          <p:spTgt spid="12"/>
+                                        </p:tgtEl>
+                                        <p:attrNameLst>
+                                          <p:attrName>ppt_y</p:attrName>
+                                        </p:attrNameLst>
+                                      </p:cBhvr>
+                                      <p:tavLst>
+                                        <p:tav tm="0">
+                                          <p:val>
+                                            <p:strVal val="#ppt_y+.1"/>
+                                          </p:val>
+                                        </p:tav>
+                                        <p:tav tm="100000">
+                                          <p:val>
+                                            <p:strVal val="#ppt_y"/>
+                                          </p:val>
+                                        </p:tav>
+                                      </p:tavLst>
+                                    </p:anim>
+                                  </p:childTnLst>
+                                </p:cTn>
+                              </p:par>
+                            </p:childTnLst>
+                          </p:cTn>
+                        </p:par>
+                      </p:childTnLst>
+                    </p:cTn>
+                  </p:par>
+                  <p:par>
+                    <p:cTn id="55" fill="hold">
+                      <p:stCondLst>
+                        <p:cond delay="indefinite"/>
+                      </p:stCondLst>
+                      <p:childTnLst>
+                        <p:par>
+                          <p:cTn id="56" fill="hold">
+                            <p:stCondLst>
+                              <p:cond delay="0"/>
+                            </p:stCondLst>
+                            <p:childTnLst>
+                              <p:par>
+                                <p:cTn id="57" presetID="42" presetClass="entr" presetSubtype="0" fill="hold" grpId="0" nodeType="clickEffect">
+                                  <p:stCondLst>
+                                    <p:cond delay="0"/>
+                                  </p:stCondLst>
+                                  <p:childTnLst>
+                                    <p:set>
+                                      <p:cBhvr>
+                                        <p:cTn id="58" dur="1" fill="hold">
+                                          <p:stCondLst>
+                                            <p:cond delay="0"/>
+                                          </p:stCondLst>
+                                        </p:cTn>
+                                        <p:tgtEl>
+                                          <p:spTgt spid="13"/>
+                                        </p:tgtEl>
+                                        <p:attrNameLst>
+                                          <p:attrName>style.visibility</p:attrName>
+                                        </p:attrNameLst>
+                                      </p:cBhvr>
+                                      <p:to>
+                                        <p:strVal val="visible"/>
+                                      </p:to>
+                                    </p:set>
+                                    <p:animEffect transition="in" filter="fade">
+                                      <p:cBhvr>
+                                        <p:cTn id="59" dur="250"/>
+                                        <p:tgtEl>
+                                          <p:spTgt spid="13"/>
+                                        </p:tgtEl>
+                                      </p:cBhvr>
+                                    </p:animEffect>
+                                    <p:anim calcmode="lin" valueType="num">
+                                      <p:cBhvr>
+                                        <p:cTn id="60" dur="250" fill="hold"/>
+                                        <p:tgtEl>
+                                          <p:spTgt spid="13"/>
+                                        </p:tgtEl>
+                                        <p:attrNameLst>
+                                          <p:attrName>ppt_x</p:attrName>
+                                        </p:attrNameLst>
+                                      </p:cBhvr>
+                                      <p:tavLst>
+                                        <p:tav tm="0">
+                                          <p:val>
+                                            <p:strVal val="#ppt_x"/>
+                                          </p:val>
+                                        </p:tav>
+                                        <p:tav tm="100000">
+                                          <p:val>
+                                            <p:strVal val="#ppt_x"/>
+                                          </p:val>
+                                        </p:tav>
+                                      </p:tavLst>
+                                    </p:anim>
+                                    <p:anim calcmode="lin" valueType="num">
+                                      <p:cBhvr>
+                                        <p:cTn id="61" dur="250" fill="hold"/>
+                                        <p:tgtEl>
+                                          <p:spTgt spid="13"/>
+                                        </p:tgtEl>
+                                        <p:attrNameLst>
+                                          <p:attrName>ppt_y</p:attrName>
+                                        </p:attrNameLst>
+                                      </p:cBhvr>
+                                      <p:tavLst>
+                                        <p:tav tm="0">
+                                          <p:val>
+                                            <p:strVal val="#ppt_y+.1"/>
+                                          </p:val>
+                                        </p:tav>
+                                        <p:tav tm="100000">
+                                          <p:val>
+                                            <p:strVal val="#ppt_y"/>
+                                          </p:val>
+                                        </p:tav>
+                                      </p:tavLst>
+                                    </p:anim>
+                                  </p:childTnLst>
+                                </p:cTn>
+                              </p:par>
+                            </p:childTnLst>
+                          </p:cTn>
+                        </p:par>
+                      </p:childTnLst>
+                    </p:cTn>
+                  </p:par>
+                </p:childTnLst>
+              </p:cTn>
+              <p:prevCondLst>
+                <p:cond evt="onPrev" delay="0">
+                  <p:tgtEl>
+                    <p:sldTgt/>
+                  </p:tgtEl>
+                </p:cond>
+              </p:prevCondLst>
+              <p:nextCondLst>
+                <p:cond evt="onNext" delay="0">
+                  <p:tgtEl>
+                    <p:sldTgt/>
+                  </p:tgtEl>
+                </p:cond>
+              </p:nextCondLst>
+            </p:seq>
+          </p:childTnLst>
+        </p:cTn>
+      </p:par>
+    </p:tnLst>
+    <p:bldLst>
+      <p:bldP spid="7" grpId="0" animBg="1"/>
+      <p:bldP spid="7" grpId="1" animBg="1"/>
+      <p:bldP spid="8" grpId="0" animBg="1"/>
+      <p:bldP spid="8" grpId="1" animBg="1"/>
+      <p:bldP spid="9" grpId="0" animBg="1"/>
+      <p:bldP spid="9" grpId="1" animBg="1"/>
+      <p:bldP spid="10" grpId="0" animBg="1"/>
+      <p:bldP spid="11" grpId="0" animBg="1"/>
+      <p:bldP spid="11" grpId="1" animBg="1"/>
+      <p:bldP spid="12" grpId="0" animBg="1"/>
+      <p:bldP spid="13" grpId="0" animBg="1"/>
+    </p:bldLst>
+  </p:timing>
 </p:sld>
 </file>
 
@@ -24376,7 +25421,7 @@
         </p:blipFill>
         <p:spPr>
           <a:xfrm>
-            <a:off x="839416" y="569829"/>
+            <a:off x="839416" y="497821"/>
             <a:ext cx="5328592" cy="2643147"/>
           </a:xfrm>
           <a:prstGeom prst="rect">
@@ -24413,7 +25458,7 @@
         </p:blipFill>
         <p:spPr>
           <a:xfrm>
-            <a:off x="47328" y="3655170"/>
+            <a:off x="51527" y="3619606"/>
             <a:ext cx="7848872" cy="2366118"/>
           </a:xfrm>
           <a:prstGeom prst="rect">
@@ -24449,7 +25494,7 @@
         </p:blipFill>
         <p:spPr>
           <a:xfrm>
-            <a:off x="7990097" y="358486"/>
+            <a:off x="7990097" y="116632"/>
             <a:ext cx="4197469" cy="5113802"/>
           </a:xfrm>
           <a:prstGeom prst="rect">
@@ -24543,6 +25588,114 @@
           </a:fontRef>
         </p:style>
       </p:cxnSp>
+      <p:sp>
+        <p:nvSpPr>
+          <p:cNvPr id="3" name="Tekstvak 2">
+            <a:extLst>
+              <a:ext uri="{FF2B5EF4-FFF2-40B4-BE49-F238E27FC236}">
+                <a16:creationId xmlns:a16="http://schemas.microsoft.com/office/drawing/2014/main" id="{4E75BF66-AA37-31D0-8FCD-EF9C954E5080}"/>
+              </a:ext>
+            </a:extLst>
+          </p:cNvPr>
+          <p:cNvSpPr txBox="1"/>
+          <p:nvPr/>
+        </p:nvSpPr>
+        <p:spPr>
+          <a:xfrm>
+            <a:off x="839417" y="3131964"/>
+            <a:ext cx="5256579" cy="338554"/>
+          </a:xfrm>
+          <a:prstGeom prst="rect">
+            <a:avLst/>
+          </a:prstGeom>
+          <a:noFill/>
+        </p:spPr>
+        <p:txBody>
+          <a:bodyPr wrap="square" rtlCol="0">
+            <a:spAutoFit/>
+          </a:bodyPr>
+          <a:lstStyle/>
+          <a:p>
+            <a:pPr algn="ctr"/>
+            <a:r>
+              <a:rPr lang="nl-BE" sz="1600" dirty="0"/>
+              <a:t>Fig. X: Horizontale tree structuur</a:t>
+            </a:r>
+          </a:p>
+        </p:txBody>
+      </p:sp>
+      <p:sp>
+        <p:nvSpPr>
+          <p:cNvPr id="9" name="Tekstvak 8">
+            <a:extLst>
+              <a:ext uri="{FF2B5EF4-FFF2-40B4-BE49-F238E27FC236}">
+                <a16:creationId xmlns:a16="http://schemas.microsoft.com/office/drawing/2014/main" id="{3777BB69-28B5-1855-3E09-7188D807F7D9}"/>
+              </a:ext>
+            </a:extLst>
+          </p:cNvPr>
+          <p:cNvSpPr txBox="1"/>
+          <p:nvPr/>
+        </p:nvSpPr>
+        <p:spPr>
+          <a:xfrm>
+            <a:off x="713373" y="5877272"/>
+            <a:ext cx="6541463" cy="338554"/>
+          </a:xfrm>
+          <a:prstGeom prst="rect">
+            <a:avLst/>
+          </a:prstGeom>
+          <a:noFill/>
+        </p:spPr>
+        <p:txBody>
+          <a:bodyPr wrap="square" rtlCol="0">
+            <a:spAutoFit/>
+          </a:bodyPr>
+          <a:lstStyle/>
+          <a:p>
+            <a:pPr algn="ctr"/>
+            <a:r>
+              <a:rPr lang="nl-BE" sz="1600" dirty="0"/>
+              <a:t>Fig. X: Verticale tree structuur</a:t>
+            </a:r>
+          </a:p>
+        </p:txBody>
+      </p:sp>
+      <p:sp>
+        <p:nvSpPr>
+          <p:cNvPr id="10" name="Tekstvak 9">
+            <a:extLst>
+              <a:ext uri="{FF2B5EF4-FFF2-40B4-BE49-F238E27FC236}">
+                <a16:creationId xmlns:a16="http://schemas.microsoft.com/office/drawing/2014/main" id="{74DC7D68-DB18-CA05-C8DC-C38C16CF8CFC}"/>
+              </a:ext>
+            </a:extLst>
+          </p:cNvPr>
+          <p:cNvSpPr txBox="1"/>
+          <p:nvPr/>
+        </p:nvSpPr>
+        <p:spPr>
+          <a:xfrm>
+            <a:off x="7990097" y="5282471"/>
+            <a:ext cx="4201904" cy="338554"/>
+          </a:xfrm>
+          <a:prstGeom prst="rect">
+            <a:avLst/>
+          </a:prstGeom>
+          <a:noFill/>
+        </p:spPr>
+        <p:txBody>
+          <a:bodyPr wrap="square" rtlCol="0">
+            <a:spAutoFit/>
+          </a:bodyPr>
+          <a:lstStyle/>
+          <a:p>
+            <a:pPr algn="ctr"/>
+            <a:r>
+              <a:rPr lang="nl-BE" sz="1600" dirty="0"/>
+              <a:t>Fig. X: Fileview-geïnspireerde tree structuur</a:t>
+            </a:r>
+          </a:p>
+        </p:txBody>
+      </p:sp>
     </p:spTree>
     <p:extLst>
       <p:ext uri="{BB962C8B-B14F-4D97-AF65-F5344CB8AC3E}">
@@ -24621,8 +25774,8 @@
         </p:nvGrpSpPr>
         <p:grpSpPr>
           <a:xfrm>
-            <a:off x="251301" y="1844824"/>
-            <a:ext cx="5052611" cy="3096344"/>
+            <a:off x="251301" y="1268760"/>
+            <a:ext cx="5522621" cy="3384376"/>
             <a:chOff x="0" y="0"/>
             <a:chExt cx="2971800" cy="1821180"/>
           </a:xfrm>
@@ -24998,6 +26151,98 @@
           </p:txBody>
         </p:sp>
       </p:grpSp>
+      <p:sp>
+        <p:nvSpPr>
+          <p:cNvPr id="4" name="Tekstvak 3">
+            <a:extLst>
+              <a:ext uri="{FF2B5EF4-FFF2-40B4-BE49-F238E27FC236}">
+                <a16:creationId xmlns:a16="http://schemas.microsoft.com/office/drawing/2014/main" id="{15DB67AD-DAA3-932B-55EF-CAF57662FA14}"/>
+              </a:ext>
+            </a:extLst>
+          </p:cNvPr>
+          <p:cNvSpPr txBox="1"/>
+          <p:nvPr/>
+        </p:nvSpPr>
+        <p:spPr>
+          <a:xfrm>
+            <a:off x="265462" y="4711077"/>
+            <a:ext cx="5508460" cy="1323439"/>
+          </a:xfrm>
+          <a:prstGeom prst="rect">
+            <a:avLst/>
+          </a:prstGeom>
+          <a:noFill/>
+        </p:spPr>
+        <p:txBody>
+          <a:bodyPr wrap="square" rtlCol="0">
+            <a:spAutoFit/>
+          </a:bodyPr>
+          <a:lstStyle/>
+          <a:p>
+            <a:pPr algn="ctr"/>
+            <a:r>
+              <a:rPr lang="nl-BE" sz="1600" dirty="0"/>
+              <a:t>Fig. X:  a) De iconknop opties bij een </a:t>
+            </a:r>
+            <a:r>
+              <a:rPr lang="nl-BE" sz="1600" dirty="0" err="1"/>
+              <a:t>fortunately</a:t>
+            </a:r>
+            <a:r>
+              <a:rPr lang="nl-BE" sz="1600" dirty="0"/>
+              <a:t>-node met </a:t>
+            </a:r>
+          </a:p>
+          <a:p>
+            <a:pPr algn="ctr"/>
+            <a:r>
+              <a:rPr lang="nl-BE" sz="1600" dirty="0"/>
+              <a:t>kinderen, b) De iconknop opties bij een </a:t>
+            </a:r>
+            <a:r>
+              <a:rPr lang="nl-BE" sz="1600" dirty="0" err="1"/>
+              <a:t>fortunately</a:t>
+            </a:r>
+            <a:r>
+              <a:rPr lang="nl-BE" sz="1600" dirty="0"/>
+              <a:t>-node </a:t>
+            </a:r>
+          </a:p>
+          <a:p>
+            <a:pPr algn="ctr"/>
+            <a:r>
+              <a:rPr lang="nl-BE" sz="1600" dirty="0"/>
+              <a:t>zonder kinderen, c) De iconknop opties bij een </a:t>
+            </a:r>
+          </a:p>
+          <a:p>
+            <a:pPr algn="ctr"/>
+            <a:r>
+              <a:rPr lang="nl-BE" sz="1600" dirty="0" err="1"/>
+              <a:t>unfortunately</a:t>
+            </a:r>
+            <a:r>
+              <a:rPr lang="nl-BE" sz="1600" dirty="0"/>
+              <a:t>-node zonder kinderen, d) De iconknop optie </a:t>
+            </a:r>
+          </a:p>
+          <a:p>
+            <a:pPr algn="ctr"/>
+            <a:r>
+              <a:rPr lang="nl-BE" sz="1600" dirty="0"/>
+              <a:t>bij een </a:t>
+            </a:r>
+            <a:r>
+              <a:rPr lang="nl-BE" sz="1600" dirty="0" err="1"/>
+              <a:t>unfortunately</a:t>
+            </a:r>
+            <a:r>
+              <a:rPr lang="nl-BE" sz="1600" dirty="0"/>
+              <a:t>-node met kinderen </a:t>
+            </a:r>
+          </a:p>
+        </p:txBody>
+      </p:sp>
     </p:spTree>
     <p:extLst>
       <p:ext uri="{BB962C8B-B14F-4D97-AF65-F5344CB8AC3E}">
@@ -25036,43 +26281,6 @@
       </p:grpSpPr>
       <p:sp>
         <p:nvSpPr>
-          <p:cNvPr id="4" name="Tijdelijke aanduiding voor inhoud 3">
-            <a:extLst>
-              <a:ext uri="{FF2B5EF4-FFF2-40B4-BE49-F238E27FC236}">
-                <a16:creationId xmlns:a16="http://schemas.microsoft.com/office/drawing/2014/main" id="{768E5780-3C91-C80F-9139-C501DED4B6D7}"/>
-              </a:ext>
-            </a:extLst>
-          </p:cNvPr>
-          <p:cNvSpPr>
-            <a:spLocks noGrp="1"/>
-          </p:cNvSpPr>
-          <p:nvPr>
-            <p:ph sz="half" idx="1"/>
-          </p:nvPr>
-        </p:nvSpPr>
-        <p:spPr>
-          <a:xfrm>
-            <a:off x="609600" y="980731"/>
-            <a:ext cx="5384800" cy="5145435"/>
-          </a:xfrm>
-        </p:spPr>
-        <p:txBody>
-          <a:bodyPr wrap="square" anchor="t">
-            <a:normAutofit/>
-          </a:bodyPr>
-          <a:lstStyle/>
-          <a:p>
-            <a:pPr lvl="1"/>
-            <a:endParaRPr lang="nl-BE" sz="2000" dirty="0"/>
-          </a:p>
-          <a:p>
-            <a:pPr lvl="1"/>
-            <a:endParaRPr lang="nl-BE" sz="2000" dirty="0"/>
-          </a:p>
-        </p:txBody>
-      </p:sp>
-      <p:sp>
-        <p:nvSpPr>
           <p:cNvPr id="6" name="Titel 5">
             <a:extLst>
               <a:ext uri="{FF2B5EF4-FFF2-40B4-BE49-F238E27FC236}">
@@ -25134,7 +26342,7 @@
         </p:blipFill>
         <p:spPr>
           <a:xfrm>
-            <a:off x="551384" y="1563560"/>
+            <a:off x="551384" y="1556792"/>
             <a:ext cx="1813927" cy="3672408"/>
           </a:xfrm>
           <a:prstGeom prst="rect">
@@ -25214,6 +26422,130 @@
           </a:prstGeom>
         </p:spPr>
       </p:pic>
+      <p:sp>
+        <p:nvSpPr>
+          <p:cNvPr id="8" name="Tekstvak 7">
+            <a:extLst>
+              <a:ext uri="{FF2B5EF4-FFF2-40B4-BE49-F238E27FC236}">
+                <a16:creationId xmlns:a16="http://schemas.microsoft.com/office/drawing/2014/main" id="{81F29C6D-549F-C6C6-8C90-D166F2EA437E}"/>
+              </a:ext>
+            </a:extLst>
+          </p:cNvPr>
+          <p:cNvSpPr txBox="1"/>
+          <p:nvPr/>
+        </p:nvSpPr>
+        <p:spPr>
+          <a:xfrm>
+            <a:off x="263352" y="5398858"/>
+            <a:ext cx="2016224" cy="584775"/>
+          </a:xfrm>
+          <a:prstGeom prst="rect">
+            <a:avLst/>
+          </a:prstGeom>
+          <a:noFill/>
+        </p:spPr>
+        <p:txBody>
+          <a:bodyPr wrap="square" rtlCol="0">
+            <a:spAutoFit/>
+          </a:bodyPr>
+          <a:lstStyle/>
+          <a:p>
+            <a:pPr algn="ctr"/>
+            <a:r>
+              <a:rPr lang="nl-BE" sz="1600" dirty="0"/>
+              <a:t>Fig. X: Ingeklapte filter zijpaneel</a:t>
+            </a:r>
+          </a:p>
+        </p:txBody>
+      </p:sp>
+      <p:sp>
+        <p:nvSpPr>
+          <p:cNvPr id="9" name="Tekstvak 8">
+            <a:extLst>
+              <a:ext uri="{FF2B5EF4-FFF2-40B4-BE49-F238E27FC236}">
+                <a16:creationId xmlns:a16="http://schemas.microsoft.com/office/drawing/2014/main" id="{1A95E274-1204-1CD6-5592-EB14EF9247BC}"/>
+              </a:ext>
+            </a:extLst>
+          </p:cNvPr>
+          <p:cNvSpPr txBox="1"/>
+          <p:nvPr/>
+        </p:nvSpPr>
+        <p:spPr>
+          <a:xfrm>
+            <a:off x="2606536" y="5373215"/>
+            <a:ext cx="4617248" cy="584775"/>
+          </a:xfrm>
+          <a:prstGeom prst="rect">
+            <a:avLst/>
+          </a:prstGeom>
+          <a:noFill/>
+        </p:spPr>
+        <p:txBody>
+          <a:bodyPr wrap="square" rtlCol="0">
+            <a:spAutoFit/>
+          </a:bodyPr>
+          <a:lstStyle/>
+          <a:p>
+            <a:pPr algn="ctr"/>
+            <a:r>
+              <a:rPr lang="nl-BE" sz="1600" dirty="0"/>
+              <a:t>Fig. X: Uitgeklapte filter zijpaneel met </a:t>
+            </a:r>
+            <a:r>
+              <a:rPr lang="nl-BE" sz="1600" dirty="0" err="1"/>
+              <a:t>Weakness</a:t>
+            </a:r>
+            <a:r>
+              <a:rPr lang="nl-BE" sz="1600" dirty="0"/>
+              <a:t> Under Review filter</a:t>
+            </a:r>
+          </a:p>
+        </p:txBody>
+      </p:sp>
+      <p:sp>
+        <p:nvSpPr>
+          <p:cNvPr id="11" name="Tekstvak 10">
+            <a:extLst>
+              <a:ext uri="{FF2B5EF4-FFF2-40B4-BE49-F238E27FC236}">
+                <a16:creationId xmlns:a16="http://schemas.microsoft.com/office/drawing/2014/main" id="{8EA84EA0-7938-57CB-C100-93C5B9008B7A}"/>
+              </a:ext>
+            </a:extLst>
+          </p:cNvPr>
+          <p:cNvSpPr txBox="1"/>
+          <p:nvPr/>
+        </p:nvSpPr>
+        <p:spPr>
+          <a:xfrm>
+            <a:off x="7603587" y="5309913"/>
+            <a:ext cx="4507157" cy="584775"/>
+          </a:xfrm>
+          <a:prstGeom prst="rect">
+            <a:avLst/>
+          </a:prstGeom>
+          <a:noFill/>
+        </p:spPr>
+        <p:txBody>
+          <a:bodyPr wrap="square" rtlCol="0">
+            <a:spAutoFit/>
+          </a:bodyPr>
+          <a:lstStyle/>
+          <a:p>
+            <a:pPr algn="ctr"/>
+            <a:r>
+              <a:rPr lang="nl-BE" sz="1600" dirty="0"/>
+              <a:t>Fig. X: Uitgeklapte filter zijpaneel met </a:t>
+            </a:r>
+            <a:r>
+              <a:rPr lang="nl-BE" sz="1600" dirty="0" err="1"/>
+              <a:t>Assumption</a:t>
+            </a:r>
+            <a:r>
+              <a:rPr lang="nl-BE" sz="1600" dirty="0"/>
+              <a:t> Under Review filter</a:t>
+            </a:r>
+          </a:p>
+        </p:txBody>
+      </p:sp>
     </p:spTree>
     <p:extLst>
       <p:ext uri="{BB962C8B-B14F-4D97-AF65-F5344CB8AC3E}">
@@ -25322,6 +26654,50 @@
             <a:r>
               <a:rPr lang="nl-BE" dirty="0"/>
               <a:t> rating</a:t>
+            </a:r>
+          </a:p>
+        </p:txBody>
+      </p:sp>
+      <p:sp>
+        <p:nvSpPr>
+          <p:cNvPr id="2" name="Tekstvak 1">
+            <a:extLst>
+              <a:ext uri="{FF2B5EF4-FFF2-40B4-BE49-F238E27FC236}">
+                <a16:creationId xmlns:a16="http://schemas.microsoft.com/office/drawing/2014/main" id="{942546A6-A49C-DC68-1701-CA632F88A7AD}"/>
+              </a:ext>
+            </a:extLst>
+          </p:cNvPr>
+          <p:cNvSpPr txBox="1"/>
+          <p:nvPr/>
+        </p:nvSpPr>
+        <p:spPr>
+          <a:xfrm>
+            <a:off x="4007768" y="5004465"/>
+            <a:ext cx="4176464" cy="584775"/>
+          </a:xfrm>
+          <a:prstGeom prst="rect">
+            <a:avLst/>
+          </a:prstGeom>
+          <a:noFill/>
+        </p:spPr>
+        <p:txBody>
+          <a:bodyPr wrap="square" rtlCol="0">
+            <a:spAutoFit/>
+          </a:bodyPr>
+          <a:lstStyle/>
+          <a:p>
+            <a:pPr algn="ctr"/>
+            <a:r>
+              <a:rPr lang="nl-BE" sz="1600" dirty="0"/>
+              <a:t>Fig. X: De geselecteerde </a:t>
+            </a:r>
+            <a:r>
+              <a:rPr lang="nl-BE" sz="1600" dirty="0" err="1"/>
+              <a:t>danger</a:t>
+            </a:r>
+            <a:r>
+              <a:rPr lang="nl-BE" sz="1600" dirty="0"/>
+              <a:t> rating-knop</a:t>
             </a:r>
           </a:p>
         </p:txBody>
@@ -25809,6 +27185,42 @@
           </a:p>
         </p:txBody>
       </p:sp>
+      <p:sp>
+        <p:nvSpPr>
+          <p:cNvPr id="3" name="Tekstvak 2">
+            <a:extLst>
+              <a:ext uri="{FF2B5EF4-FFF2-40B4-BE49-F238E27FC236}">
+                <a16:creationId xmlns:a16="http://schemas.microsoft.com/office/drawing/2014/main" id="{DAB0D461-11AD-DD3A-466C-BA460AAE0A37}"/>
+              </a:ext>
+            </a:extLst>
+          </p:cNvPr>
+          <p:cNvSpPr txBox="1"/>
+          <p:nvPr/>
+        </p:nvSpPr>
+        <p:spPr>
+          <a:xfrm>
+            <a:off x="609598" y="4797152"/>
+            <a:ext cx="5342386" cy="338554"/>
+          </a:xfrm>
+          <a:prstGeom prst="rect">
+            <a:avLst/>
+          </a:prstGeom>
+          <a:noFill/>
+        </p:spPr>
+        <p:txBody>
+          <a:bodyPr wrap="square" rtlCol="0">
+            <a:spAutoFit/>
+          </a:bodyPr>
+          <a:lstStyle/>
+          <a:p>
+            <a:pPr algn="ctr"/>
+            <a:r>
+              <a:rPr lang="nl-BE" sz="1600" dirty="0"/>
+              <a:t>Fig. X: De basisversie gebruikt in de gebruikersstudie</a:t>
+            </a:r>
+          </a:p>
+        </p:txBody>
+      </p:sp>
     </p:spTree>
     <p:extLst>
       <p:ext uri="{BB962C8B-B14F-4D97-AF65-F5344CB8AC3E}">
@@ -26025,6 +27437,42 @@
           </a:prstGeom>
         </p:spPr>
       </p:pic>
+      <p:sp>
+        <p:nvSpPr>
+          <p:cNvPr id="3" name="Tekstvak 2">
+            <a:extLst>
+              <a:ext uri="{FF2B5EF4-FFF2-40B4-BE49-F238E27FC236}">
+                <a16:creationId xmlns:a16="http://schemas.microsoft.com/office/drawing/2014/main" id="{94036B23-23F2-3F33-354A-91C3EE05E1FA}"/>
+              </a:ext>
+            </a:extLst>
+          </p:cNvPr>
+          <p:cNvSpPr txBox="1"/>
+          <p:nvPr/>
+        </p:nvSpPr>
+        <p:spPr>
+          <a:xfrm>
+            <a:off x="863819" y="5445224"/>
+            <a:ext cx="10547235" cy="338554"/>
+          </a:xfrm>
+          <a:prstGeom prst="rect">
+            <a:avLst/>
+          </a:prstGeom>
+          <a:noFill/>
+        </p:spPr>
+        <p:txBody>
+          <a:bodyPr wrap="square" rtlCol="0">
+            <a:spAutoFit/>
+          </a:bodyPr>
+          <a:lstStyle/>
+          <a:p>
+            <a:pPr algn="ctr"/>
+            <a:r>
+              <a:rPr lang="nl-BE" sz="1600" dirty="0"/>
+              <a:t>Fig. X: De UEQ-score met in het blauw de basisversie en in het rood de uitgebreide versie</a:t>
+            </a:r>
+          </a:p>
+        </p:txBody>
+      </p:sp>
     </p:spTree>
     <p:extLst>
       <p:ext uri="{BB962C8B-B14F-4D97-AF65-F5344CB8AC3E}">
@@ -26306,7 +27754,7 @@
             <p:ph idx="1"/>
             <p:extLst>
               <p:ext uri="{D42A27DB-BD31-4B8C-83A1-F6EECF244321}">
-                <p14:modId xmlns:p14="http://schemas.microsoft.com/office/powerpoint/2010/main" val="1157721647"/>
+                <p14:modId xmlns:p14="http://schemas.microsoft.com/office/powerpoint/2010/main" val="201139209"/>
               </p:ext>
             </p:extLst>
           </p:nvPr>
@@ -29631,7 +31079,7 @@
         </p:blipFill>
         <p:spPr>
           <a:xfrm>
-            <a:off x="6801971" y="620688"/>
+            <a:off x="6801971" y="548680"/>
             <a:ext cx="4176464" cy="2490163"/>
           </a:xfrm>
           <a:prstGeom prst="rect">
@@ -29667,7 +31115,7 @@
         </p:blipFill>
         <p:spPr>
           <a:xfrm>
-            <a:off x="6936295" y="3573016"/>
+            <a:off x="6936295" y="3429000"/>
             <a:ext cx="4032448" cy="2472815"/>
           </a:xfrm>
           <a:prstGeom prst="rect">
@@ -29697,7 +31145,7 @@
         </p:blipFill>
         <p:spPr>
           <a:xfrm>
-            <a:off x="263352" y="3244813"/>
+            <a:off x="263352" y="2924944"/>
             <a:ext cx="6264696" cy="2896126"/>
           </a:xfrm>
           <a:prstGeom prst="rect">
@@ -29705,6 +31153,124 @@
           </a:prstGeom>
         </p:spPr>
       </p:pic>
+      <p:sp>
+        <p:nvSpPr>
+          <p:cNvPr id="2" name="Tekstvak 1">
+            <a:extLst>
+              <a:ext uri="{FF2B5EF4-FFF2-40B4-BE49-F238E27FC236}">
+                <a16:creationId xmlns:a16="http://schemas.microsoft.com/office/drawing/2014/main" id="{AB2179B8-4A26-163B-637C-C96FEFF88C58}"/>
+              </a:ext>
+            </a:extLst>
+          </p:cNvPr>
+          <p:cNvSpPr txBox="1"/>
+          <p:nvPr/>
+        </p:nvSpPr>
+        <p:spPr>
+          <a:xfrm>
+            <a:off x="6801972" y="3068960"/>
+            <a:ext cx="4176464" cy="338554"/>
+          </a:xfrm>
+          <a:prstGeom prst="rect">
+            <a:avLst/>
+          </a:prstGeom>
+          <a:noFill/>
+        </p:spPr>
+        <p:txBody>
+          <a:bodyPr wrap="square" rtlCol="0">
+            <a:spAutoFit/>
+          </a:bodyPr>
+          <a:lstStyle/>
+          <a:p>
+            <a:pPr algn="ctr"/>
+            <a:r>
+              <a:rPr lang="nl-BE" sz="1600" dirty="0"/>
+              <a:t>Fig. X: Voorbeeld van een </a:t>
+            </a:r>
+            <a:r>
+              <a:rPr lang="nl-BE" sz="1600" dirty="0" err="1"/>
+              <a:t>treemap</a:t>
+            </a:r>
+            <a:endParaRPr lang="nl-BE" sz="1600" dirty="0"/>
+          </a:p>
+        </p:txBody>
+      </p:sp>
+      <p:sp>
+        <p:nvSpPr>
+          <p:cNvPr id="3" name="Tekstvak 2">
+            <a:extLst>
+              <a:ext uri="{FF2B5EF4-FFF2-40B4-BE49-F238E27FC236}">
+                <a16:creationId xmlns:a16="http://schemas.microsoft.com/office/drawing/2014/main" id="{445AA984-0625-97EC-EA11-7A7A3678D239}"/>
+              </a:ext>
+            </a:extLst>
+          </p:cNvPr>
+          <p:cNvSpPr txBox="1"/>
+          <p:nvPr/>
+        </p:nvSpPr>
+        <p:spPr>
+          <a:xfrm>
+            <a:off x="6744071" y="5877272"/>
+            <a:ext cx="4224671" cy="338554"/>
+          </a:xfrm>
+          <a:prstGeom prst="rect">
+            <a:avLst/>
+          </a:prstGeom>
+          <a:noFill/>
+        </p:spPr>
+        <p:txBody>
+          <a:bodyPr wrap="square" rtlCol="0">
+            <a:spAutoFit/>
+          </a:bodyPr>
+          <a:lstStyle/>
+          <a:p>
+            <a:pPr algn="ctr"/>
+            <a:r>
+              <a:rPr lang="nl-BE" sz="1600" dirty="0"/>
+              <a:t>Fig. X: Voorbeeld van een circulaire </a:t>
+            </a:r>
+            <a:r>
+              <a:rPr lang="nl-BE" sz="1600" dirty="0" err="1"/>
+              <a:t>treemap</a:t>
+            </a:r>
+            <a:endParaRPr lang="nl-BE" sz="1600" dirty="0"/>
+          </a:p>
+        </p:txBody>
+      </p:sp>
+      <p:sp>
+        <p:nvSpPr>
+          <p:cNvPr id="7" name="Tekstvak 6">
+            <a:extLst>
+              <a:ext uri="{FF2B5EF4-FFF2-40B4-BE49-F238E27FC236}">
+                <a16:creationId xmlns:a16="http://schemas.microsoft.com/office/drawing/2014/main" id="{CCF29BAF-ED7A-1AA6-F208-946CA8D054C7}"/>
+              </a:ext>
+            </a:extLst>
+          </p:cNvPr>
+          <p:cNvSpPr txBox="1"/>
+          <p:nvPr/>
+        </p:nvSpPr>
+        <p:spPr>
+          <a:xfrm>
+            <a:off x="1283364" y="5821070"/>
+            <a:ext cx="4224671" cy="338554"/>
+          </a:xfrm>
+          <a:prstGeom prst="rect">
+            <a:avLst/>
+          </a:prstGeom>
+          <a:noFill/>
+        </p:spPr>
+        <p:txBody>
+          <a:bodyPr wrap="square" rtlCol="0">
+            <a:spAutoFit/>
+          </a:bodyPr>
+          <a:lstStyle/>
+          <a:p>
+            <a:pPr algn="ctr"/>
+            <a:r>
+              <a:rPr lang="nl-BE" sz="1600" dirty="0"/>
+              <a:t>Fig. X: Voorbeeld van een hi-tree</a:t>
+            </a:r>
+          </a:p>
+        </p:txBody>
+      </p:sp>
     </p:spTree>
     <p:extLst>
       <p:ext uri="{BB962C8B-B14F-4D97-AF65-F5344CB8AC3E}">

--- a/MP2526_Verdediging.pptx
+++ b/MP2526_Verdediging.pptx
@@ -30006,8 +30006,8 @@
         </p:nvGrpSpPr>
         <p:grpSpPr>
           <a:xfrm>
-            <a:off x="251301" y="1268760"/>
-            <a:ext cx="5522621" cy="3384376"/>
+            <a:off x="251302" y="1268760"/>
+            <a:ext cx="5405118" cy="3312368"/>
             <a:chOff x="0" y="0"/>
             <a:chExt cx="2971800" cy="1821180"/>
           </a:xfrm>
@@ -30397,8 +30397,8 @@
         </p:nvSpPr>
         <p:spPr>
           <a:xfrm>
-            <a:off x="265462" y="4711077"/>
-            <a:ext cx="5508460" cy="1323439"/>
+            <a:off x="265462" y="4581128"/>
+            <a:ext cx="5390958" cy="1323439"/>
           </a:xfrm>
           <a:prstGeom prst="rect">
             <a:avLst/>
@@ -30422,14 +30422,7 @@
             </a:r>
             <a:r>
               <a:rPr lang="nl-BE" sz="1600" dirty="0"/>
-              <a:t>-node met </a:t>
-            </a:r>
-          </a:p>
-          <a:p>
-            <a:pPr algn="ctr"/>
-            <a:r>
-              <a:rPr lang="nl-BE" sz="1600" dirty="0"/>
-              <a:t>kinderen, b) De iconknop opties bij een </a:t>
+              <a:t>-node met kinderen, b) De iconknop opties bij een </a:t>
             </a:r>
             <a:r>
               <a:rPr lang="nl-BE" sz="1600" dirty="0" err="1"/>
@@ -30437,14 +30430,7 @@
             </a:r>
             <a:r>
               <a:rPr lang="nl-BE" sz="1600" dirty="0"/>
-              <a:t>-node </a:t>
-            </a:r>
-          </a:p>
-          <a:p>
-            <a:pPr algn="ctr"/>
-            <a:r>
-              <a:rPr lang="nl-BE" sz="1600" dirty="0"/>
-              <a:t>zonder kinderen, c) De iconknop opties bij een </a:t>
+              <a:t>-node zonder kinderen, c) De iconknop opties bij een </a:t>
             </a:r>
           </a:p>
           <a:p>
@@ -30505,6 +30491,36 @@
           </a:p>
         </p:txBody>
       </p:sp>
+      <p:pic>
+        <p:nvPicPr>
+          <p:cNvPr id="15" name="Afbeelding 14" descr="Afbeelding met tekst, schermopname, Lettertype, logo&#10;&#10;Door AI gegenereerde inhoud is mogelijk onjuist.">
+            <a:extLst>
+              <a:ext uri="{FF2B5EF4-FFF2-40B4-BE49-F238E27FC236}">
+                <a16:creationId xmlns:a16="http://schemas.microsoft.com/office/drawing/2014/main" id="{3BB980C4-4B3D-B4B7-512A-16FE041F03C4}"/>
+              </a:ext>
+            </a:extLst>
+          </p:cNvPr>
+          <p:cNvPicPr>
+            <a:picLocks noChangeAspect="1"/>
+          </p:cNvPicPr>
+          <p:nvPr/>
+        </p:nvPicPr>
+        <p:blipFill>
+          <a:blip r:embed="rId7"/>
+          <a:stretch>
+            <a:fillRect/>
+          </a:stretch>
+        </p:blipFill>
+        <p:spPr>
+          <a:xfrm>
+            <a:off x="6055263" y="1052736"/>
+            <a:ext cx="5824745" cy="3806554"/>
+          </a:xfrm>
+          <a:prstGeom prst="rect">
+            <a:avLst/>
+          </a:prstGeom>
+        </p:spPr>
+      </p:pic>
     </p:spTree>
     <p:extLst>
       <p:ext uri="{BB962C8B-B14F-4D97-AF65-F5344CB8AC3E}">
@@ -30902,7 +30918,7 @@
         </p:blipFill>
         <p:spPr>
           <a:xfrm>
-            <a:off x="4007768" y="1268760"/>
+            <a:off x="839416" y="1268760"/>
             <a:ext cx="4176464" cy="3672058"/>
           </a:xfrm>
           <a:prstGeom prst="rect">
@@ -30964,7 +30980,7 @@
         </p:nvSpPr>
         <p:spPr>
           <a:xfrm>
-            <a:off x="4007768" y="5004465"/>
+            <a:off x="839416" y="5004465"/>
             <a:ext cx="4176464" cy="584775"/>
           </a:xfrm>
           <a:prstGeom prst="rect">
@@ -31024,6 +31040,36 @@
           </a:p>
         </p:txBody>
       </p:sp>
+      <p:pic>
+        <p:nvPicPr>
+          <p:cNvPr id="5" name="Afbeelding 4" descr="Afbeelding met tekst, schermopname, Lettertype, nummer&#10;&#10;Door AI gegenereerde inhoud is mogelijk onjuist.">
+            <a:extLst>
+              <a:ext uri="{FF2B5EF4-FFF2-40B4-BE49-F238E27FC236}">
+                <a16:creationId xmlns:a16="http://schemas.microsoft.com/office/drawing/2014/main" id="{6BE418D6-C7FB-19D5-B14F-D6DFE8AC710F}"/>
+              </a:ext>
+            </a:extLst>
+          </p:cNvPr>
+          <p:cNvPicPr>
+            <a:picLocks noChangeAspect="1"/>
+          </p:cNvPicPr>
+          <p:nvPr/>
+        </p:nvPicPr>
+        <p:blipFill>
+          <a:blip r:embed="rId4"/>
+          <a:stretch>
+            <a:fillRect/>
+          </a:stretch>
+        </p:blipFill>
+        <p:spPr>
+          <a:xfrm>
+            <a:off x="7176122" y="908720"/>
+            <a:ext cx="3024336" cy="4646082"/>
+          </a:xfrm>
+          <a:prstGeom prst="rect">
+            <a:avLst/>
+          </a:prstGeom>
+        </p:spPr>
+      </p:pic>
     </p:spTree>
     <p:extLst>
       <p:ext uri="{BB962C8B-B14F-4D97-AF65-F5344CB8AC3E}">
@@ -31125,6 +31171,66 @@
           </a:p>
         </p:txBody>
       </p:sp>
+      <p:pic>
+        <p:nvPicPr>
+          <p:cNvPr id="4" name="Afbeelding 3" descr="Afbeelding met tekst, schermopname, Lettertype, ontwerp&#10;&#10;Door AI gegenereerde inhoud is mogelijk onjuist.">
+            <a:extLst>
+              <a:ext uri="{FF2B5EF4-FFF2-40B4-BE49-F238E27FC236}">
+                <a16:creationId xmlns:a16="http://schemas.microsoft.com/office/drawing/2014/main" id="{4091FB84-75C0-9235-693A-44E0A639535D}"/>
+              </a:ext>
+            </a:extLst>
+          </p:cNvPr>
+          <p:cNvPicPr>
+            <a:picLocks noChangeAspect="1"/>
+          </p:cNvPicPr>
+          <p:nvPr/>
+        </p:nvPicPr>
+        <p:blipFill>
+          <a:blip r:embed="rId3"/>
+          <a:stretch>
+            <a:fillRect/>
+          </a:stretch>
+        </p:blipFill>
+        <p:spPr>
+          <a:xfrm>
+            <a:off x="695400" y="836712"/>
+            <a:ext cx="5159896" cy="2454655"/>
+          </a:xfrm>
+          <a:prstGeom prst="rect">
+            <a:avLst/>
+          </a:prstGeom>
+        </p:spPr>
+      </p:pic>
+      <p:pic>
+        <p:nvPicPr>
+          <p:cNvPr id="7" name="Afbeelding 6" descr="Afbeelding met tekst, schermopname, diagram, nummer&#10;&#10;Door AI gegenereerde inhoud is mogelijk onjuist.">
+            <a:extLst>
+              <a:ext uri="{FF2B5EF4-FFF2-40B4-BE49-F238E27FC236}">
+                <a16:creationId xmlns:a16="http://schemas.microsoft.com/office/drawing/2014/main" id="{3C2248D2-2F46-6544-669F-A88342AF66B2}"/>
+              </a:ext>
+            </a:extLst>
+          </p:cNvPr>
+          <p:cNvPicPr>
+            <a:picLocks noChangeAspect="1"/>
+          </p:cNvPicPr>
+          <p:nvPr/>
+        </p:nvPicPr>
+        <p:blipFill>
+          <a:blip r:embed="rId4"/>
+          <a:stretch>
+            <a:fillRect/>
+          </a:stretch>
+        </p:blipFill>
+        <p:spPr>
+          <a:xfrm>
+            <a:off x="5854180" y="3129188"/>
+            <a:ext cx="6096000" cy="2892100"/>
+          </a:xfrm>
+          <a:prstGeom prst="rect">
+            <a:avLst/>
+          </a:prstGeom>
+        </p:spPr>
+      </p:pic>
     </p:spTree>
     <p:extLst>
       <p:ext uri="{BB962C8B-B14F-4D97-AF65-F5344CB8AC3E}">
@@ -35830,129 +35936,37 @@
           <a:chExt cx="0" cy="0"/>
         </a:xfrm>
       </p:grpSpPr>
-      <p:sp>
-        <p:nvSpPr>
-          <p:cNvPr id="4" name="Tijdelijke aanduiding voor inhoud 3">
+      <p:pic>
+        <p:nvPicPr>
+          <p:cNvPr id="7" name="Afbeelding 6" descr="Afbeelding met tekst, schermopname, Lettertype, ontwerp&#10;&#10;Door AI gegenereerde inhoud is mogelijk onjuist.">
             <a:extLst>
               <a:ext uri="{FF2B5EF4-FFF2-40B4-BE49-F238E27FC236}">
-                <a16:creationId xmlns:a16="http://schemas.microsoft.com/office/drawing/2014/main" id="{F4A2E2A1-BB2F-80CB-60DE-79EAEB5D4935}"/>
+                <a16:creationId xmlns:a16="http://schemas.microsoft.com/office/drawing/2014/main" id="{A59DD510-B622-EF72-3BA8-EC4195318325}"/>
               </a:ext>
             </a:extLst>
           </p:cNvPr>
-          <p:cNvSpPr>
-            <a:spLocks noGrp="1"/>
-          </p:cNvSpPr>
-          <p:nvPr>
-            <p:ph sz="half" idx="1"/>
-          </p:nvPr>
-        </p:nvSpPr>
+          <p:cNvPicPr>
+            <a:picLocks noChangeAspect="1"/>
+          </p:cNvPicPr>
+          <p:nvPr/>
+        </p:nvPicPr>
+        <p:blipFill>
+          <a:blip r:embed="rId3"/>
+          <a:stretch>
+            <a:fillRect/>
+          </a:stretch>
+        </p:blipFill>
         <p:spPr>
           <a:xfrm>
-            <a:off x="609600" y="980731"/>
-            <a:ext cx="10598968" cy="5145435"/>
+            <a:off x="2395686" y="908723"/>
+            <a:ext cx="7400628" cy="5217443"/>
           </a:xfrm>
+          <a:prstGeom prst="rect">
+            <a:avLst/>
+          </a:prstGeom>
+          <a:noFill/>
         </p:spPr>
-        <p:txBody>
-          <a:bodyPr/>
-          <a:lstStyle/>
-          <a:p>
-            <a:endParaRPr lang="nl-BE" sz="2800" dirty="0"/>
-          </a:p>
-          <a:p>
-            <a:r>
-              <a:rPr lang="nl-BE" sz="2800" dirty="0"/>
-              <a:t>Voorbeeld </a:t>
-            </a:r>
-            <a:r>
-              <a:rPr lang="nl-BE" sz="2800" dirty="0" err="1"/>
-              <a:t>branch</a:t>
-            </a:r>
-            <a:r>
-              <a:rPr lang="nl-BE" sz="2800" dirty="0"/>
-              <a:t>:</a:t>
-            </a:r>
-          </a:p>
-          <a:p>
-            <a:pPr lvl="1">
-              <a:buFont typeface="Wingdings" panose="05000000000000000000" pitchFamily="2" charset="2"/>
-              <a:buChar char="Ø"/>
-            </a:pPr>
-            <a:r>
-              <a:rPr lang="nl-BE" sz="2000" dirty="0" err="1"/>
-              <a:t>Fortunately</a:t>
-            </a:r>
-            <a:r>
-              <a:rPr lang="nl-BE" sz="2000" dirty="0"/>
-              <a:t>: "Uitrol wachtwoordmanager verbetert gebruiksgemak”</a:t>
-            </a:r>
-          </a:p>
-          <a:p>
-            <a:pPr lvl="2">
-              <a:buFont typeface="Wingdings" panose="05000000000000000000" pitchFamily="2" charset="2"/>
-              <a:buChar char="Ø"/>
-            </a:pPr>
-            <a:r>
-              <a:rPr lang="en-GB" sz="2000" dirty="0"/>
-              <a:t>Unfortunately: "</a:t>
-            </a:r>
-            <a:r>
-              <a:rPr lang="en-GB" sz="2000" dirty="0" err="1"/>
-              <a:t>Werknemers</a:t>
-            </a:r>
-            <a:r>
-              <a:rPr lang="en-GB" sz="2000" dirty="0"/>
-              <a:t> </a:t>
-            </a:r>
-            <a:r>
-              <a:rPr lang="en-GB" sz="2000" dirty="0" err="1"/>
-              <a:t>weigeren</a:t>
-            </a:r>
-            <a:r>
-              <a:rPr lang="en-GB" sz="2000" dirty="0"/>
-              <a:t> </a:t>
-            </a:r>
-            <a:r>
-              <a:rPr lang="en-GB" sz="2000" dirty="0" err="1"/>
-              <a:t>wachtwoordmanagers</a:t>
-            </a:r>
-            <a:r>
-              <a:rPr lang="en-GB" sz="2000" dirty="0"/>
-              <a:t>;</a:t>
-            </a:r>
-            <a:endParaRPr lang="nl-BE" sz="2000" dirty="0"/>
-          </a:p>
-          <a:p>
-            <a:pPr lvl="3">
-              <a:buFont typeface="Wingdings" panose="05000000000000000000" pitchFamily="2" charset="2"/>
-              <a:buChar char="Ø"/>
-            </a:pPr>
-            <a:r>
-              <a:rPr lang="en-GB" sz="2000" dirty="0"/>
-              <a:t>Fortunately: "Training </a:t>
-            </a:r>
-            <a:r>
-              <a:rPr lang="en-GB" sz="2000" dirty="0" err="1"/>
-              <a:t>verlaagt</a:t>
-            </a:r>
-            <a:r>
-              <a:rPr lang="en-GB" sz="2000" dirty="0"/>
-              <a:t> </a:t>
-            </a:r>
-            <a:r>
-              <a:rPr lang="en-GB" sz="2000" dirty="0" err="1"/>
-              <a:t>drempel</a:t>
-            </a:r>
-            <a:r>
-              <a:rPr lang="en-GB" sz="2000" dirty="0"/>
-              <a:t>".</a:t>
-            </a:r>
-            <a:endParaRPr lang="nl-BE" sz="2000" dirty="0"/>
-          </a:p>
-          <a:p>
-            <a:endParaRPr lang="nl-BE" sz="2800" dirty="0"/>
-          </a:p>
-        </p:txBody>
-      </p:sp>
+      </p:pic>
       <p:sp>
         <p:nvSpPr>
           <p:cNvPr id="6" name="Titel 5">
@@ -35971,12 +35985,14 @@
         </p:nvSpPr>
         <p:spPr>
           <a:xfrm>
-            <a:off x="624417" y="116632"/>
-            <a:ext cx="10972800" cy="433387"/>
+            <a:off x="143935" y="198981"/>
+            <a:ext cx="11987005" cy="549844"/>
           </a:xfrm>
         </p:spPr>
         <p:txBody>
-          <a:bodyPr/>
+          <a:bodyPr wrap="square" anchor="ctr">
+            <a:normAutofit fontScale="90000"/>
+          </a:bodyPr>
           <a:lstStyle/>
           <a:p>
             <a:r>
@@ -36003,17 +36019,33 @@
             <a:spLocks noGrp="1"/>
           </p:cNvSpPr>
           <p:nvPr>
-            <p:ph type="sldNum" sz="quarter" idx="13"/>
+            <p:ph type="sldNum" sz="quarter" idx="12"/>
           </p:nvPr>
         </p:nvSpPr>
-        <p:spPr/>
+        <p:spPr>
+          <a:xfrm>
+            <a:off x="-2400944" y="6381328"/>
+            <a:ext cx="2844800" cy="365125"/>
+          </a:xfrm>
+        </p:spPr>
         <p:txBody>
-          <a:bodyPr/>
+          <a:bodyPr wrap="square" anchor="ctr">
+            <a:normAutofit/>
+          </a:bodyPr>
           <a:lstStyle/>
           <a:p>
+            <a:pPr>
+              <a:spcAft>
+                <a:spcPts val="600"/>
+              </a:spcAft>
+            </a:pPr>
             <a:fld id="{2C8C6316-E44E-4DB2-87E9-228972E3BC6C}" type="slidenum">
               <a:rPr lang="nl-BE" altLang="en-US" smtClean="0"/>
-              <a:pPr/>
+              <a:pPr>
+                <a:spcAft>
+                  <a:spcPts val="600"/>
+                </a:spcAft>
+              </a:pPr>
               <a:t>7</a:t>
             </a:fld>
             <a:endParaRPr lang="nl-BE" altLang="en-US"/>

--- a/MP2526_Verdediging.pptx
+++ b/MP2526_Verdediging.pptx
@@ -7506,7 +7506,7 @@
           </a:r>
           <a:r>
             <a:rPr lang="nl-BE" dirty="0"/>
-            <a:t> (UEQ)</a:t>
+            <a:t> (UEQ) [14]</a:t>
           </a:r>
           <a:endParaRPr lang="en-US" dirty="0"/>
         </a:p>
@@ -11710,7 +11710,7 @@
           </a:r>
           <a:r>
             <a:rPr lang="nl-BE" sz="2200" kern="1200" dirty="0"/>
-            <a:t> (UEQ)</a:t>
+            <a:t> (UEQ) [14]</a:t>
           </a:r>
           <a:endParaRPr lang="en-US" sz="2200" kern="1200" dirty="0"/>
         </a:p>
@@ -27978,7 +27978,7 @@
             <a:pPr algn="ctr"/>
             <a:r>
               <a:rPr lang="nl-BE" sz="1600" dirty="0"/>
-              <a:t>Fig. X: </a:t>
+              <a:t>Fig. 5: </a:t>
             </a:r>
             <a:r>
               <a:rPr lang="nl-BE" sz="1600" dirty="0" err="1"/>
@@ -28022,7 +28022,7 @@
             <a:pPr algn="ctr"/>
             <a:r>
               <a:rPr lang="nl-BE" sz="1600" dirty="0"/>
-              <a:t>Fig. X: Next.js logo</a:t>
+              <a:t>Fig. 6: Next.js logo</a:t>
             </a:r>
           </a:p>
         </p:txBody>
@@ -28058,7 +28058,7 @@
             <a:pPr algn="ctr"/>
             <a:r>
               <a:rPr lang="nl-BE" sz="1600" dirty="0"/>
-              <a:t>Fig. X: D3-library logo</a:t>
+              <a:t>Fig. 7: D3-library logo</a:t>
             </a:r>
           </a:p>
         </p:txBody>
@@ -28536,7 +28536,7 @@
             <a:pPr algn="ctr"/>
             <a:r>
               <a:rPr lang="nl-BE" sz="1600" dirty="0"/>
-              <a:t>Fig. X: Visuele representatie van een </a:t>
+              <a:t>Fig. 8: Visuele representatie van een </a:t>
             </a:r>
             <a:r>
               <a:rPr lang="nl-BE" sz="1600" dirty="0" err="1"/>
@@ -28580,7 +28580,7 @@
             <a:pPr algn="ctr"/>
             <a:r>
               <a:rPr lang="nl-BE" sz="1600" dirty="0"/>
-              <a:t>Fig. X: Visuele representatie van een </a:t>
+              <a:t>Fig. 9: Visuele representatie van een </a:t>
             </a:r>
             <a:r>
               <a:rPr lang="nl-BE" sz="1600" dirty="0" err="1"/>
@@ -29821,7 +29821,7 @@
             <a:pPr algn="ctr"/>
             <a:r>
               <a:rPr lang="nl-BE" sz="1600" dirty="0"/>
-              <a:t>Fig. X: Horizontale tree structuur</a:t>
+              <a:t>Fig. 10: Horizontale tree structuur</a:t>
             </a:r>
           </a:p>
         </p:txBody>
@@ -29857,7 +29857,7 @@
             <a:pPr algn="ctr"/>
             <a:r>
               <a:rPr lang="nl-BE" sz="1600" dirty="0"/>
-              <a:t>Fig. X: Verticale tree structuur</a:t>
+              <a:t>Fig. 11: Verticale tree structuur</a:t>
             </a:r>
           </a:p>
         </p:txBody>
@@ -29877,7 +29877,7 @@
         <p:spPr>
           <a:xfrm>
             <a:off x="7990097" y="5282471"/>
-            <a:ext cx="4201904" cy="338554"/>
+            <a:ext cx="4201904" cy="584775"/>
           </a:xfrm>
           <a:prstGeom prst="rect">
             <a:avLst/>
@@ -29893,7 +29893,7 @@
             <a:pPr algn="ctr"/>
             <a:r>
               <a:rPr lang="nl-BE" sz="1600" dirty="0"/>
-              <a:t>Fig. X: Fileview-geïnspireerde tree structuur</a:t>
+              <a:t>Fig. 12: Fileview-geïnspireerde tree structuur</a:t>
             </a:r>
           </a:p>
         </p:txBody>
@@ -30414,7 +30414,7 @@
             <a:pPr algn="ctr"/>
             <a:r>
               <a:rPr lang="nl-BE" sz="1600" dirty="0"/>
-              <a:t>Fig. X:  a) De iconknop opties bij een </a:t>
+              <a:t>Fig. 13:  a) De iconknop opties bij een </a:t>
             </a:r>
             <a:r>
               <a:rPr lang="nl-BE" sz="1600" dirty="0" err="1"/>
@@ -30521,6 +30521,50 @@
           </a:prstGeom>
         </p:spPr>
       </p:pic>
+      <p:sp>
+        <p:nvSpPr>
+          <p:cNvPr id="14" name="Tekstvak 13">
+            <a:extLst>
+              <a:ext uri="{FF2B5EF4-FFF2-40B4-BE49-F238E27FC236}">
+                <a16:creationId xmlns:a16="http://schemas.microsoft.com/office/drawing/2014/main" id="{0499C6DD-7A2D-EE9C-7508-7FDE844962AE}"/>
+              </a:ext>
+            </a:extLst>
+          </p:cNvPr>
+          <p:cNvSpPr txBox="1"/>
+          <p:nvPr/>
+        </p:nvSpPr>
+        <p:spPr>
+          <a:xfrm>
+            <a:off x="6096000" y="4904293"/>
+            <a:ext cx="5784008" cy="584775"/>
+          </a:xfrm>
+          <a:prstGeom prst="rect">
+            <a:avLst/>
+          </a:prstGeom>
+          <a:noFill/>
+        </p:spPr>
+        <p:txBody>
+          <a:bodyPr wrap="square" rtlCol="0">
+            <a:spAutoFit/>
+          </a:bodyPr>
+          <a:lstStyle/>
+          <a:p>
+            <a:pPr algn="ctr"/>
+            <a:r>
+              <a:rPr lang="nl-BE" sz="1600" dirty="0"/>
+              <a:t>Fig. 14: Voorbeeld van een </a:t>
+            </a:r>
+            <a:r>
+              <a:rPr lang="nl-BE" sz="1600" dirty="0" err="1"/>
+              <a:t>fortunately-unfortunately</a:t>
+            </a:r>
+            <a:r>
+              <a:rPr lang="nl-BE" sz="1600" dirty="0"/>
+              <a:t> tree uit de software</a:t>
+            </a:r>
+          </a:p>
+        </p:txBody>
+      </p:sp>
     </p:spTree>
     <p:extLst>
       <p:ext uri="{BB962C8B-B14F-4D97-AF65-F5344CB8AC3E}">
@@ -30731,7 +30775,7 @@
             <a:pPr algn="ctr"/>
             <a:r>
               <a:rPr lang="nl-BE" sz="1600" dirty="0"/>
-              <a:t>Fig. X: Ingeklapte filter zijpaneel</a:t>
+              <a:t>Fig. 15: Ingeklapte filter zijpaneel</a:t>
             </a:r>
           </a:p>
         </p:txBody>
@@ -30767,7 +30811,7 @@
             <a:pPr algn="ctr"/>
             <a:r>
               <a:rPr lang="nl-BE" sz="1600" dirty="0"/>
-              <a:t>Fig. X: Uitgeklapte filter zijpaneel met </a:t>
+              <a:t>Fig. 16: Uitgeklapte filter zijpaneel met </a:t>
             </a:r>
             <a:r>
               <a:rPr lang="nl-BE" sz="1600" dirty="0" err="1"/>
@@ -30811,7 +30855,7 @@
             <a:pPr algn="ctr"/>
             <a:r>
               <a:rPr lang="nl-BE" sz="1600" dirty="0"/>
-              <a:t>Fig. X: Uitgeklapte filter zijpaneel met </a:t>
+              <a:t>Fig. 17: Uitgeklapte filter zijpaneel met </a:t>
             </a:r>
             <a:r>
               <a:rPr lang="nl-BE" sz="1600" dirty="0" err="1"/>
@@ -30997,7 +31041,7 @@
             <a:pPr algn="ctr"/>
             <a:r>
               <a:rPr lang="nl-BE" sz="1600" dirty="0"/>
-              <a:t>Fig. X: De geselecteerde </a:t>
+              <a:t>Fig. 18: De geselecteerde </a:t>
             </a:r>
             <a:r>
               <a:rPr lang="nl-BE" sz="1600" dirty="0" err="1"/>
@@ -31070,6 +31114,42 @@
           </a:prstGeom>
         </p:spPr>
       </p:pic>
+      <p:sp>
+        <p:nvSpPr>
+          <p:cNvPr id="4" name="Tekstvak 3">
+            <a:extLst>
+              <a:ext uri="{FF2B5EF4-FFF2-40B4-BE49-F238E27FC236}">
+                <a16:creationId xmlns:a16="http://schemas.microsoft.com/office/drawing/2014/main" id="{72EB9794-35FC-E4C6-A9C9-6BABEB9D810F}"/>
+              </a:ext>
+            </a:extLst>
+          </p:cNvPr>
+          <p:cNvSpPr txBox="1"/>
+          <p:nvPr/>
+        </p:nvSpPr>
+        <p:spPr>
+          <a:xfrm>
+            <a:off x="7176122" y="5569986"/>
+            <a:ext cx="3024336" cy="584775"/>
+          </a:xfrm>
+          <a:prstGeom prst="rect">
+            <a:avLst/>
+          </a:prstGeom>
+          <a:noFill/>
+        </p:spPr>
+        <p:txBody>
+          <a:bodyPr wrap="square" rtlCol="0">
+            <a:spAutoFit/>
+          </a:bodyPr>
+          <a:lstStyle/>
+          <a:p>
+            <a:pPr algn="ctr"/>
+            <a:r>
+              <a:rPr lang="nl-BE" sz="1600" dirty="0"/>
+              <a:t>Fig. 19: Uitgeklapte schaal na klik op een component</a:t>
+            </a:r>
+          </a:p>
+        </p:txBody>
+      </p:sp>
     </p:spTree>
     <p:extLst>
       <p:ext uri="{BB962C8B-B14F-4D97-AF65-F5344CB8AC3E}">
@@ -31193,8 +31273,8 @@
         </p:blipFill>
         <p:spPr>
           <a:xfrm>
-            <a:off x="695400" y="836712"/>
-            <a:ext cx="5159896" cy="2454655"/>
+            <a:off x="-1" y="548680"/>
+            <a:ext cx="6240017" cy="2968488"/>
           </a:xfrm>
           <a:prstGeom prst="rect">
             <a:avLst/>
@@ -31223,7 +31303,7 @@
         </p:blipFill>
         <p:spPr>
           <a:xfrm>
-            <a:off x="5854180" y="3129188"/>
+            <a:off x="6048687" y="2636912"/>
             <a:ext cx="6096000" cy="2892100"/>
           </a:xfrm>
           <a:prstGeom prst="rect">
@@ -31231,6 +31311,78 @@
           </a:prstGeom>
         </p:spPr>
       </p:pic>
+      <p:sp>
+        <p:nvSpPr>
+          <p:cNvPr id="3" name="Tekstvak 2">
+            <a:extLst>
+              <a:ext uri="{FF2B5EF4-FFF2-40B4-BE49-F238E27FC236}">
+                <a16:creationId xmlns:a16="http://schemas.microsoft.com/office/drawing/2014/main" id="{361E92E9-F919-EE63-ADAB-BDD7A9E608A8}"/>
+              </a:ext>
+            </a:extLst>
+          </p:cNvPr>
+          <p:cNvSpPr txBox="1"/>
+          <p:nvPr/>
+        </p:nvSpPr>
+        <p:spPr>
+          <a:xfrm>
+            <a:off x="143934" y="3347891"/>
+            <a:ext cx="5952065" cy="338554"/>
+          </a:xfrm>
+          <a:prstGeom prst="rect">
+            <a:avLst/>
+          </a:prstGeom>
+          <a:noFill/>
+        </p:spPr>
+        <p:txBody>
+          <a:bodyPr wrap="square" rtlCol="0">
+            <a:spAutoFit/>
+          </a:bodyPr>
+          <a:lstStyle/>
+          <a:p>
+            <a:pPr algn="ctr"/>
+            <a:r>
+              <a:rPr lang="nl-BE" sz="1600" dirty="0"/>
+              <a:t>Fig. 20: De volledige weergave van de tool</a:t>
+            </a:r>
+          </a:p>
+        </p:txBody>
+      </p:sp>
+      <p:sp>
+        <p:nvSpPr>
+          <p:cNvPr id="5" name="Tekstvak 4">
+            <a:extLst>
+              <a:ext uri="{FF2B5EF4-FFF2-40B4-BE49-F238E27FC236}">
+                <a16:creationId xmlns:a16="http://schemas.microsoft.com/office/drawing/2014/main" id="{1355E446-8259-3BBE-B17F-F77F7B8DD173}"/>
+              </a:ext>
+            </a:extLst>
+          </p:cNvPr>
+          <p:cNvSpPr txBox="1"/>
+          <p:nvPr/>
+        </p:nvSpPr>
+        <p:spPr>
+          <a:xfrm>
+            <a:off x="6048687" y="5529012"/>
+            <a:ext cx="6143313" cy="584775"/>
+          </a:xfrm>
+          <a:prstGeom prst="rect">
+            <a:avLst/>
+          </a:prstGeom>
+          <a:noFill/>
+        </p:spPr>
+        <p:txBody>
+          <a:bodyPr wrap="square" rtlCol="0">
+            <a:spAutoFit/>
+          </a:bodyPr>
+          <a:lstStyle/>
+          <a:p>
+            <a:pPr algn="ctr"/>
+            <a:r>
+              <a:rPr lang="nl-BE" sz="1600" dirty="0"/>
+              <a:t>Fig. 21: De volledige weergave van de tool met uitgeklapte zijpanelen</a:t>
+            </a:r>
+          </a:p>
+        </p:txBody>
+      </p:sp>
     </p:spTree>
     <p:extLst>
       <p:ext uri="{BB962C8B-B14F-4D97-AF65-F5344CB8AC3E}">
@@ -31418,7 +31570,7 @@
             <p:ph idx="1"/>
             <p:extLst>
               <p:ext uri="{D42A27DB-BD31-4B8C-83A1-F6EECF244321}">
-                <p14:modId xmlns:p14="http://schemas.microsoft.com/office/powerpoint/2010/main" val="1647820135"/>
+                <p14:modId xmlns:p14="http://schemas.microsoft.com/office/powerpoint/2010/main" val="2718585810"/>
               </p:ext>
             </p:extLst>
           </p:nvPr>
@@ -31766,7 +31918,7 @@
             <a:pPr algn="ctr"/>
             <a:r>
               <a:rPr lang="nl-BE" sz="1600" dirty="0"/>
-              <a:t>Fig. X: De basisversie gebruikt in de gebruikersstudie</a:t>
+              <a:t>Fig. 22: De basisversie gebruikt in de gebruikersstudie</a:t>
             </a:r>
           </a:p>
         </p:txBody>
@@ -31966,7 +32118,7 @@
           <a:p>
             <a:r>
               <a:rPr lang="nl-BE" sz="2400" dirty="0"/>
-              <a:t>UEQ (laagste -3, hoogste +3):</a:t>
+              <a:t>UEQ (laagste -3, hoogste +3) [14]:</a:t>
             </a:r>
           </a:p>
           <a:p>
@@ -32085,7 +32237,7 @@
             <a:pPr algn="ctr"/>
             <a:r>
               <a:rPr lang="nl-BE" sz="1600" dirty="0"/>
-              <a:t>Fig. X: De UEQ-score met in het blauw de basisversie en in het rood de uitgebreide versie</a:t>
+              <a:t>Fig. 23: De UEQ-score met in het blauw de basisversie en in het rood de uitgebreide versie</a:t>
             </a:r>
           </a:p>
         </p:txBody>
@@ -32252,7 +32404,7 @@
             <a:pPr algn="ctr"/>
             <a:r>
               <a:rPr lang="nl-BE" sz="1600" dirty="0"/>
-              <a:t>Fig. X: Rangschikking op basis van de gemiddelde rating van alle deelnemers</a:t>
+              <a:t>Fig. 24: Rangschikking op basis van de gemiddelde rating van alle deelnemers</a:t>
             </a:r>
           </a:p>
         </p:txBody>
@@ -33290,6 +33442,540 @@
               <a:t>30</a:t>
             </a:fld>
             <a:endParaRPr lang="nl-BE" altLang="en-US"/>
+          </a:p>
+        </p:txBody>
+      </p:sp>
+      <p:sp>
+        <p:nvSpPr>
+          <p:cNvPr id="4" name="Tekstvak 3">
+            <a:extLst>
+              <a:ext uri="{FF2B5EF4-FFF2-40B4-BE49-F238E27FC236}">
+                <a16:creationId xmlns:a16="http://schemas.microsoft.com/office/drawing/2014/main" id="{746C7026-2B77-4EA1-3534-924AA206243E}"/>
+              </a:ext>
+            </a:extLst>
+          </p:cNvPr>
+          <p:cNvSpPr txBox="1"/>
+          <p:nvPr/>
+        </p:nvSpPr>
+        <p:spPr>
+          <a:xfrm>
+            <a:off x="191344" y="615454"/>
+            <a:ext cx="11809312" cy="5693866"/>
+          </a:xfrm>
+          <a:prstGeom prst="rect">
+            <a:avLst/>
+          </a:prstGeom>
+          <a:noFill/>
+        </p:spPr>
+        <p:txBody>
+          <a:bodyPr wrap="square">
+            <a:spAutoFit/>
+          </a:bodyPr>
+          <a:lstStyle/>
+          <a:p>
+            <a:r>
+              <a:rPr lang="nl-BE" sz="1400" dirty="0"/>
+              <a:t>[1] S. </a:t>
+            </a:r>
+            <a:r>
+              <a:rPr lang="nl-BE" sz="1400" dirty="0" err="1"/>
+              <a:t>Verreydt</a:t>
+            </a:r>
+            <a:r>
+              <a:rPr lang="nl-BE" sz="1400" dirty="0"/>
+              <a:t>, „</a:t>
+            </a:r>
+            <a:r>
+              <a:rPr lang="nl-BE" sz="1400" dirty="0" err="1"/>
+              <a:t>Threat</a:t>
+            </a:r>
+            <a:r>
+              <a:rPr lang="nl-BE" sz="1400" dirty="0"/>
+              <a:t> </a:t>
+            </a:r>
+            <a:r>
+              <a:rPr lang="nl-BE" sz="1400" dirty="0" err="1"/>
+              <a:t>modeling</a:t>
+            </a:r>
+            <a:r>
+              <a:rPr lang="nl-BE" sz="1400" dirty="0"/>
+              <a:t> in Nederlandse organisaties,” 3 Oktober 2024. [Online]. </a:t>
+            </a:r>
+            <a:r>
+              <a:rPr lang="nl-BE" sz="1400" dirty="0" err="1"/>
+              <a:t>Available</a:t>
+            </a:r>
+            <a:r>
+              <a:rPr lang="nl-BE" sz="1400" dirty="0"/>
+              <a:t>: https://cybersecurity-bites.be/cybersecuritybydesign/threat-modeling-in </a:t>
+            </a:r>
+            <a:r>
+              <a:rPr lang="nl-BE" sz="1400" dirty="0" err="1"/>
+              <a:t>nederlandse</a:t>
+            </a:r>
+            <a:r>
+              <a:rPr lang="nl-BE" sz="1400" dirty="0"/>
+              <a:t>-organisaties/. [Geopend 13 Oktober 2025] </a:t>
+            </a:r>
+          </a:p>
+          <a:p>
+            <a:r>
+              <a:rPr lang="en-US" sz="1400" dirty="0"/>
+              <a:t>[2] I. Devendra, C. </a:t>
+            </a:r>
+            <a:r>
+              <a:rPr lang="en-US" sz="1400" dirty="0" err="1"/>
+              <a:t>Wijesiriwardana</a:t>
+            </a:r>
+            <a:r>
+              <a:rPr lang="en-US" sz="1400" dirty="0"/>
+              <a:t>, and P. </a:t>
+            </a:r>
+            <a:r>
+              <a:rPr lang="en-US" sz="1400" dirty="0" err="1"/>
+              <a:t>Wimalaratne</a:t>
+            </a:r>
+            <a:r>
+              <a:rPr lang="en-US" sz="1400" dirty="0"/>
+              <a:t>, “State-of-the-Art in Software Security Visualization: A Systematic Review,” </a:t>
+            </a:r>
+            <a:r>
+              <a:rPr lang="en-US" sz="1400" dirty="0" err="1"/>
+              <a:t>arXiv</a:t>
+            </a:r>
+            <a:r>
+              <a:rPr lang="en-US" sz="1400" dirty="0"/>
+              <a:t> (Cornell University), Sep. 2025, </a:t>
+            </a:r>
+            <a:r>
+              <a:rPr lang="en-US" sz="1400" dirty="0" err="1"/>
+              <a:t>doi</a:t>
+            </a:r>
+            <a:r>
+              <a:rPr lang="en-US" sz="1400" dirty="0"/>
+              <a:t>: https://doi.org/10.48550/arxiv.2509.20385.</a:t>
+            </a:r>
+          </a:p>
+          <a:p>
+            <a:r>
+              <a:rPr lang="en-US" sz="1400" dirty="0"/>
+              <a:t>[3] A. </a:t>
+            </a:r>
+            <a:r>
+              <a:rPr lang="en-US" sz="1400" dirty="0" err="1"/>
+              <a:t>Shostack</a:t>
+            </a:r>
+            <a:r>
+              <a:rPr lang="en-US" sz="1400" dirty="0"/>
+              <a:t>, “Fast, Cheap and Good An Unusual Trade-off Available in Threat Modeling,” 2021. Accessed: Jan. 11, 2026. [Online]. Available: https://shostack.org/files/papers/Fast-Cheap-and-Good.pdf </a:t>
+            </a:r>
+          </a:p>
+          <a:p>
+            <a:r>
+              <a:rPr lang="nl-BE" sz="1400" dirty="0"/>
+              <a:t>[4] N. </a:t>
+            </a:r>
+            <a:r>
+              <a:rPr lang="nl-BE" sz="1400" dirty="0" err="1"/>
+              <a:t>Shevchenko</a:t>
+            </a:r>
+            <a:r>
+              <a:rPr lang="nl-BE" sz="1400" dirty="0"/>
+              <a:t>, T. A. Chick, P. </a:t>
+            </a:r>
+            <a:r>
+              <a:rPr lang="nl-BE" sz="1400" dirty="0" err="1"/>
+              <a:t>O’riordan</a:t>
+            </a:r>
+            <a:r>
+              <a:rPr lang="nl-BE" sz="1400" dirty="0"/>
+              <a:t>, T. P. </a:t>
+            </a:r>
+            <a:r>
+              <a:rPr lang="nl-BE" sz="1400" dirty="0" err="1"/>
+              <a:t>Scanlon</a:t>
+            </a:r>
+            <a:r>
+              <a:rPr lang="nl-BE" sz="1400" dirty="0"/>
+              <a:t>, </a:t>
+            </a:r>
+            <a:r>
+              <a:rPr lang="nl-BE" sz="1400" dirty="0" err="1"/>
+              <a:t>and</a:t>
+            </a:r>
+            <a:r>
+              <a:rPr lang="nl-BE" sz="1400" dirty="0"/>
+              <a:t> C. </a:t>
+            </a:r>
+            <a:r>
+              <a:rPr lang="nl-BE" sz="1400" dirty="0" err="1"/>
+              <a:t>Woody</a:t>
+            </a:r>
+            <a:r>
+              <a:rPr lang="nl-BE" sz="1400" dirty="0"/>
+              <a:t>, “</a:t>
+            </a:r>
+            <a:r>
+              <a:rPr lang="nl-BE" sz="1400" dirty="0" err="1"/>
+              <a:t>Threat</a:t>
+            </a:r>
+            <a:r>
+              <a:rPr lang="nl-BE" sz="1400" dirty="0"/>
+              <a:t> </a:t>
+            </a:r>
+            <a:r>
+              <a:rPr lang="nl-BE" sz="1400" dirty="0" err="1"/>
+              <a:t>Modeling</a:t>
+            </a:r>
+            <a:r>
+              <a:rPr lang="nl-BE" sz="1400" dirty="0"/>
+              <a:t>: A Summary of </a:t>
+            </a:r>
+            <a:r>
+              <a:rPr lang="nl-BE" sz="1400" dirty="0" err="1"/>
+              <a:t>Available</a:t>
+            </a:r>
+            <a:r>
+              <a:rPr lang="nl-BE" sz="1400" dirty="0"/>
+              <a:t> </a:t>
+            </a:r>
+            <a:r>
+              <a:rPr lang="nl-BE" sz="1400" dirty="0" err="1"/>
+              <a:t>Methods</a:t>
+            </a:r>
+            <a:r>
+              <a:rPr lang="nl-BE" sz="1400" dirty="0"/>
+              <a:t>,” Dtic.mil, Jul. 2018. https://apps.dtic.mil/sti/html/tr/AD1084024/</a:t>
+            </a:r>
+          </a:p>
+          <a:p>
+            <a:r>
+              <a:rPr lang="nl-BE" sz="1400" dirty="0"/>
+              <a:t>[5] Z. </a:t>
+            </a:r>
+            <a:r>
+              <a:rPr lang="nl-BE" sz="1400" dirty="0" err="1"/>
+              <a:t>Shi</a:t>
+            </a:r>
+            <a:r>
+              <a:rPr lang="nl-BE" sz="1400" dirty="0"/>
+              <a:t>, K. </a:t>
+            </a:r>
+            <a:r>
+              <a:rPr lang="nl-BE" sz="1400" dirty="0" err="1"/>
+              <a:t>Graffi</a:t>
+            </a:r>
+            <a:r>
+              <a:rPr lang="nl-BE" sz="1400" dirty="0"/>
+              <a:t>, D. </a:t>
+            </a:r>
+            <a:r>
+              <a:rPr lang="nl-BE" sz="1400" dirty="0" err="1"/>
+              <a:t>Starobinski</a:t>
+            </a:r>
+            <a:r>
+              <a:rPr lang="nl-BE" sz="1400" dirty="0"/>
+              <a:t>, </a:t>
+            </a:r>
+            <a:r>
+              <a:rPr lang="nl-BE" sz="1400" dirty="0" err="1"/>
+              <a:t>and</a:t>
+            </a:r>
+            <a:r>
+              <a:rPr lang="nl-BE" sz="1400" dirty="0"/>
+              <a:t> N. </a:t>
+            </a:r>
+            <a:r>
+              <a:rPr lang="nl-BE" sz="1400" dirty="0" err="1"/>
+              <a:t>Matyunin</a:t>
+            </a:r>
+            <a:r>
+              <a:rPr lang="nl-BE" sz="1400" dirty="0"/>
+              <a:t>, “</a:t>
+            </a:r>
+            <a:r>
+              <a:rPr lang="nl-BE" sz="1400" dirty="0" err="1"/>
+              <a:t>Threat</a:t>
+            </a:r>
+            <a:r>
+              <a:rPr lang="nl-BE" sz="1400" dirty="0"/>
+              <a:t> </a:t>
+            </a:r>
+            <a:r>
+              <a:rPr lang="nl-BE" sz="1400" dirty="0" err="1"/>
+              <a:t>Modeling</a:t>
+            </a:r>
+            <a:r>
+              <a:rPr lang="nl-BE" sz="1400" dirty="0"/>
+              <a:t> Tools: A </a:t>
+            </a:r>
+            <a:r>
+              <a:rPr lang="nl-BE" sz="1400" dirty="0" err="1"/>
+              <a:t>Taxonomy</a:t>
+            </a:r>
+            <a:r>
+              <a:rPr lang="nl-BE" sz="1400" dirty="0"/>
+              <a:t>,” IEEE Security &amp; Privacy, vol. 20, no. 4, pp. 2–13, 2021, </a:t>
+            </a:r>
+            <a:r>
+              <a:rPr lang="nl-BE" sz="1400" dirty="0" err="1"/>
+              <a:t>doi</a:t>
+            </a:r>
+            <a:r>
+              <a:rPr lang="nl-BE" sz="1400" dirty="0"/>
+              <a:t>: https://doi.org/10.1109/msec.2021.3125229. </a:t>
+            </a:r>
+          </a:p>
+          <a:p>
+            <a:r>
+              <a:rPr lang="en-US" sz="1400" dirty="0"/>
+              <a:t>[6] Hendrik </a:t>
+            </a:r>
+            <a:r>
+              <a:rPr lang="en-US" sz="1400" dirty="0" err="1"/>
+              <a:t>Ewerlin</a:t>
+            </a:r>
+            <a:r>
+              <a:rPr lang="en-US" sz="1400" dirty="0"/>
+              <a:t>, “ Fortunately ⇆ Unfortunately of Fortunately ⇆ Unfortunately,” Threat-modeling.net, 2026. https://threat-modeling.net/fortunately unfortunately-of-fortunately-unfortunately/ </a:t>
+            </a:r>
+          </a:p>
+          <a:p>
+            <a:r>
+              <a:rPr lang="en-US" sz="1400" dirty="0"/>
+              <a:t>[7] W. Scheibel, D. Limberger, and J. </a:t>
+            </a:r>
+            <a:r>
+              <a:rPr lang="en-US" sz="1400" dirty="0" err="1"/>
+              <a:t>Döllner</a:t>
+            </a:r>
+            <a:r>
+              <a:rPr lang="en-US" sz="1400" dirty="0"/>
+              <a:t>, “Survey of </a:t>
+            </a:r>
+            <a:r>
+              <a:rPr lang="en-US" sz="1400" dirty="0" err="1"/>
+              <a:t>treemap</a:t>
+            </a:r>
+            <a:r>
+              <a:rPr lang="en-US" sz="1400" dirty="0"/>
+              <a:t> layout algorithms,” in the 13th International Symposium on Visual Information Communication and Interaction, New York: Association for Computing Machinery, Aug. 2020. Accessed: Dec. 08, 2026. [Online]. Available: https://dl.acm.org/doi/10.1145/3430036.3430041</a:t>
+            </a:r>
+          </a:p>
+          <a:p>
+            <a:r>
+              <a:rPr lang="nl-BE" sz="1400" dirty="0"/>
+              <a:t>[8] P. </a:t>
+            </a:r>
+            <a:r>
+              <a:rPr lang="nl-BE" sz="1400" dirty="0" err="1"/>
+              <a:t>Sbarski</a:t>
+            </a:r>
+            <a:r>
+              <a:rPr lang="nl-BE" sz="1400" dirty="0"/>
+              <a:t>, T. van Gelder, K. Marriott, D. </a:t>
+            </a:r>
+            <a:r>
+              <a:rPr lang="nl-BE" sz="1400" dirty="0" err="1"/>
+              <a:t>Prager</a:t>
+            </a:r>
+            <a:r>
+              <a:rPr lang="nl-BE" sz="1400" dirty="0"/>
+              <a:t>, </a:t>
+            </a:r>
+            <a:r>
+              <a:rPr lang="nl-BE" sz="1400" dirty="0" err="1"/>
+              <a:t>and</a:t>
+            </a:r>
+            <a:r>
+              <a:rPr lang="nl-BE" sz="1400" dirty="0"/>
+              <a:t> A. </a:t>
+            </a:r>
+            <a:r>
+              <a:rPr lang="nl-BE" sz="1400" dirty="0" err="1"/>
+              <a:t>Bulka</a:t>
+            </a:r>
+            <a:r>
+              <a:rPr lang="nl-BE" sz="1400" dirty="0"/>
+              <a:t>, “</a:t>
+            </a:r>
+            <a:r>
+              <a:rPr lang="nl-BE" sz="1400" dirty="0" err="1"/>
+              <a:t>Visualizing</a:t>
+            </a:r>
+            <a:r>
+              <a:rPr lang="nl-BE" sz="1400" dirty="0"/>
+              <a:t> Argument </a:t>
+            </a:r>
+            <a:r>
+              <a:rPr lang="nl-BE" sz="1400" dirty="0" err="1"/>
+              <a:t>Structure</a:t>
+            </a:r>
+            <a:r>
+              <a:rPr lang="nl-BE" sz="1400" dirty="0"/>
+              <a:t>,” </a:t>
+            </a:r>
+            <a:r>
+              <a:rPr lang="nl-BE" sz="1400" dirty="0" err="1"/>
+              <a:t>Lecture</a:t>
+            </a:r>
+            <a:r>
+              <a:rPr lang="nl-BE" sz="1400" dirty="0"/>
+              <a:t> </a:t>
+            </a:r>
+            <a:r>
+              <a:rPr lang="nl-BE" sz="1400" dirty="0" err="1"/>
+              <a:t>Notes</a:t>
+            </a:r>
+            <a:r>
+              <a:rPr lang="nl-BE" sz="1400" dirty="0"/>
+              <a:t> in Computer </a:t>
+            </a:r>
+            <a:r>
+              <a:rPr lang="nl-BE" sz="1400" dirty="0" err="1"/>
+              <a:t>Science</a:t>
+            </a:r>
+            <a:r>
+              <a:rPr lang="nl-BE" sz="1400" dirty="0"/>
+              <a:t>, vol. 5358, pp. 129–138, 2008, </a:t>
+            </a:r>
+            <a:r>
+              <a:rPr lang="nl-BE" sz="1400" dirty="0" err="1"/>
+              <a:t>doi</a:t>
+            </a:r>
+            <a:r>
+              <a:rPr lang="nl-BE" sz="1400" dirty="0"/>
+              <a:t>: https://doi.org/10.1007/978-3-540-89639-5_13. </a:t>
+            </a:r>
+          </a:p>
+          <a:p>
+            <a:r>
+              <a:rPr lang="en-US" sz="1400" dirty="0"/>
+              <a:t>[9] “</a:t>
+            </a:r>
+            <a:r>
+              <a:rPr lang="en-US" sz="1400" dirty="0" err="1"/>
+              <a:t>Treemap</a:t>
+            </a:r>
+            <a:r>
+              <a:rPr lang="en-US" sz="1400" dirty="0"/>
+              <a:t> Charts - What Are They, How To Create Them,” Inetsoft.com, 2026. https://www.inetsoft.com/info/treemap-charts-definition-how-to-create/ (accessed Jan. 16, 2026). </a:t>
+            </a:r>
+          </a:p>
+          <a:p>
+            <a:r>
+              <a:rPr lang="nl-BE" sz="1400" dirty="0"/>
+              <a:t>[10] </a:t>
+            </a:r>
+            <a:r>
+              <a:rPr lang="nl-BE" sz="1400" dirty="0" err="1"/>
+              <a:t>BellaDati</a:t>
+            </a:r>
+            <a:r>
+              <a:rPr lang="nl-BE" sz="1400" dirty="0"/>
+              <a:t>, “</a:t>
+            </a:r>
+            <a:r>
+              <a:rPr lang="nl-BE" sz="1400" dirty="0" err="1"/>
+              <a:t>Circular</a:t>
+            </a:r>
+            <a:r>
+              <a:rPr lang="nl-BE" sz="1400" dirty="0"/>
+              <a:t> </a:t>
+            </a:r>
+            <a:r>
+              <a:rPr lang="nl-BE" sz="1400" dirty="0" err="1"/>
+              <a:t>Treemap</a:t>
+            </a:r>
+            <a:r>
+              <a:rPr lang="nl-BE" sz="1400" dirty="0"/>
+              <a:t> | </a:t>
+            </a:r>
+            <a:r>
+              <a:rPr lang="nl-BE" sz="1400" dirty="0" err="1"/>
+              <a:t>BellaDati</a:t>
+            </a:r>
+            <a:r>
+              <a:rPr lang="nl-BE" sz="1400" dirty="0"/>
+              <a:t> Marketplace,” </a:t>
+            </a:r>
+            <a:r>
+              <a:rPr lang="nl-BE" sz="1400" dirty="0" err="1"/>
+              <a:t>BellaDati</a:t>
+            </a:r>
+            <a:r>
+              <a:rPr lang="nl-BE" sz="1400" dirty="0"/>
+              <a:t> Marketplace, 2016. https://www.belladati.com/marketplace/package/extension/custom-view/circular </a:t>
+            </a:r>
+            <a:r>
+              <a:rPr lang="nl-BE" sz="1400" dirty="0" err="1"/>
+              <a:t>treemap</a:t>
+            </a:r>
+            <a:r>
+              <a:rPr lang="nl-BE" sz="1400" dirty="0"/>
+              <a:t>/ (</a:t>
+            </a:r>
+            <a:r>
+              <a:rPr lang="nl-BE" sz="1400" dirty="0" err="1"/>
+              <a:t>accessed</a:t>
+            </a:r>
+            <a:r>
+              <a:rPr lang="nl-BE" sz="1400" dirty="0"/>
+              <a:t> Jan. 16, 2026). </a:t>
+            </a:r>
+          </a:p>
+          <a:p>
+            <a:r>
+              <a:rPr lang="nl-BE" sz="1400" dirty="0"/>
+              <a:t>[11] </a:t>
+            </a:r>
+            <a:r>
+              <a:rPr lang="en-US" sz="1400" dirty="0"/>
+              <a:t>[17]Meta, “React,” </a:t>
+            </a:r>
+            <a:r>
+              <a:rPr lang="en-US" sz="1400" dirty="0" err="1"/>
+              <a:t>react.dev</a:t>
+            </a:r>
+            <a:r>
+              <a:rPr lang="en-US" sz="1400" dirty="0"/>
+              <a:t>. https://react.dev (accessed Jan. 25, 2026).</a:t>
+            </a:r>
+          </a:p>
+          <a:p>
+            <a:r>
+              <a:rPr lang="en-US" sz="1400" dirty="0"/>
+              <a:t>[12] T. Spiro, “Next.js 15 vs 16: Building Modern Blogs in the </a:t>
+            </a:r>
+            <a:r>
+              <a:rPr lang="en-US" sz="1400" dirty="0" err="1"/>
+              <a:t>Turbopack</a:t>
+            </a:r>
+            <a:r>
+              <a:rPr lang="en-US" sz="1400" dirty="0"/>
+              <a:t> Era,” Cosmic, Oct. 24, 2025. https://www.cosmicjs.com/blog/nextjs-15-vs-16-building-modern-blogs-in-the-turbopack-era (accessed Jan. 29, 2026).</a:t>
+            </a:r>
+          </a:p>
+          <a:p>
+            <a:r>
+              <a:rPr lang="en-US" sz="1400" dirty="0"/>
+              <a:t>[13] M. Bostock, “D3.js - Data-Driven Documents,” d3js.org. https://d3js.org (accessed Jan. 25, 2026).</a:t>
+            </a:r>
+          </a:p>
+          <a:p>
+            <a:r>
+              <a:rPr lang="fr-FR" sz="1400" dirty="0"/>
+              <a:t>[14] UEQ, “User </a:t>
+            </a:r>
+            <a:r>
+              <a:rPr lang="fr-FR" sz="1400" dirty="0" err="1"/>
+              <a:t>experience</a:t>
+            </a:r>
+            <a:r>
+              <a:rPr lang="fr-FR" sz="1400" dirty="0"/>
+              <a:t> questionnaire (UEQ),” Ueq-online.org, 2018. https://www.ueq-online.org/</a:t>
+            </a:r>
+            <a:endParaRPr lang="nl-BE" sz="1400" dirty="0"/>
           </a:p>
         </p:txBody>
       </p:sp>
@@ -35958,8 +36644,8 @@
         </p:blipFill>
         <p:spPr>
           <a:xfrm>
-            <a:off x="2395686" y="908723"/>
-            <a:ext cx="7400628" cy="5217443"/>
+            <a:off x="2265623" y="548680"/>
+            <a:ext cx="7660754" cy="5400832"/>
           </a:xfrm>
           <a:prstGeom prst="rect">
             <a:avLst/>
@@ -35985,13 +36671,13 @@
         </p:nvSpPr>
         <p:spPr>
           <a:xfrm>
-            <a:off x="143935" y="198981"/>
+            <a:off x="143935" y="116632"/>
             <a:ext cx="11987005" cy="549844"/>
           </a:xfrm>
         </p:spPr>
         <p:txBody>
           <a:bodyPr wrap="square" anchor="ctr">
-            <a:normAutofit fontScale="90000"/>
+            <a:noAutofit/>
           </a:bodyPr>
           <a:lstStyle/>
           <a:p>
@@ -36049,6 +36735,50 @@
               <a:t>7</a:t>
             </a:fld>
             <a:endParaRPr lang="nl-BE" altLang="en-US"/>
+          </a:p>
+        </p:txBody>
+      </p:sp>
+      <p:sp>
+        <p:nvSpPr>
+          <p:cNvPr id="3" name="Tekstvak 2">
+            <a:extLst>
+              <a:ext uri="{FF2B5EF4-FFF2-40B4-BE49-F238E27FC236}">
+                <a16:creationId xmlns:a16="http://schemas.microsoft.com/office/drawing/2014/main" id="{285F1960-9EE0-1E32-FC59-F9E490A8341A}"/>
+              </a:ext>
+            </a:extLst>
+          </p:cNvPr>
+          <p:cNvSpPr txBox="1"/>
+          <p:nvPr/>
+        </p:nvSpPr>
+        <p:spPr>
+          <a:xfrm>
+            <a:off x="2265623" y="5877272"/>
+            <a:ext cx="7660754" cy="338554"/>
+          </a:xfrm>
+          <a:prstGeom prst="rect">
+            <a:avLst/>
+          </a:prstGeom>
+          <a:noFill/>
+        </p:spPr>
+        <p:txBody>
+          <a:bodyPr wrap="square" rtlCol="0">
+            <a:spAutoFit/>
+          </a:bodyPr>
+          <a:lstStyle/>
+          <a:p>
+            <a:pPr algn="ctr"/>
+            <a:r>
+              <a:rPr lang="nl-BE" sz="1600" dirty="0"/>
+              <a:t>Fig. 1: Voorbeeld van een </a:t>
+            </a:r>
+            <a:r>
+              <a:rPr lang="nl-BE" sz="1600" dirty="0" err="1"/>
+              <a:t>fortunately-unfortunately</a:t>
+            </a:r>
+            <a:r>
+              <a:rPr lang="nl-BE" sz="1600" dirty="0"/>
+              <a:t> tree</a:t>
+            </a:r>
           </a:p>
         </p:txBody>
       </p:sp>
@@ -36434,13 +37164,16 @@
             <a:pPr algn="ctr"/>
             <a:r>
               <a:rPr lang="nl-BE" sz="1600" dirty="0"/>
-              <a:t>Fig. X: Voorbeeld van een </a:t>
+              <a:t>Fig. 2: Voorbeeld van een </a:t>
             </a:r>
             <a:r>
               <a:rPr lang="nl-BE" sz="1600" dirty="0" err="1"/>
               <a:t>treemap</a:t>
             </a:r>
-            <a:endParaRPr lang="nl-BE" sz="1600" dirty="0"/>
+            <a:r>
+              <a:rPr lang="nl-BE" sz="1600" dirty="0"/>
+              <a:t> [9]</a:t>
+            </a:r>
           </a:p>
         </p:txBody>
       </p:sp>
@@ -36458,8 +37191,8 @@
         </p:nvSpPr>
         <p:spPr>
           <a:xfrm>
-            <a:off x="6744071" y="5877272"/>
-            <a:ext cx="4224671" cy="338554"/>
+            <a:off x="6612258" y="5877272"/>
+            <a:ext cx="4680521" cy="338554"/>
           </a:xfrm>
           <a:prstGeom prst="rect">
             <a:avLst/>
@@ -36475,13 +37208,16 @@
             <a:pPr algn="ctr"/>
             <a:r>
               <a:rPr lang="nl-BE" sz="1600" dirty="0"/>
-              <a:t>Fig. X: Voorbeeld van een circulaire </a:t>
+              <a:t>Fig. 3: Voorbeeld van een circulaire </a:t>
             </a:r>
             <a:r>
               <a:rPr lang="nl-BE" sz="1600" dirty="0" err="1"/>
               <a:t>treemap</a:t>
             </a:r>
-            <a:endParaRPr lang="nl-BE" sz="1600" dirty="0"/>
+            <a:r>
+              <a:rPr lang="nl-BE" sz="1600" dirty="0"/>
+              <a:t> [10]</a:t>
+            </a:r>
           </a:p>
         </p:txBody>
       </p:sp>
@@ -36516,7 +37252,7 @@
             <a:pPr algn="ctr"/>
             <a:r>
               <a:rPr lang="nl-BE" sz="1600" dirty="0"/>
-              <a:t>Fig. X: Voorbeeld van een hi-tree</a:t>
+              <a:t>Fig. 4: Voorbeeld van een hi-tree [8]</a:t>
             </a:r>
           </a:p>
         </p:txBody>

--- a/MP2526_Verdediging.pptx
+++ b/MP2526_Verdediging.pptx
@@ -22397,7 +22397,7 @@
               <a:pPr>
                 <a:defRPr/>
               </a:pPr>
-              <a:t>29-1-2026</a:t>
+              <a:t>30-1-2026</a:t>
             </a:fld>
             <a:endParaRPr lang="nl-NL"/>
           </a:p>
@@ -27777,129 +27777,6 @@
           </a:prstGeom>
         </p:spPr>
       </p:pic>
-      <p:sp>
-        <p:nvSpPr>
-          <p:cNvPr id="12" name="Tekstvak 11">
-            <a:extLst>
-              <a:ext uri="{FF2B5EF4-FFF2-40B4-BE49-F238E27FC236}">
-                <a16:creationId xmlns:a16="http://schemas.microsoft.com/office/drawing/2014/main" id="{901C8C06-10DC-7B5A-DC4E-EC1EA9F18E40}"/>
-              </a:ext>
-            </a:extLst>
-          </p:cNvPr>
-          <p:cNvSpPr txBox="1"/>
-          <p:nvPr/>
-        </p:nvSpPr>
-        <p:spPr>
-          <a:xfrm>
-            <a:off x="3592573" y="5805264"/>
-            <a:ext cx="4833374" cy="230832"/>
-          </a:xfrm>
-          <a:prstGeom prst="rect">
-            <a:avLst/>
-          </a:prstGeom>
-          <a:noFill/>
-        </p:spPr>
-        <p:txBody>
-          <a:bodyPr wrap="none" rtlCol="0">
-            <a:spAutoFit/>
-          </a:bodyPr>
-          <a:lstStyle/>
-          <a:p>
-            <a:r>
-              <a:rPr lang="nl-BE" sz="900" dirty="0">
-                <a:hlinkClick r:id="rId5"/>
-              </a:rPr>
-              <a:t>https://www.cosmicjs.com/blog/nextjs-15-vs-16-building-modern-blogs-in-the-turbopack-era</a:t>
-            </a:r>
-            <a:endParaRPr lang="nl-BE" sz="900" dirty="0"/>
-          </a:p>
-        </p:txBody>
-      </p:sp>
-      <p:sp>
-        <p:nvSpPr>
-          <p:cNvPr id="13" name="Tekstvak 12">
-            <a:extLst>
-              <a:ext uri="{FF2B5EF4-FFF2-40B4-BE49-F238E27FC236}">
-                <a16:creationId xmlns:a16="http://schemas.microsoft.com/office/drawing/2014/main" id="{50172859-1719-B292-5773-C9342BC32D0F}"/>
-              </a:ext>
-            </a:extLst>
-          </p:cNvPr>
-          <p:cNvSpPr txBox="1"/>
-          <p:nvPr/>
-        </p:nvSpPr>
-        <p:spPr>
-          <a:xfrm>
-            <a:off x="9222625" y="5723964"/>
-            <a:ext cx="1697911" cy="369332"/>
-          </a:xfrm>
-          <a:prstGeom prst="rect">
-            <a:avLst/>
-          </a:prstGeom>
-          <a:noFill/>
-        </p:spPr>
-        <p:txBody>
-          <a:bodyPr wrap="square" rtlCol="0">
-            <a:spAutoFit/>
-          </a:bodyPr>
-          <a:lstStyle/>
-          <a:p>
-            <a:r>
-              <a:rPr lang="nl-BE" dirty="0">
-                <a:hlinkClick r:id="rId6"/>
-              </a:rPr>
-              <a:t>https://d3js.org</a:t>
-            </a:r>
-            <a:endParaRPr lang="nl-BE" dirty="0"/>
-          </a:p>
-        </p:txBody>
-      </p:sp>
-      <p:sp>
-        <p:nvSpPr>
-          <p:cNvPr id="14" name="Tekstvak 13">
-            <a:extLst>
-              <a:ext uri="{FF2B5EF4-FFF2-40B4-BE49-F238E27FC236}">
-                <a16:creationId xmlns:a16="http://schemas.microsoft.com/office/drawing/2014/main" id="{1AEC0763-B9A1-2F21-4CE6-78D7AF048908}"/>
-              </a:ext>
-            </a:extLst>
-          </p:cNvPr>
-          <p:cNvSpPr txBox="1"/>
-          <p:nvPr/>
-        </p:nvSpPr>
-        <p:spPr>
-          <a:xfrm>
-            <a:off x="1036441" y="5651956"/>
-            <a:ext cx="2016224" cy="369332"/>
-          </a:xfrm>
-          <a:prstGeom prst="rect">
-            <a:avLst/>
-          </a:prstGeom>
-          <a:noFill/>
-        </p:spPr>
-        <p:txBody>
-          <a:bodyPr wrap="square" rtlCol="0">
-            <a:spAutoFit/>
-          </a:bodyPr>
-          <a:lstStyle/>
-          <a:p>
-            <a:r>
-              <a:rPr lang="nl-BE" dirty="0">
-                <a:solidFill>
-                  <a:srgbClr val="0000FF"/>
-                </a:solidFill>
-                <a:hlinkClick r:id="rId7">
-                  <a:extLst>
-                    <a:ext uri="{A12FA001-AC4F-418D-AE19-62706E023703}">
-                      <ahyp:hlinkClr xmlns:ahyp="http://schemas.microsoft.com/office/drawing/2018/hyperlinkcolor" val="tx"/>
-                    </a:ext>
-                  </a:extLst>
-                </a:hlinkClick>
-              </a:rPr>
-              <a:t>https://react.dev</a:t>
-            </a:r>
-            <a:endParaRPr lang="nl-BE" dirty="0"/>
-          </a:p>
-        </p:txBody>
-      </p:sp>
       <p:pic>
         <p:nvPicPr>
           <p:cNvPr id="1026" name="Picture 2" descr="cover image">
@@ -27915,7 +27792,7 @@
           <p:nvPr/>
         </p:nvPicPr>
         <p:blipFill>
-          <a:blip r:embed="rId8" cstate="print">
+          <a:blip r:embed="rId5" cstate="print">
             <a:extLst>
               <a:ext uri="{28A0092B-C50C-407E-A947-70E740481C1C}">
                 <a14:useLocalDpi xmlns:a14="http://schemas.microsoft.com/office/drawing/2010/main" val="0"/>
@@ -27986,7 +27863,7 @@
             </a:r>
             <a:r>
               <a:rPr lang="nl-BE" sz="1600" dirty="0"/>
-              <a:t> logo</a:t>
+              <a:t> logo [11]</a:t>
             </a:r>
           </a:p>
         </p:txBody>
@@ -28022,7 +27899,7 @@
             <a:pPr algn="ctr"/>
             <a:r>
               <a:rPr lang="nl-BE" sz="1600" dirty="0"/>
-              <a:t>Fig. 6: Next.js logo</a:t>
+              <a:t>Fig. 6: Next.js logo [12]</a:t>
             </a:r>
           </a:p>
         </p:txBody>
@@ -28058,7 +27935,7 @@
             <a:pPr algn="ctr"/>
             <a:r>
               <a:rPr lang="nl-BE" sz="1600" dirty="0"/>
-              <a:t>Fig. 7: D3-library logo</a:t>
+              <a:t>Fig. 7: D3-library logo [13]</a:t>
             </a:r>
           </a:p>
         </p:txBody>
@@ -30565,6 +30442,190 @@
           </a:p>
         </p:txBody>
       </p:sp>
+      <p:sp>
+        <p:nvSpPr>
+          <p:cNvPr id="16" name="Pijl: omhoog 15">
+            <a:extLst>
+              <a:ext uri="{FF2B5EF4-FFF2-40B4-BE49-F238E27FC236}">
+                <a16:creationId xmlns:a16="http://schemas.microsoft.com/office/drawing/2014/main" id="{B1AF2C07-0BDF-5172-112A-5E89D3975852}"/>
+              </a:ext>
+            </a:extLst>
+          </p:cNvPr>
+          <p:cNvSpPr/>
+          <p:nvPr/>
+        </p:nvSpPr>
+        <p:spPr>
+          <a:xfrm rot="5400000">
+            <a:off x="6980151" y="2112965"/>
+            <a:ext cx="432048" cy="656344"/>
+          </a:xfrm>
+          <a:prstGeom prst="upArrow">
+            <a:avLst/>
+          </a:prstGeom>
+        </p:spPr>
+        <p:style>
+          <a:lnRef idx="2">
+            <a:schemeClr val="dk1">
+              <a:shade val="15000"/>
+            </a:schemeClr>
+          </a:lnRef>
+          <a:fillRef idx="1">
+            <a:schemeClr val="dk1"/>
+          </a:fillRef>
+          <a:effectRef idx="0">
+            <a:schemeClr val="dk1"/>
+          </a:effectRef>
+          <a:fontRef idx="minor">
+            <a:schemeClr val="lt1"/>
+          </a:fontRef>
+        </p:style>
+        <p:txBody>
+          <a:bodyPr rtlCol="0" anchor="ctr"/>
+          <a:lstStyle/>
+          <a:p>
+            <a:pPr algn="ctr"/>
+            <a:endParaRPr lang="nl-BE"/>
+          </a:p>
+        </p:txBody>
+      </p:sp>
+      <p:sp>
+        <p:nvSpPr>
+          <p:cNvPr id="17" name="Pijl: omhoog 16">
+            <a:extLst>
+              <a:ext uri="{FF2B5EF4-FFF2-40B4-BE49-F238E27FC236}">
+                <a16:creationId xmlns:a16="http://schemas.microsoft.com/office/drawing/2014/main" id="{4DB8ABFE-870F-351C-412D-5E9AE2AF7767}"/>
+              </a:ext>
+            </a:extLst>
+          </p:cNvPr>
+          <p:cNvSpPr/>
+          <p:nvPr/>
+        </p:nvSpPr>
+        <p:spPr>
+          <a:xfrm rot="5400000">
+            <a:off x="8443808" y="3244844"/>
+            <a:ext cx="432048" cy="656344"/>
+          </a:xfrm>
+          <a:prstGeom prst="upArrow">
+            <a:avLst/>
+          </a:prstGeom>
+        </p:spPr>
+        <p:style>
+          <a:lnRef idx="2">
+            <a:schemeClr val="dk1">
+              <a:shade val="15000"/>
+            </a:schemeClr>
+          </a:lnRef>
+          <a:fillRef idx="1">
+            <a:schemeClr val="dk1"/>
+          </a:fillRef>
+          <a:effectRef idx="0">
+            <a:schemeClr val="dk1"/>
+          </a:effectRef>
+          <a:fontRef idx="minor">
+            <a:schemeClr val="lt1"/>
+          </a:fontRef>
+        </p:style>
+        <p:txBody>
+          <a:bodyPr rtlCol="0" anchor="ctr"/>
+          <a:lstStyle/>
+          <a:p>
+            <a:pPr algn="ctr"/>
+            <a:endParaRPr lang="nl-BE"/>
+          </a:p>
+        </p:txBody>
+      </p:sp>
+      <p:sp>
+        <p:nvSpPr>
+          <p:cNvPr id="18" name="Pijl: omhoog 17">
+            <a:extLst>
+              <a:ext uri="{FF2B5EF4-FFF2-40B4-BE49-F238E27FC236}">
+                <a16:creationId xmlns:a16="http://schemas.microsoft.com/office/drawing/2014/main" id="{DF8233AB-7AED-150C-A00C-B8CD77388612}"/>
+              </a:ext>
+            </a:extLst>
+          </p:cNvPr>
+          <p:cNvSpPr/>
+          <p:nvPr/>
+        </p:nvSpPr>
+        <p:spPr>
+          <a:xfrm rot="5400000">
+            <a:off x="7761623" y="4281570"/>
+            <a:ext cx="432048" cy="656344"/>
+          </a:xfrm>
+          <a:prstGeom prst="upArrow">
+            <a:avLst/>
+          </a:prstGeom>
+        </p:spPr>
+        <p:style>
+          <a:lnRef idx="2">
+            <a:schemeClr val="dk1">
+              <a:shade val="15000"/>
+            </a:schemeClr>
+          </a:lnRef>
+          <a:fillRef idx="1">
+            <a:schemeClr val="dk1"/>
+          </a:fillRef>
+          <a:effectRef idx="0">
+            <a:schemeClr val="dk1"/>
+          </a:effectRef>
+          <a:fontRef idx="minor">
+            <a:schemeClr val="lt1"/>
+          </a:fontRef>
+        </p:style>
+        <p:txBody>
+          <a:bodyPr rtlCol="0" anchor="ctr"/>
+          <a:lstStyle/>
+          <a:p>
+            <a:pPr algn="ctr"/>
+            <a:endParaRPr lang="nl-BE"/>
+          </a:p>
+        </p:txBody>
+      </p:sp>
+      <p:sp>
+        <p:nvSpPr>
+          <p:cNvPr id="19" name="Pijl: omhoog 18">
+            <a:extLst>
+              <a:ext uri="{FF2B5EF4-FFF2-40B4-BE49-F238E27FC236}">
+                <a16:creationId xmlns:a16="http://schemas.microsoft.com/office/drawing/2014/main" id="{52589B5B-AEA8-8407-D37C-21A969F8C8D9}"/>
+              </a:ext>
+            </a:extLst>
+          </p:cNvPr>
+          <p:cNvSpPr/>
+          <p:nvPr/>
+        </p:nvSpPr>
+        <p:spPr>
+          <a:xfrm rot="5400000">
+            <a:off x="7761623" y="2637145"/>
+            <a:ext cx="432048" cy="656344"/>
+          </a:xfrm>
+          <a:prstGeom prst="upArrow">
+            <a:avLst/>
+          </a:prstGeom>
+        </p:spPr>
+        <p:style>
+          <a:lnRef idx="2">
+            <a:schemeClr val="dk1">
+              <a:shade val="15000"/>
+            </a:schemeClr>
+          </a:lnRef>
+          <a:fillRef idx="1">
+            <a:schemeClr val="dk1"/>
+          </a:fillRef>
+          <a:effectRef idx="0">
+            <a:schemeClr val="dk1"/>
+          </a:effectRef>
+          <a:fontRef idx="minor">
+            <a:schemeClr val="lt1"/>
+          </a:fontRef>
+        </p:style>
+        <p:txBody>
+          <a:bodyPr rtlCol="0" anchor="ctr"/>
+          <a:lstStyle/>
+          <a:p>
+            <a:pPr algn="ctr"/>
+            <a:endParaRPr lang="nl-BE"/>
+          </a:p>
+        </p:txBody>
+      </p:sp>
     </p:spTree>
     <p:extLst>
       <p:ext uri="{BB962C8B-B14F-4D97-AF65-F5344CB8AC3E}">
@@ -30575,6 +30636,622 @@
   <p:clrMapOvr>
     <a:masterClrMapping/>
   </p:clrMapOvr>
+  <p:timing>
+    <p:tnLst>
+      <p:par>
+        <p:cTn id="1" dur="indefinite" restart="never" nodeType="tmRoot">
+          <p:childTnLst>
+            <p:seq concurrent="1" nextAc="seek">
+              <p:cTn id="2" dur="indefinite" nodeType="mainSeq">
+                <p:childTnLst>
+                  <p:par>
+                    <p:cTn id="3" fill="hold">
+                      <p:stCondLst>
+                        <p:cond delay="indefinite"/>
+                      </p:stCondLst>
+                      <p:childTnLst>
+                        <p:par>
+                          <p:cTn id="4" fill="hold">
+                            <p:stCondLst>
+                              <p:cond delay="0"/>
+                            </p:stCondLst>
+                            <p:childTnLst>
+                              <p:par>
+                                <p:cTn id="5" presetID="42" presetClass="entr" presetSubtype="0" fill="hold" grpId="0" nodeType="clickEffect">
+                                  <p:stCondLst>
+                                    <p:cond delay="0"/>
+                                  </p:stCondLst>
+                                  <p:childTnLst>
+                                    <p:set>
+                                      <p:cBhvr>
+                                        <p:cTn id="6" dur="1" fill="hold">
+                                          <p:stCondLst>
+                                            <p:cond delay="0"/>
+                                          </p:stCondLst>
+                                        </p:cTn>
+                                        <p:tgtEl>
+                                          <p:spTgt spid="16"/>
+                                        </p:tgtEl>
+                                        <p:attrNameLst>
+                                          <p:attrName>style.visibility</p:attrName>
+                                        </p:attrNameLst>
+                                      </p:cBhvr>
+                                      <p:to>
+                                        <p:strVal val="visible"/>
+                                      </p:to>
+                                    </p:set>
+                                    <p:animEffect transition="in" filter="fade">
+                                      <p:cBhvr>
+                                        <p:cTn id="7" dur="250"/>
+                                        <p:tgtEl>
+                                          <p:spTgt spid="16"/>
+                                        </p:tgtEl>
+                                      </p:cBhvr>
+                                    </p:animEffect>
+                                    <p:anim calcmode="lin" valueType="num">
+                                      <p:cBhvr>
+                                        <p:cTn id="8" dur="250" fill="hold"/>
+                                        <p:tgtEl>
+                                          <p:spTgt spid="16"/>
+                                        </p:tgtEl>
+                                        <p:attrNameLst>
+                                          <p:attrName>ppt_x</p:attrName>
+                                        </p:attrNameLst>
+                                      </p:cBhvr>
+                                      <p:tavLst>
+                                        <p:tav tm="0">
+                                          <p:val>
+                                            <p:strVal val="#ppt_x"/>
+                                          </p:val>
+                                        </p:tav>
+                                        <p:tav tm="100000">
+                                          <p:val>
+                                            <p:strVal val="#ppt_x"/>
+                                          </p:val>
+                                        </p:tav>
+                                      </p:tavLst>
+                                    </p:anim>
+                                    <p:anim calcmode="lin" valueType="num">
+                                      <p:cBhvr>
+                                        <p:cTn id="9" dur="250" fill="hold"/>
+                                        <p:tgtEl>
+                                          <p:spTgt spid="16"/>
+                                        </p:tgtEl>
+                                        <p:attrNameLst>
+                                          <p:attrName>ppt_y</p:attrName>
+                                        </p:attrNameLst>
+                                      </p:cBhvr>
+                                      <p:tavLst>
+                                        <p:tav tm="0">
+                                          <p:val>
+                                            <p:strVal val="#ppt_y+.1"/>
+                                          </p:val>
+                                        </p:tav>
+                                        <p:tav tm="100000">
+                                          <p:val>
+                                            <p:strVal val="#ppt_y"/>
+                                          </p:val>
+                                        </p:tav>
+                                      </p:tavLst>
+                                    </p:anim>
+                                  </p:childTnLst>
+                                </p:cTn>
+                              </p:par>
+                            </p:childTnLst>
+                          </p:cTn>
+                        </p:par>
+                      </p:childTnLst>
+                    </p:cTn>
+                  </p:par>
+                  <p:par>
+                    <p:cTn id="10" fill="hold">
+                      <p:stCondLst>
+                        <p:cond delay="indefinite"/>
+                      </p:stCondLst>
+                      <p:childTnLst>
+                        <p:par>
+                          <p:cTn id="11" fill="hold">
+                            <p:stCondLst>
+                              <p:cond delay="0"/>
+                            </p:stCondLst>
+                            <p:childTnLst>
+                              <p:par>
+                                <p:cTn id="12" presetID="1" presetClass="exit" presetSubtype="0" fill="hold" grpId="1" nodeType="clickEffect">
+                                  <p:stCondLst>
+                                    <p:cond delay="0"/>
+                                  </p:stCondLst>
+                                  <p:childTnLst>
+                                    <p:set>
+                                      <p:cBhvr>
+                                        <p:cTn id="13" dur="1" fill="hold">
+                                          <p:stCondLst>
+                                            <p:cond delay="0"/>
+                                          </p:stCondLst>
+                                        </p:cTn>
+                                        <p:tgtEl>
+                                          <p:spTgt spid="16"/>
+                                        </p:tgtEl>
+                                        <p:attrNameLst>
+                                          <p:attrName>style.visibility</p:attrName>
+                                        </p:attrNameLst>
+                                      </p:cBhvr>
+                                      <p:to>
+                                        <p:strVal val="hidden"/>
+                                      </p:to>
+                                    </p:set>
+                                  </p:childTnLst>
+                                </p:cTn>
+                              </p:par>
+                            </p:childTnLst>
+                          </p:cTn>
+                        </p:par>
+                      </p:childTnLst>
+                    </p:cTn>
+                  </p:par>
+                  <p:par>
+                    <p:cTn id="14" fill="hold">
+                      <p:stCondLst>
+                        <p:cond delay="indefinite"/>
+                      </p:stCondLst>
+                      <p:childTnLst>
+                        <p:par>
+                          <p:cTn id="15" fill="hold">
+                            <p:stCondLst>
+                              <p:cond delay="0"/>
+                            </p:stCondLst>
+                            <p:childTnLst>
+                              <p:par>
+                                <p:cTn id="16" presetID="42" presetClass="entr" presetSubtype="0" fill="hold" grpId="0" nodeType="clickEffect">
+                                  <p:stCondLst>
+                                    <p:cond delay="0"/>
+                                  </p:stCondLst>
+                                  <p:childTnLst>
+                                    <p:set>
+                                      <p:cBhvr>
+                                        <p:cTn id="17" dur="1" fill="hold">
+                                          <p:stCondLst>
+                                            <p:cond delay="0"/>
+                                          </p:stCondLst>
+                                        </p:cTn>
+                                        <p:tgtEl>
+                                          <p:spTgt spid="17"/>
+                                        </p:tgtEl>
+                                        <p:attrNameLst>
+                                          <p:attrName>style.visibility</p:attrName>
+                                        </p:attrNameLst>
+                                      </p:cBhvr>
+                                      <p:to>
+                                        <p:strVal val="visible"/>
+                                      </p:to>
+                                    </p:set>
+                                    <p:animEffect transition="in" filter="fade">
+                                      <p:cBhvr>
+                                        <p:cTn id="18" dur="250"/>
+                                        <p:tgtEl>
+                                          <p:spTgt spid="17"/>
+                                        </p:tgtEl>
+                                      </p:cBhvr>
+                                    </p:animEffect>
+                                    <p:anim calcmode="lin" valueType="num">
+                                      <p:cBhvr>
+                                        <p:cTn id="19" dur="250" fill="hold"/>
+                                        <p:tgtEl>
+                                          <p:spTgt spid="17"/>
+                                        </p:tgtEl>
+                                        <p:attrNameLst>
+                                          <p:attrName>ppt_x</p:attrName>
+                                        </p:attrNameLst>
+                                      </p:cBhvr>
+                                      <p:tavLst>
+                                        <p:tav tm="0">
+                                          <p:val>
+                                            <p:strVal val="#ppt_x"/>
+                                          </p:val>
+                                        </p:tav>
+                                        <p:tav tm="100000">
+                                          <p:val>
+                                            <p:strVal val="#ppt_x"/>
+                                          </p:val>
+                                        </p:tav>
+                                      </p:tavLst>
+                                    </p:anim>
+                                    <p:anim calcmode="lin" valueType="num">
+                                      <p:cBhvr>
+                                        <p:cTn id="20" dur="250" fill="hold"/>
+                                        <p:tgtEl>
+                                          <p:spTgt spid="17"/>
+                                        </p:tgtEl>
+                                        <p:attrNameLst>
+                                          <p:attrName>ppt_y</p:attrName>
+                                        </p:attrNameLst>
+                                      </p:cBhvr>
+                                      <p:tavLst>
+                                        <p:tav tm="0">
+                                          <p:val>
+                                            <p:strVal val="#ppt_y+.1"/>
+                                          </p:val>
+                                        </p:tav>
+                                        <p:tav tm="100000">
+                                          <p:val>
+                                            <p:strVal val="#ppt_y"/>
+                                          </p:val>
+                                        </p:tav>
+                                      </p:tavLst>
+                                    </p:anim>
+                                  </p:childTnLst>
+                                </p:cTn>
+                              </p:par>
+                            </p:childTnLst>
+                          </p:cTn>
+                        </p:par>
+                      </p:childTnLst>
+                    </p:cTn>
+                  </p:par>
+                  <p:par>
+                    <p:cTn id="21" fill="hold">
+                      <p:stCondLst>
+                        <p:cond delay="indefinite"/>
+                      </p:stCondLst>
+                      <p:childTnLst>
+                        <p:par>
+                          <p:cTn id="22" fill="hold">
+                            <p:stCondLst>
+                              <p:cond delay="0"/>
+                            </p:stCondLst>
+                            <p:childTnLst>
+                              <p:par>
+                                <p:cTn id="23" presetID="1" presetClass="exit" presetSubtype="0" fill="hold" grpId="1" nodeType="clickEffect">
+                                  <p:stCondLst>
+                                    <p:cond delay="0"/>
+                                  </p:stCondLst>
+                                  <p:childTnLst>
+                                    <p:set>
+                                      <p:cBhvr>
+                                        <p:cTn id="24" dur="1" fill="hold">
+                                          <p:stCondLst>
+                                            <p:cond delay="0"/>
+                                          </p:stCondLst>
+                                        </p:cTn>
+                                        <p:tgtEl>
+                                          <p:spTgt spid="17"/>
+                                        </p:tgtEl>
+                                        <p:attrNameLst>
+                                          <p:attrName>style.visibility</p:attrName>
+                                        </p:attrNameLst>
+                                      </p:cBhvr>
+                                      <p:to>
+                                        <p:strVal val="hidden"/>
+                                      </p:to>
+                                    </p:set>
+                                  </p:childTnLst>
+                                </p:cTn>
+                              </p:par>
+                            </p:childTnLst>
+                          </p:cTn>
+                        </p:par>
+                      </p:childTnLst>
+                    </p:cTn>
+                  </p:par>
+                  <p:par>
+                    <p:cTn id="25" fill="hold">
+                      <p:stCondLst>
+                        <p:cond delay="indefinite"/>
+                      </p:stCondLst>
+                      <p:childTnLst>
+                        <p:par>
+                          <p:cTn id="26" fill="hold">
+                            <p:stCondLst>
+                              <p:cond delay="0"/>
+                            </p:stCondLst>
+                            <p:childTnLst>
+                              <p:par>
+                                <p:cTn id="27" presetID="42" presetClass="entr" presetSubtype="0" fill="hold" grpId="0" nodeType="clickEffect">
+                                  <p:stCondLst>
+                                    <p:cond delay="0"/>
+                                  </p:stCondLst>
+                                  <p:childTnLst>
+                                    <p:set>
+                                      <p:cBhvr>
+                                        <p:cTn id="28" dur="1" fill="hold">
+                                          <p:stCondLst>
+                                            <p:cond delay="0"/>
+                                          </p:stCondLst>
+                                        </p:cTn>
+                                        <p:tgtEl>
+                                          <p:spTgt spid="18"/>
+                                        </p:tgtEl>
+                                        <p:attrNameLst>
+                                          <p:attrName>style.visibility</p:attrName>
+                                        </p:attrNameLst>
+                                      </p:cBhvr>
+                                      <p:to>
+                                        <p:strVal val="visible"/>
+                                      </p:to>
+                                    </p:set>
+                                    <p:animEffect transition="in" filter="fade">
+                                      <p:cBhvr>
+                                        <p:cTn id="29" dur="250"/>
+                                        <p:tgtEl>
+                                          <p:spTgt spid="18"/>
+                                        </p:tgtEl>
+                                      </p:cBhvr>
+                                    </p:animEffect>
+                                    <p:anim calcmode="lin" valueType="num">
+                                      <p:cBhvr>
+                                        <p:cTn id="30" dur="250" fill="hold"/>
+                                        <p:tgtEl>
+                                          <p:spTgt spid="18"/>
+                                        </p:tgtEl>
+                                        <p:attrNameLst>
+                                          <p:attrName>ppt_x</p:attrName>
+                                        </p:attrNameLst>
+                                      </p:cBhvr>
+                                      <p:tavLst>
+                                        <p:tav tm="0">
+                                          <p:val>
+                                            <p:strVal val="#ppt_x"/>
+                                          </p:val>
+                                        </p:tav>
+                                        <p:tav tm="100000">
+                                          <p:val>
+                                            <p:strVal val="#ppt_x"/>
+                                          </p:val>
+                                        </p:tav>
+                                      </p:tavLst>
+                                    </p:anim>
+                                    <p:anim calcmode="lin" valueType="num">
+                                      <p:cBhvr>
+                                        <p:cTn id="31" dur="250" fill="hold"/>
+                                        <p:tgtEl>
+                                          <p:spTgt spid="18"/>
+                                        </p:tgtEl>
+                                        <p:attrNameLst>
+                                          <p:attrName>ppt_y</p:attrName>
+                                        </p:attrNameLst>
+                                      </p:cBhvr>
+                                      <p:tavLst>
+                                        <p:tav tm="0">
+                                          <p:val>
+                                            <p:strVal val="#ppt_y+.1"/>
+                                          </p:val>
+                                        </p:tav>
+                                        <p:tav tm="100000">
+                                          <p:val>
+                                            <p:strVal val="#ppt_y"/>
+                                          </p:val>
+                                        </p:tav>
+                                      </p:tavLst>
+                                    </p:anim>
+                                  </p:childTnLst>
+                                </p:cTn>
+                              </p:par>
+                            </p:childTnLst>
+                          </p:cTn>
+                        </p:par>
+                      </p:childTnLst>
+                    </p:cTn>
+                  </p:par>
+                  <p:par>
+                    <p:cTn id="32" fill="hold">
+                      <p:stCondLst>
+                        <p:cond delay="indefinite"/>
+                      </p:stCondLst>
+                      <p:childTnLst>
+                        <p:par>
+                          <p:cTn id="33" fill="hold">
+                            <p:stCondLst>
+                              <p:cond delay="0"/>
+                            </p:stCondLst>
+                            <p:childTnLst>
+                              <p:par>
+                                <p:cTn id="34" presetID="1" presetClass="exit" presetSubtype="0" fill="hold" grpId="1" nodeType="clickEffect">
+                                  <p:stCondLst>
+                                    <p:cond delay="0"/>
+                                  </p:stCondLst>
+                                  <p:childTnLst>
+                                    <p:set>
+                                      <p:cBhvr>
+                                        <p:cTn id="35" dur="1" fill="hold">
+                                          <p:stCondLst>
+                                            <p:cond delay="0"/>
+                                          </p:stCondLst>
+                                        </p:cTn>
+                                        <p:tgtEl>
+                                          <p:spTgt spid="18"/>
+                                        </p:tgtEl>
+                                        <p:attrNameLst>
+                                          <p:attrName>style.visibility</p:attrName>
+                                        </p:attrNameLst>
+                                      </p:cBhvr>
+                                      <p:to>
+                                        <p:strVal val="hidden"/>
+                                      </p:to>
+                                    </p:set>
+                                  </p:childTnLst>
+                                </p:cTn>
+                              </p:par>
+                            </p:childTnLst>
+                          </p:cTn>
+                        </p:par>
+                      </p:childTnLst>
+                    </p:cTn>
+                  </p:par>
+                  <p:par>
+                    <p:cTn id="36" fill="hold">
+                      <p:stCondLst>
+                        <p:cond delay="indefinite"/>
+                      </p:stCondLst>
+                      <p:childTnLst>
+                        <p:par>
+                          <p:cTn id="37" fill="hold">
+                            <p:stCondLst>
+                              <p:cond delay="0"/>
+                            </p:stCondLst>
+                            <p:childTnLst>
+                              <p:par>
+                                <p:cTn id="38" presetID="42" presetClass="entr" presetSubtype="0" fill="hold" grpId="0" nodeType="clickEffect">
+                                  <p:stCondLst>
+                                    <p:cond delay="0"/>
+                                  </p:stCondLst>
+                                  <p:childTnLst>
+                                    <p:set>
+                                      <p:cBhvr>
+                                        <p:cTn id="39" dur="1" fill="hold">
+                                          <p:stCondLst>
+                                            <p:cond delay="0"/>
+                                          </p:stCondLst>
+                                        </p:cTn>
+                                        <p:tgtEl>
+                                          <p:spTgt spid="19"/>
+                                        </p:tgtEl>
+                                        <p:attrNameLst>
+                                          <p:attrName>style.visibility</p:attrName>
+                                        </p:attrNameLst>
+                                      </p:cBhvr>
+                                      <p:to>
+                                        <p:strVal val="visible"/>
+                                      </p:to>
+                                    </p:set>
+                                    <p:animEffect transition="in" filter="fade">
+                                      <p:cBhvr>
+                                        <p:cTn id="40" dur="250"/>
+                                        <p:tgtEl>
+                                          <p:spTgt spid="19"/>
+                                        </p:tgtEl>
+                                      </p:cBhvr>
+                                    </p:animEffect>
+                                    <p:anim calcmode="lin" valueType="num">
+                                      <p:cBhvr>
+                                        <p:cTn id="41" dur="250" fill="hold"/>
+                                        <p:tgtEl>
+                                          <p:spTgt spid="19"/>
+                                        </p:tgtEl>
+                                        <p:attrNameLst>
+                                          <p:attrName>ppt_x</p:attrName>
+                                        </p:attrNameLst>
+                                      </p:cBhvr>
+                                      <p:tavLst>
+                                        <p:tav tm="0">
+                                          <p:val>
+                                            <p:strVal val="#ppt_x"/>
+                                          </p:val>
+                                        </p:tav>
+                                        <p:tav tm="100000">
+                                          <p:val>
+                                            <p:strVal val="#ppt_x"/>
+                                          </p:val>
+                                        </p:tav>
+                                      </p:tavLst>
+                                    </p:anim>
+                                    <p:anim calcmode="lin" valueType="num">
+                                      <p:cBhvr>
+                                        <p:cTn id="42" dur="250" fill="hold"/>
+                                        <p:tgtEl>
+                                          <p:spTgt spid="19"/>
+                                        </p:tgtEl>
+                                        <p:attrNameLst>
+                                          <p:attrName>ppt_y</p:attrName>
+                                        </p:attrNameLst>
+                                      </p:cBhvr>
+                                      <p:tavLst>
+                                        <p:tav tm="0">
+                                          <p:val>
+                                            <p:strVal val="#ppt_y+.1"/>
+                                          </p:val>
+                                        </p:tav>
+                                        <p:tav tm="100000">
+                                          <p:val>
+                                            <p:strVal val="#ppt_y"/>
+                                          </p:val>
+                                        </p:tav>
+                                      </p:tavLst>
+                                    </p:anim>
+                                  </p:childTnLst>
+                                </p:cTn>
+                              </p:par>
+                            </p:childTnLst>
+                          </p:cTn>
+                        </p:par>
+                      </p:childTnLst>
+                    </p:cTn>
+                  </p:par>
+                  <p:par>
+                    <p:cTn id="43" fill="hold">
+                      <p:stCondLst>
+                        <p:cond delay="indefinite"/>
+                      </p:stCondLst>
+                      <p:childTnLst>
+                        <p:par>
+                          <p:cTn id="44" fill="hold">
+                            <p:stCondLst>
+                              <p:cond delay="0"/>
+                            </p:stCondLst>
+                            <p:childTnLst>
+                              <p:par>
+                                <p:cTn id="45" presetID="1" presetClass="exit" presetSubtype="0" fill="hold" grpId="1" nodeType="clickEffect">
+                                  <p:stCondLst>
+                                    <p:cond delay="0"/>
+                                  </p:stCondLst>
+                                  <p:childTnLst>
+                                    <p:set>
+                                      <p:cBhvr>
+                                        <p:cTn id="46" dur="1" fill="hold">
+                                          <p:stCondLst>
+                                            <p:cond delay="0"/>
+                                          </p:stCondLst>
+                                        </p:cTn>
+                                        <p:tgtEl>
+                                          <p:spTgt spid="19"/>
+                                        </p:tgtEl>
+                                        <p:attrNameLst>
+                                          <p:attrName>style.visibility</p:attrName>
+                                        </p:attrNameLst>
+                                      </p:cBhvr>
+                                      <p:to>
+                                        <p:strVal val="hidden"/>
+                                      </p:to>
+                                    </p:set>
+                                  </p:childTnLst>
+                                </p:cTn>
+                              </p:par>
+                            </p:childTnLst>
+                          </p:cTn>
+                        </p:par>
+                      </p:childTnLst>
+                    </p:cTn>
+                  </p:par>
+                </p:childTnLst>
+              </p:cTn>
+              <p:prevCondLst>
+                <p:cond evt="onPrev" delay="0">
+                  <p:tgtEl>
+                    <p:sldTgt/>
+                  </p:tgtEl>
+                </p:cond>
+              </p:prevCondLst>
+              <p:nextCondLst>
+                <p:cond evt="onNext" delay="0">
+                  <p:tgtEl>
+                    <p:sldTgt/>
+                  </p:tgtEl>
+                </p:cond>
+              </p:nextCondLst>
+            </p:seq>
+          </p:childTnLst>
+        </p:cTn>
+      </p:par>
+    </p:tnLst>
+    <p:bldLst>
+      <p:bldP spid="16" grpId="0" animBg="1"/>
+      <p:bldP spid="16" grpId="1" animBg="1"/>
+      <p:bldP spid="17" grpId="0" animBg="1"/>
+      <p:bldP spid="17" grpId="1" animBg="1"/>
+      <p:bldP spid="18" grpId="0" animBg="1"/>
+      <p:bldP spid="18" grpId="1" animBg="1"/>
+      <p:bldP spid="19" grpId="0" animBg="1"/>
+      <p:bldP spid="19" grpId="1" animBg="1"/>
+    </p:bldLst>
+  </p:timing>
 </p:sld>
 </file>
 
@@ -33931,7 +34608,7 @@
             </a:r>
             <a:r>
               <a:rPr lang="en-US" sz="1400" dirty="0"/>
-              <a:t>[17]Meta, “React,” </a:t>
+              <a:t>Meta, “React,” </a:t>
             </a:r>
             <a:r>
               <a:rPr lang="en-US" sz="1400" dirty="0" err="1"/>

--- a/MP2526_Verdediging.pptx
+++ b/MP2526_Verdediging.pptx
@@ -7498,15 +7498,7 @@
           </a:r>
           <a:r>
             <a:rPr lang="nl-BE" dirty="0"/>
-            <a:t> </a:t>
-          </a:r>
-          <a:r>
-            <a:rPr lang="nl-BE" dirty="0" err="1"/>
-            <a:t>Quiestionnaire</a:t>
-          </a:r>
-          <a:r>
-            <a:rPr lang="nl-BE" dirty="0"/>
-            <a:t> (UEQ) [14]</a:t>
+            <a:t> Questionnaire (UEQ) [14]</a:t>
           </a:r>
           <a:endParaRPr lang="en-US" dirty="0"/>
         </a:p>
@@ -7579,21 +7571,14 @@
         <a:lstStyle/>
         <a:p>
           <a:r>
-            <a:rPr lang="en-US" dirty="0" err="1"/>
-            <a:t>Ondertekende</a:t>
-          </a:r>
-          <a:r>
             <a:rPr lang="en-US" dirty="0"/>
-            <a:t> </a:t>
+            <a:t>Informed </a:t>
           </a:r>
           <a:r>
             <a:rPr lang="en-US" dirty="0" err="1"/>
-            <a:t>een</a:t>
+            <a:t>consentformulier</a:t>
           </a:r>
-          <a:r>
-            <a:rPr lang="en-US" dirty="0"/>
-            <a:t> informed consent</a:t>
-          </a:r>
+          <a:endParaRPr lang="en-US" dirty="0"/>
         </a:p>
       </dgm:t>
     </dgm:pt>
@@ -8293,7 +8278,7 @@
 <dgm:dataModel xmlns:dgm="http://schemas.openxmlformats.org/drawingml/2006/diagram" xmlns:a="http://schemas.openxmlformats.org/drawingml/2006/main">
   <dgm:ptLst>
     <dgm:pt modelId="{424BC47A-3345-48C8-A87F-D6E04AAA26E9}" type="doc">
-      <dgm:prSet loTypeId="urn:microsoft.com/office/officeart/2005/8/layout/vList2" loCatId="list" qsTypeId="urn:microsoft.com/office/officeart/2005/8/quickstyle/simple1" qsCatId="simple" csTypeId="urn:microsoft.com/office/officeart/2005/8/colors/accent1_2" csCatId="accent1"/>
+      <dgm:prSet loTypeId="urn:microsoft.com/office/officeart/2005/8/layout/vList2" loCatId="list" qsTypeId="urn:microsoft.com/office/officeart/2005/8/quickstyle/simple1" qsCatId="simple" csTypeId="urn:microsoft.com/office/officeart/2005/8/colors/accent1_2" csCatId="accent1" phldr="1"/>
       <dgm:spPr/>
       <dgm:t>
         <a:bodyPr/>
@@ -8373,7 +8358,7 @@
         <a:p>
           <a:r>
             <a:rPr lang="nl-BE" sz="2000" dirty="0"/>
-            <a:t>Node-creatie</a:t>
+            <a:t>Node-creatie/-deletie</a:t>
           </a:r>
           <a:endParaRPr lang="en-US" sz="2000" dirty="0"/>
         </a:p>
@@ -11489,21 +11474,14 @@
             <a:buChar char="•"/>
           </a:pPr>
           <a:r>
-            <a:rPr lang="en-US" sz="2200" kern="1200" dirty="0" err="1"/>
-            <a:t>Ondertekende</a:t>
-          </a:r>
-          <a:r>
             <a:rPr lang="en-US" sz="2200" kern="1200" dirty="0"/>
-            <a:t> </a:t>
+            <a:t>Informed </a:t>
           </a:r>
           <a:r>
             <a:rPr lang="en-US" sz="2200" kern="1200" dirty="0" err="1"/>
-            <a:t>een</a:t>
+            <a:t>consentformulier</a:t>
           </a:r>
-          <a:r>
-            <a:rPr lang="en-US" sz="2200" kern="1200" dirty="0"/>
-            <a:t> informed consent</a:t>
-          </a:r>
+          <a:endParaRPr lang="en-US" sz="2200" kern="1200" dirty="0"/>
         </a:p>
       </dsp:txBody>
       <dsp:txXfrm>
@@ -11702,15 +11680,7 @@
           </a:r>
           <a:r>
             <a:rPr lang="nl-BE" sz="2200" kern="1200" dirty="0"/>
-            <a:t> </a:t>
-          </a:r>
-          <a:r>
-            <a:rPr lang="nl-BE" sz="2200" kern="1200" dirty="0" err="1"/>
-            <a:t>Quiestionnaire</a:t>
-          </a:r>
-          <a:r>
-            <a:rPr lang="nl-BE" sz="2200" kern="1200" dirty="0"/>
-            <a:t> (UEQ) [14]</a:t>
+            <a:t> Questionnaire (UEQ) [14]</a:t>
           </a:r>
           <a:endParaRPr lang="en-US" sz="2200" kern="1200" dirty="0"/>
         </a:p>
@@ -12563,7 +12533,7 @@
           </a:pPr>
           <a:r>
             <a:rPr lang="nl-BE" sz="2000" kern="1200" dirty="0"/>
-            <a:t>Node-creatie</a:t>
+            <a:t>Node-creatie/-deletie</a:t>
           </a:r>
           <a:endParaRPr lang="en-US" sz="2000" kern="1200" dirty="0"/>
         </a:p>
@@ -32247,7 +32217,7 @@
             <p:ph idx="1"/>
             <p:extLst>
               <p:ext uri="{D42A27DB-BD31-4B8C-83A1-F6EECF244321}">
-                <p14:modId xmlns:p14="http://schemas.microsoft.com/office/powerpoint/2010/main" val="2718585810"/>
+                <p14:modId xmlns:p14="http://schemas.microsoft.com/office/powerpoint/2010/main" val="3978550204"/>
               </p:ext>
             </p:extLst>
           </p:nvPr>
@@ -32455,8 +32425,8 @@
         </p:blipFill>
         <p:spPr>
           <a:xfrm>
-            <a:off x="609600" y="2193787"/>
-            <a:ext cx="5384800" cy="2719323"/>
+            <a:off x="85659" y="1736811"/>
+            <a:ext cx="6701738" cy="3384376"/>
           </a:xfrm>
           <a:prstGeom prst="rect">
             <a:avLst/>
@@ -32518,8 +32488,8 @@
         </p:nvSpPr>
         <p:spPr>
           <a:xfrm>
-            <a:off x="6197602" y="980731"/>
-            <a:ext cx="5384800" cy="5145435"/>
+            <a:off x="6721541" y="2204865"/>
+            <a:ext cx="5384800" cy="2448269"/>
           </a:xfrm>
         </p:spPr>
         <p:txBody>
@@ -32578,7 +32548,7 @@
         </p:nvSpPr>
         <p:spPr>
           <a:xfrm>
-            <a:off x="609598" y="4797152"/>
+            <a:off x="623392" y="4951910"/>
             <a:ext cx="5342386" cy="338554"/>
           </a:xfrm>
           <a:prstGeom prst="rect">
@@ -33487,7 +33457,7 @@
             <p:ph sz="half" idx="10"/>
             <p:extLst>
               <p:ext uri="{D42A27DB-BD31-4B8C-83A1-F6EECF244321}">
-                <p14:modId xmlns:p14="http://schemas.microsoft.com/office/powerpoint/2010/main" val="3389578620"/>
+                <p14:modId xmlns:p14="http://schemas.microsoft.com/office/powerpoint/2010/main" val="874378001"/>
               </p:ext>
             </p:extLst>
           </p:nvPr>

--- a/MP2526_Verdediging.pptx
+++ b/MP2526_Verdediging.pptx
@@ -29854,9 +29854,9 @@
         <p:grpSpPr>
           <a:xfrm>
             <a:off x="251302" y="1268760"/>
-            <a:ext cx="5405118" cy="3312368"/>
+            <a:ext cx="5405118" cy="3298509"/>
             <a:chOff x="0" y="0"/>
-            <a:chExt cx="2971800" cy="1821180"/>
+            <a:chExt cx="2971800" cy="1813560"/>
           </a:xfrm>
         </p:grpSpPr>
         <p:pic>
@@ -29931,42 +29931,6 @@
         </p:pic>
         <p:pic>
           <p:nvPicPr>
-            <p:cNvPr id="7" name="Afbeelding 6" descr="Afbeelding met schermopname, clipart, ontwerp&#10;&#10;Door AI gegenereerde inhoud is mogelijk onjuist.">
-              <a:extLst>
-                <a:ext uri="{FF2B5EF4-FFF2-40B4-BE49-F238E27FC236}">
-                  <a16:creationId xmlns:a16="http://schemas.microsoft.com/office/drawing/2014/main" id="{20C45C50-845A-86B0-BA24-2F669D8B8FB8}"/>
-                </a:ext>
-              </a:extLst>
-            </p:cNvPr>
-            <p:cNvPicPr>
-              <a:picLocks noChangeAspect="1"/>
-            </p:cNvPicPr>
-            <p:nvPr/>
-          </p:nvPicPr>
-          <p:blipFill>
-            <a:blip r:embed="rId5">
-              <a:extLst>
-                <a:ext uri="{28A0092B-C50C-407E-A947-70E740481C1C}">
-                  <a14:useLocalDpi xmlns:a14="http://schemas.microsoft.com/office/drawing/2010/main" val="0"/>
-                </a:ext>
-              </a:extLst>
-            </a:blip>
-            <a:stretch>
-              <a:fillRect/>
-            </a:stretch>
-          </p:blipFill>
-          <p:spPr>
-            <a:xfrm>
-              <a:off x="2125980" y="1051560"/>
-              <a:ext cx="838200" cy="769620"/>
-            </a:xfrm>
-            <a:prstGeom prst="rect">
-              <a:avLst/>
-            </a:prstGeom>
-          </p:spPr>
-        </p:pic>
-        <p:pic>
-          <p:nvPicPr>
             <p:cNvPr id="8" name="Afbeelding 7" descr="Afbeelding met schermopname, diagram, symbool, ontwerp&#10;&#10;Door AI gegenereerde inhoud is mogelijk onjuist.">
               <a:extLst>
                 <a:ext uri="{FF2B5EF4-FFF2-40B4-BE49-F238E27FC236}">
@@ -29980,7 +29944,7 @@
             <p:nvPr/>
           </p:nvPicPr>
           <p:blipFill>
-            <a:blip r:embed="rId6">
+            <a:blip r:embed="rId5">
               <a:extLst>
                 <a:ext uri="{28A0092B-C50C-407E-A947-70E740481C1C}">
                   <a14:useLocalDpi xmlns:a14="http://schemas.microsoft.com/office/drawing/2010/main" val="0"/>
@@ -30353,7 +30317,7 @@
           <p:nvPr/>
         </p:nvPicPr>
         <p:blipFill>
-          <a:blip r:embed="rId7"/>
+          <a:blip r:embed="rId6"/>
           <a:stretch>
             <a:fillRect/>
           </a:stretch>
@@ -30596,6 +30560,36 @@
           </a:p>
         </p:txBody>
       </p:sp>
+      <p:pic>
+        <p:nvPicPr>
+          <p:cNvPr id="21" name="Afbeelding 20" descr="Afbeelding met tekst, schermopname, Lettertype, diagram&#10;&#10;Door AI gegenereerde inhoud is mogelijk onjuist.">
+            <a:extLst>
+              <a:ext uri="{FF2B5EF4-FFF2-40B4-BE49-F238E27FC236}">
+                <a16:creationId xmlns:a16="http://schemas.microsoft.com/office/drawing/2014/main" id="{A058C131-0103-A0D1-F19E-D52E2F2D0D9A}"/>
+              </a:ext>
+            </a:extLst>
+          </p:cNvPr>
+          <p:cNvPicPr>
+            <a:picLocks noChangeAspect="1"/>
+          </p:cNvPicPr>
+          <p:nvPr/>
+        </p:nvPicPr>
+        <p:blipFill>
+          <a:blip r:embed="rId7"/>
+          <a:stretch>
+            <a:fillRect/>
+          </a:stretch>
+        </p:blipFill>
+        <p:spPr>
+          <a:xfrm>
+            <a:off x="4128823" y="3282351"/>
+            <a:ext cx="1491665" cy="1298777"/>
+          </a:xfrm>
+          <a:prstGeom prst="rect">
+            <a:avLst/>
+          </a:prstGeom>
+        </p:spPr>
+      </p:pic>
     </p:spTree>
     <p:extLst>
       <p:ext uri="{BB962C8B-B14F-4D97-AF65-F5344CB8AC3E}">
